--- a/presentations/out/Подробный осмотр и опрос пострадавшего.pptx
+++ b/presentations/out/Подробный осмотр и опрос пострадавшего.pptx
@@ -15,6 +15,13 @@
     <p:sldId id="263" r:id="rId14"/>
     <p:sldId id="264" r:id="rId15"/>
     <p:sldId id="265" r:id="rId16"/>
+    <p:sldId id="266" r:id="rId17"/>
+    <p:sldId id="267" r:id="rId18"/>
+    <p:sldId id="268" r:id="rId19"/>
+    <p:sldId id="269" r:id="rId20"/>
+    <p:sldId id="270" r:id="rId21"/>
+    <p:sldId id="271" r:id="rId22"/>
+    <p:sldId id="272" r:id="rId23"/>
   </p:sldIdLst>
   <p:sldSz cx="12191695" cy="6858000" type="screen4x3"/>
   <p:notesSz cx="6858000" cy="9144000"/>
@@ -3371,6 +3378,4277 @@
         <p:spPr>
           <a:xfrm>
             <a:off x="0" y="0"/>
+            <a:ext cx="12191695" cy="6858000"/>
+          </a:xfrm>
+          <a:prstGeom prst="rect">
+            <a:avLst/>
+          </a:prstGeom>
+          <a:solidFill>
+            <a:srgbClr val="FFFFFF"/>
+          </a:solidFill>
+          <a:ln>
+            <a:noFill/>
+          </a:ln>
+        </p:spPr>
+        <p:style>
+          <a:lnRef idx="1">
+            <a:schemeClr val="accent1"/>
+          </a:lnRef>
+          <a:fillRef idx="3">
+            <a:schemeClr val="accent1"/>
+          </a:fillRef>
+          <a:effectRef idx="2">
+            <a:schemeClr val="accent1"/>
+          </a:effectRef>
+          <a:fontRef idx="minor">
+            <a:schemeClr val="lt1"/>
+          </a:fontRef>
+        </p:style>
+        <p:txBody>
+          <a:bodyPr rtlCol="0" anchor="ctr"/>
+          <a:lstStyle/>
+          <a:p>
+            <a:pPr algn="ctr"/>
+          </a:p>
+        </p:txBody>
+      </p:sp>
+      <p:sp>
+        <p:nvSpPr>
+          <p:cNvPr id="3" name="TextBox 2"/>
+          <p:cNvSpPr txBox="1"/>
+          <p:nvPr/>
+        </p:nvSpPr>
+        <p:spPr>
+          <a:xfrm>
+            <a:off x="700000" y="250000"/>
+            <a:ext cx="11200000" cy="550000"/>
+          </a:xfrm>
+          <a:prstGeom prst="rect">
+            <a:avLst/>
+          </a:prstGeom>
+          <a:noFill/>
+        </p:spPr>
+        <p:txBody>
+          <a:bodyPr wrap="square" anchor="t">
+            <a:spAutoFit/>
+          </a:bodyPr>
+          <a:lstStyle/>
+          <a:p>
+            <a:pPr algn="l"/>
+            <a:r>
+              <a:rPr sz="2200" b="1">
+                <a:solidFill>
+                  <a:srgbClr val="333333"/>
+                </a:solidFill>
+                <a:latin typeface="Open Sans"/>
+                <a:ea typeface="Open Sans"/>
+                <a:cs typeface="Open Sans"/>
+              </a:rPr>
+              <a:t>ЖИВОТ И ТАЗ: НАРУЖНЫЕ ПРИЗНАКИ СКРЫТОЙ ТРАВМЫ</a:t>
+            </a:r>
+          </a:p>
+        </p:txBody>
+      </p:sp>
+      <p:sp>
+        <p:nvSpPr>
+          <p:cNvPr id="4" name="Rectangle 3"/>
+          <p:cNvSpPr/>
+          <p:nvPr/>
+        </p:nvSpPr>
+        <p:spPr>
+          <a:xfrm>
+            <a:off x="700000" y="850000"/>
+            <a:ext cx="9000000" cy="28000"/>
+          </a:xfrm>
+          <a:prstGeom prst="rect">
+            <a:avLst/>
+          </a:prstGeom>
+          <a:solidFill>
+            <a:srgbClr val="555555"/>
+          </a:solidFill>
+          <a:ln>
+            <a:noFill/>
+          </a:ln>
+        </p:spPr>
+        <p:style>
+          <a:lnRef idx="1">
+            <a:schemeClr val="accent1"/>
+          </a:lnRef>
+          <a:fillRef idx="3">
+            <a:schemeClr val="accent1"/>
+          </a:fillRef>
+          <a:effectRef idx="2">
+            <a:schemeClr val="accent1"/>
+          </a:effectRef>
+          <a:fontRef idx="minor">
+            <a:schemeClr val="lt1"/>
+          </a:fontRef>
+        </p:style>
+        <p:txBody>
+          <a:bodyPr rtlCol="0" anchor="ctr"/>
+          <a:lstStyle/>
+          <a:p>
+            <a:pPr algn="ctr"/>
+          </a:p>
+        </p:txBody>
+      </p:sp>
+      <p:sp>
+        <p:nvSpPr>
+          <p:cNvPr id="5" name="TextBox 4"/>
+          <p:cNvSpPr txBox="1"/>
+          <p:nvPr/>
+        </p:nvSpPr>
+        <p:spPr>
+          <a:xfrm>
+            <a:off x="700000" y="920000"/>
+            <a:ext cx="11000000" cy="350000"/>
+          </a:xfrm>
+          <a:prstGeom prst="rect">
+            <a:avLst/>
+          </a:prstGeom>
+          <a:noFill/>
+        </p:spPr>
+        <p:txBody>
+          <a:bodyPr wrap="square" anchor="t">
+            <a:spAutoFit/>
+          </a:bodyPr>
+          <a:lstStyle/>
+          <a:p>
+            <a:pPr algn="l"/>
+            <a:r>
+              <a:rPr sz="1200" b="0">
+                <a:solidFill>
+                  <a:srgbClr val="666666"/>
+                </a:solidFill>
+                <a:latin typeface="Open Sans"/>
+                <a:ea typeface="Open Sans"/>
+                <a:cs typeface="Open Sans"/>
+              </a:rPr>
+              <a:t>Оказание первой помощи при травмах, ранениях и поражениях, прочих состояниях</a:t>
+            </a:r>
+          </a:p>
+        </p:txBody>
+      </p:sp>
+      <p:sp>
+        <p:nvSpPr>
+          <p:cNvPr id="6" name="Rectangle 5"/>
+          <p:cNvSpPr/>
+          <p:nvPr/>
+        </p:nvSpPr>
+        <p:spPr>
+          <a:xfrm>
+            <a:off x="0" y="2800000"/>
+            <a:ext cx="420000" cy="420000"/>
+          </a:xfrm>
+          <a:prstGeom prst="rect">
+            <a:avLst/>
+          </a:prstGeom>
+          <a:solidFill>
+            <a:srgbClr val="555555"/>
+          </a:solidFill>
+          <a:ln>
+            <a:noFill/>
+          </a:ln>
+        </p:spPr>
+        <p:style>
+          <a:lnRef idx="1">
+            <a:schemeClr val="accent1"/>
+          </a:lnRef>
+          <a:fillRef idx="3">
+            <a:schemeClr val="accent1"/>
+          </a:fillRef>
+          <a:effectRef idx="2">
+            <a:schemeClr val="accent1"/>
+          </a:effectRef>
+          <a:fontRef idx="minor">
+            <a:schemeClr val="lt1"/>
+          </a:fontRef>
+        </p:style>
+        <p:txBody>
+          <a:bodyPr rtlCol="0" anchor="ctr"/>
+          <a:lstStyle/>
+          <a:p>
+            <a:pPr algn="ctr"/>
+          </a:p>
+        </p:txBody>
+      </p:sp>
+      <p:sp>
+        <p:nvSpPr>
+          <p:cNvPr id="7" name="TextBox 6"/>
+          <p:cNvSpPr txBox="1"/>
+          <p:nvPr/>
+        </p:nvSpPr>
+        <p:spPr>
+          <a:xfrm>
+            <a:off x="0" y="2800000"/>
+            <a:ext cx="420000" cy="420000"/>
+          </a:xfrm>
+          <a:prstGeom prst="rect">
+            <a:avLst/>
+          </a:prstGeom>
+          <a:noFill/>
+        </p:spPr>
+        <p:txBody>
+          <a:bodyPr wrap="square" anchor="ctr">
+            <a:spAutoFit/>
+          </a:bodyPr>
+          <a:lstStyle/>
+          <a:p>
+            <a:pPr algn="ctr"/>
+            <a:r>
+              <a:rPr sz="1400" b="1">
+                <a:solidFill>
+                  <a:srgbClr val="FFFFFF"/>
+                </a:solidFill>
+                <a:latin typeface="Open Sans"/>
+                <a:ea typeface="Open Sans"/>
+                <a:cs typeface="Open Sans"/>
+              </a:rPr>
+              <a:t>10</a:t>
+            </a:r>
+          </a:p>
+        </p:txBody>
+      </p:sp>
+      <p:pic>
+        <p:nvPicPr>
+          <p:cNvPr id="8" name="Picture 7" descr="fig59.jpeg"/>
+          <p:cNvPicPr>
+            <a:picLocks noChangeAspect="1"/>
+          </p:cNvPicPr>
+          <p:nvPr/>
+        </p:nvPicPr>
+        <p:blipFill>
+          <a:blip r:embed="rId2"/>
+          <a:stretch>
+            <a:fillRect/>
+          </a:stretch>
+        </p:blipFill>
+        <p:spPr>
+          <a:xfrm>
+            <a:off x="500000" y="1455900"/>
+            <a:ext cx="5200000" cy="3988200"/>
+          </a:xfrm>
+          <a:prstGeom prst="rect">
+            <a:avLst/>
+          </a:prstGeom>
+        </p:spPr>
+      </p:pic>
+      <p:sp>
+        <p:nvSpPr>
+          <p:cNvPr id="9" name="TextBox 8"/>
+          <p:cNvSpPr txBox="1"/>
+          <p:nvPr/>
+        </p:nvSpPr>
+        <p:spPr>
+          <a:xfrm>
+            <a:off x="6000000" y="1450000"/>
+            <a:ext cx="6200000" cy="3800000"/>
+          </a:xfrm>
+          <a:prstGeom prst="rect">
+            <a:avLst/>
+          </a:prstGeom>
+          <a:noFill/>
+        </p:spPr>
+        <p:txBody>
+          <a:bodyPr wrap="square">
+            <a:spAutoFit/>
+          </a:bodyPr>
+          <a:lstStyle/>
+          <a:p>
+            <a:pPr algn="l">
+              <a:spcAft>
+                <a:spcPts val="800"/>
+              </a:spcAft>
+            </a:pPr>
+            <a:r>
+              <a:rPr sz="1300" b="0">
+                <a:solidFill>
+                  <a:srgbClr val="333333"/>
+                </a:solidFill>
+                <a:latin typeface="Open Sans"/>
+                <a:ea typeface="Open Sans"/>
+                <a:cs typeface="Open Sans"/>
+              </a:rPr>
+              <a:t>•  Осмотрите живот и область таза, обращая внимание на форму и симметрию.</a:t>
+            </a:r>
+          </a:p>
+          <a:p>
+            <a:pPr algn="l">
+              <a:spcAft>
+                <a:spcPts val="800"/>
+              </a:spcAft>
+            </a:pPr>
+            <a:r>
+              <a:rPr sz="1300" b="0">
+                <a:solidFill>
+                  <a:srgbClr val="333333"/>
+                </a:solidFill>
+                <a:latin typeface="Open Sans"/>
+                <a:ea typeface="Open Sans"/>
+                <a:cs typeface="Open Sans"/>
+              </a:rPr>
+              <a:t>•  Ищите раны, ссадины, кровоподтеки и следы удара ремнем или предметом.</a:t>
+            </a:r>
+          </a:p>
+          <a:p>
+            <a:pPr algn="l">
+              <a:spcAft>
+                <a:spcPts val="800"/>
+              </a:spcAft>
+            </a:pPr>
+            <a:r>
+              <a:rPr sz="1300" b="0">
+                <a:solidFill>
+                  <a:srgbClr val="333333"/>
+                </a:solidFill>
+                <a:latin typeface="Open Sans"/>
+                <a:ea typeface="Open Sans"/>
+                <a:cs typeface="Open Sans"/>
+              </a:rPr>
+              <a:t>•  Спросите о боли, тошноте, слабости и чувстве напряжения живота.</a:t>
+            </a:r>
+          </a:p>
+          <a:p>
+            <a:pPr algn="l">
+              <a:spcAft>
+                <a:spcPts val="800"/>
+              </a:spcAft>
+            </a:pPr>
+            <a:r>
+              <a:rPr sz="1300" b="0">
+                <a:solidFill>
+                  <a:srgbClr val="333333"/>
+                </a:solidFill>
+                <a:latin typeface="Open Sans"/>
+                <a:ea typeface="Open Sans"/>
+                <a:cs typeface="Open Sans"/>
+              </a:rPr>
+              <a:t>•  Осторожно оцените болезненность, не выполняя глубокого надавливания.</a:t>
+            </a:r>
+          </a:p>
+          <a:p>
+            <a:pPr algn="l">
+              <a:spcAft>
+                <a:spcPts val="800"/>
+              </a:spcAft>
+            </a:pPr>
+            <a:r>
+              <a:rPr sz="1300" b="0">
+                <a:solidFill>
+                  <a:srgbClr val="333333"/>
+                </a:solidFill>
+                <a:latin typeface="Open Sans"/>
+                <a:ea typeface="Open Sans"/>
+                <a:cs typeface="Open Sans"/>
+              </a:rPr>
+              <a:t>•  Таз не сжимайте и не пытайтесь проверить его подвижность.</a:t>
+            </a:r>
+          </a:p>
+        </p:txBody>
+      </p:sp>
+      <p:sp>
+        <p:nvSpPr>
+          <p:cNvPr id="10" name="Rounded Rectangle 9"/>
+          <p:cNvSpPr/>
+          <p:nvPr/>
+        </p:nvSpPr>
+        <p:spPr>
+          <a:xfrm>
+            <a:off x="6000000" y="5400000"/>
+            <a:ext cx="6200000" cy="1100000"/>
+          </a:xfrm>
+          <a:prstGeom prst="roundRect">
+            <a:avLst/>
+          </a:prstGeom>
+          <a:solidFill>
+            <a:srgbClr val="F5F0E1"/>
+          </a:solidFill>
+          <a:ln>
+            <a:noFill/>
+          </a:ln>
+        </p:spPr>
+        <p:style>
+          <a:lnRef idx="1">
+            <a:schemeClr val="accent1"/>
+          </a:lnRef>
+          <a:fillRef idx="3">
+            <a:schemeClr val="accent1"/>
+          </a:fillRef>
+          <a:effectRef idx="2">
+            <a:schemeClr val="accent1"/>
+          </a:effectRef>
+          <a:fontRef idx="minor">
+            <a:schemeClr val="lt1"/>
+          </a:fontRef>
+        </p:style>
+        <p:txBody>
+          <a:bodyPr rtlCol="0" anchor="ctr"/>
+          <a:lstStyle/>
+          <a:p>
+            <a:pPr algn="ctr"/>
+          </a:p>
+        </p:txBody>
+      </p:sp>
+      <p:sp>
+        <p:nvSpPr>
+          <p:cNvPr id="11" name="TextBox 10"/>
+          <p:cNvSpPr txBox="1"/>
+          <p:nvPr/>
+        </p:nvSpPr>
+        <p:spPr>
+          <a:xfrm>
+            <a:off x="6250000" y="5600000"/>
+            <a:ext cx="5700000" cy="700000"/>
+          </a:xfrm>
+          <a:prstGeom prst="rect">
+            <a:avLst/>
+          </a:prstGeom>
+          <a:noFill/>
+        </p:spPr>
+        <p:txBody>
+          <a:bodyPr wrap="square" anchor="ctr">
+            <a:spAutoFit/>
+          </a:bodyPr>
+          <a:lstStyle/>
+          <a:p>
+            <a:pPr algn="l"/>
+            <a:r>
+              <a:rPr sz="1200" b="0">
+                <a:solidFill>
+                  <a:srgbClr val="333333"/>
+                </a:solidFill>
+                <a:latin typeface="Open Sans"/>
+                <a:ea typeface="Open Sans"/>
+                <a:cs typeface="Open Sans"/>
+              </a:rPr>
+              <a:t>При боли в животе или подозрении на внутреннюю травму не давайте пострадавшему пищу и питье.</a:t>
+            </a:r>
+          </a:p>
+        </p:txBody>
+      </p:sp>
+    </p:spTree>
+  </p:cSld>
+  <p:clrMapOvr>
+    <a:masterClrMapping/>
+  </p:clrMapOvr>
+</p:sld>
+</file>
+
+<file path=ppt/slides/slide11.xml><?xml version="1.0" encoding="utf-8"?>
+<p:sld xmlns:a="http://schemas.openxmlformats.org/drawingml/2006/main" xmlns:p="http://schemas.openxmlformats.org/presentationml/2006/main" xmlns:r="http://schemas.openxmlformats.org/officeDocument/2006/relationships">
+  <p:cSld>
+    <p:spTree>
+      <p:nvGrpSpPr>
+        <p:cNvPr id="1" name=""/>
+        <p:cNvGrpSpPr/>
+        <p:nvPr/>
+      </p:nvGrpSpPr>
+      <p:grpSpPr/>
+      <p:sp>
+        <p:nvSpPr>
+          <p:cNvPr id="2" name="Rectangle 1"/>
+          <p:cNvSpPr/>
+          <p:nvPr/>
+        </p:nvSpPr>
+        <p:spPr>
+          <a:xfrm>
+            <a:off x="0" y="0"/>
+            <a:ext cx="12191695" cy="6858000"/>
+          </a:xfrm>
+          <a:prstGeom prst="rect">
+            <a:avLst/>
+          </a:prstGeom>
+          <a:solidFill>
+            <a:srgbClr val="FFFFFF"/>
+          </a:solidFill>
+          <a:ln>
+            <a:noFill/>
+          </a:ln>
+        </p:spPr>
+        <p:style>
+          <a:lnRef idx="1">
+            <a:schemeClr val="accent1"/>
+          </a:lnRef>
+          <a:fillRef idx="3">
+            <a:schemeClr val="accent1"/>
+          </a:fillRef>
+          <a:effectRef idx="2">
+            <a:schemeClr val="accent1"/>
+          </a:effectRef>
+          <a:fontRef idx="minor">
+            <a:schemeClr val="lt1"/>
+          </a:fontRef>
+        </p:style>
+        <p:txBody>
+          <a:bodyPr rtlCol="0" anchor="ctr"/>
+          <a:lstStyle/>
+          <a:p>
+            <a:pPr algn="ctr"/>
+          </a:p>
+        </p:txBody>
+      </p:sp>
+      <p:sp>
+        <p:nvSpPr>
+          <p:cNvPr id="3" name="TextBox 2"/>
+          <p:cNvSpPr txBox="1"/>
+          <p:nvPr/>
+        </p:nvSpPr>
+        <p:spPr>
+          <a:xfrm>
+            <a:off x="700000" y="250000"/>
+            <a:ext cx="11200000" cy="550000"/>
+          </a:xfrm>
+          <a:prstGeom prst="rect">
+            <a:avLst/>
+          </a:prstGeom>
+          <a:noFill/>
+        </p:spPr>
+        <p:txBody>
+          <a:bodyPr wrap="square" anchor="t">
+            <a:spAutoFit/>
+          </a:bodyPr>
+          <a:lstStyle/>
+          <a:p>
+            <a:pPr algn="l"/>
+            <a:r>
+              <a:rPr sz="2200" b="1">
+                <a:solidFill>
+                  <a:srgbClr val="333333"/>
+                </a:solidFill>
+                <a:latin typeface="Open Sans"/>
+                <a:ea typeface="Open Sans"/>
+                <a:cs typeface="Open Sans"/>
+              </a:rPr>
+              <a:t>ПРИЗНАКИ ЗАКРЫТОЙ ТРАВМЫ ЖИВОТА</a:t>
+            </a:r>
+          </a:p>
+        </p:txBody>
+      </p:sp>
+      <p:sp>
+        <p:nvSpPr>
+          <p:cNvPr id="4" name="Rectangle 3"/>
+          <p:cNvSpPr/>
+          <p:nvPr/>
+        </p:nvSpPr>
+        <p:spPr>
+          <a:xfrm>
+            <a:off x="700000" y="850000"/>
+            <a:ext cx="9000000" cy="28000"/>
+          </a:xfrm>
+          <a:prstGeom prst="rect">
+            <a:avLst/>
+          </a:prstGeom>
+          <a:solidFill>
+            <a:srgbClr val="555555"/>
+          </a:solidFill>
+          <a:ln>
+            <a:noFill/>
+          </a:ln>
+        </p:spPr>
+        <p:style>
+          <a:lnRef idx="1">
+            <a:schemeClr val="accent1"/>
+          </a:lnRef>
+          <a:fillRef idx="3">
+            <a:schemeClr val="accent1"/>
+          </a:fillRef>
+          <a:effectRef idx="2">
+            <a:schemeClr val="accent1"/>
+          </a:effectRef>
+          <a:fontRef idx="minor">
+            <a:schemeClr val="lt1"/>
+          </a:fontRef>
+        </p:style>
+        <p:txBody>
+          <a:bodyPr rtlCol="0" anchor="ctr"/>
+          <a:lstStyle/>
+          <a:p>
+            <a:pPr algn="ctr"/>
+          </a:p>
+        </p:txBody>
+      </p:sp>
+      <p:sp>
+        <p:nvSpPr>
+          <p:cNvPr id="5" name="TextBox 4"/>
+          <p:cNvSpPr txBox="1"/>
+          <p:nvPr/>
+        </p:nvSpPr>
+        <p:spPr>
+          <a:xfrm>
+            <a:off x="700000" y="920000"/>
+            <a:ext cx="11000000" cy="350000"/>
+          </a:xfrm>
+          <a:prstGeom prst="rect">
+            <a:avLst/>
+          </a:prstGeom>
+          <a:noFill/>
+        </p:spPr>
+        <p:txBody>
+          <a:bodyPr wrap="square" anchor="t">
+            <a:spAutoFit/>
+          </a:bodyPr>
+          <a:lstStyle/>
+          <a:p>
+            <a:pPr algn="l"/>
+            <a:r>
+              <a:rPr sz="1200" b="0">
+                <a:solidFill>
+                  <a:srgbClr val="666666"/>
+                </a:solidFill>
+                <a:latin typeface="Open Sans"/>
+                <a:ea typeface="Open Sans"/>
+                <a:cs typeface="Open Sans"/>
+              </a:rPr>
+              <a:t>Оказание первой помощи при травмах, ранениях и поражениях, прочих состояниях</a:t>
+            </a:r>
+          </a:p>
+        </p:txBody>
+      </p:sp>
+      <p:sp>
+        <p:nvSpPr>
+          <p:cNvPr id="6" name="Rectangle 5"/>
+          <p:cNvSpPr/>
+          <p:nvPr/>
+        </p:nvSpPr>
+        <p:spPr>
+          <a:xfrm>
+            <a:off x="0" y="2800000"/>
+            <a:ext cx="420000" cy="420000"/>
+          </a:xfrm>
+          <a:prstGeom prst="rect">
+            <a:avLst/>
+          </a:prstGeom>
+          <a:solidFill>
+            <a:srgbClr val="555555"/>
+          </a:solidFill>
+          <a:ln>
+            <a:noFill/>
+          </a:ln>
+        </p:spPr>
+        <p:style>
+          <a:lnRef idx="1">
+            <a:schemeClr val="accent1"/>
+          </a:lnRef>
+          <a:fillRef idx="3">
+            <a:schemeClr val="accent1"/>
+          </a:fillRef>
+          <a:effectRef idx="2">
+            <a:schemeClr val="accent1"/>
+          </a:effectRef>
+          <a:fontRef idx="minor">
+            <a:schemeClr val="lt1"/>
+          </a:fontRef>
+        </p:style>
+        <p:txBody>
+          <a:bodyPr rtlCol="0" anchor="ctr"/>
+          <a:lstStyle/>
+          <a:p>
+            <a:pPr algn="ctr"/>
+          </a:p>
+        </p:txBody>
+      </p:sp>
+      <p:sp>
+        <p:nvSpPr>
+          <p:cNvPr id="7" name="TextBox 6"/>
+          <p:cNvSpPr txBox="1"/>
+          <p:nvPr/>
+        </p:nvSpPr>
+        <p:spPr>
+          <a:xfrm>
+            <a:off x="0" y="2800000"/>
+            <a:ext cx="420000" cy="420000"/>
+          </a:xfrm>
+          <a:prstGeom prst="rect">
+            <a:avLst/>
+          </a:prstGeom>
+          <a:noFill/>
+        </p:spPr>
+        <p:txBody>
+          <a:bodyPr wrap="square" anchor="ctr">
+            <a:spAutoFit/>
+          </a:bodyPr>
+          <a:lstStyle/>
+          <a:p>
+            <a:pPr algn="ctr"/>
+            <a:r>
+              <a:rPr sz="1400" b="1">
+                <a:solidFill>
+                  <a:srgbClr val="FFFFFF"/>
+                </a:solidFill>
+                <a:latin typeface="Open Sans"/>
+                <a:ea typeface="Open Sans"/>
+                <a:cs typeface="Open Sans"/>
+              </a:rPr>
+              <a:t>11</a:t>
+            </a:r>
+          </a:p>
+        </p:txBody>
+      </p:sp>
+      <p:sp>
+        <p:nvSpPr>
+          <p:cNvPr id="8" name="TextBox 7"/>
+          <p:cNvSpPr txBox="1"/>
+          <p:nvPr/>
+        </p:nvSpPr>
+        <p:spPr>
+          <a:xfrm>
+            <a:off x="700000" y="1450000"/>
+            <a:ext cx="11000000" cy="4000000"/>
+          </a:xfrm>
+          <a:prstGeom prst="rect">
+            <a:avLst/>
+          </a:prstGeom>
+          <a:noFill/>
+        </p:spPr>
+        <p:txBody>
+          <a:bodyPr wrap="square">
+            <a:spAutoFit/>
+          </a:bodyPr>
+          <a:lstStyle/>
+          <a:p>
+            <a:pPr algn="l">
+              <a:spcAft>
+                <a:spcPts val="800"/>
+              </a:spcAft>
+            </a:pPr>
+            <a:r>
+              <a:rPr sz="1400" b="1">
+                <a:solidFill>
+                  <a:srgbClr val="CC0000"/>
+                </a:solidFill>
+                <a:latin typeface="Open Sans"/>
+                <a:ea typeface="Open Sans"/>
+                <a:cs typeface="Open Sans"/>
+              </a:rPr>
+              <a:t>•  Сильная или нарастающая боль, напряжение и вздутие живота</a:t>
+            </a:r>
+          </a:p>
+          <a:p>
+            <a:pPr algn="l">
+              <a:spcAft>
+                <a:spcPts val="800"/>
+              </a:spcAft>
+            </a:pPr>
+            <a:r>
+              <a:rPr sz="1400" b="0">
+                <a:solidFill>
+                  <a:srgbClr val="333333"/>
+                </a:solidFill>
+                <a:latin typeface="Open Sans"/>
+                <a:ea typeface="Open Sans"/>
+                <a:cs typeface="Open Sans"/>
+              </a:rPr>
+              <a:t>•  Кровоподтеки, ссадины или следы удара на передней и боковой поверхности</a:t>
+            </a:r>
+          </a:p>
+          <a:p>
+            <a:pPr algn="l">
+              <a:spcAft>
+                <a:spcPts val="800"/>
+              </a:spcAft>
+            </a:pPr>
+            <a:r>
+              <a:rPr sz="1400" b="1">
+                <a:solidFill>
+                  <a:srgbClr val="CC0000"/>
+                </a:solidFill>
+                <a:latin typeface="Open Sans"/>
+                <a:ea typeface="Open Sans"/>
+                <a:cs typeface="Open Sans"/>
+              </a:rPr>
+              <a:t>•  Бледность, холодный пот, выраженная слабость и жажда</a:t>
+            </a:r>
+          </a:p>
+          <a:p>
+            <a:pPr algn="l">
+              <a:spcAft>
+                <a:spcPts val="800"/>
+              </a:spcAft>
+            </a:pPr>
+            <a:r>
+              <a:rPr sz="1400" b="1">
+                <a:solidFill>
+                  <a:srgbClr val="CC0000"/>
+                </a:solidFill>
+                <a:latin typeface="Open Sans"/>
+                <a:ea typeface="Open Sans"/>
+                <a:cs typeface="Open Sans"/>
+              </a:rPr>
+              <a:t>•  Учащенное дыхание, беспокойство, заторможенность или потеря сознания</a:t>
+            </a:r>
+          </a:p>
+          <a:p>
+            <a:pPr algn="l">
+              <a:spcAft>
+                <a:spcPts val="800"/>
+              </a:spcAft>
+            </a:pPr>
+            <a:r>
+              <a:rPr sz="1400" b="0">
+                <a:solidFill>
+                  <a:srgbClr val="333333"/>
+                </a:solidFill>
+                <a:latin typeface="Open Sans"/>
+                <a:ea typeface="Open Sans"/>
+                <a:cs typeface="Open Sans"/>
+              </a:rPr>
+              <a:t>•  Тошнота, рвота, вынужденное положение с согнутыми ногами</a:t>
+            </a:r>
+          </a:p>
+        </p:txBody>
+      </p:sp>
+      <p:sp>
+        <p:nvSpPr>
+          <p:cNvPr id="9" name="Rounded Rectangle 8"/>
+          <p:cNvSpPr/>
+          <p:nvPr/>
+        </p:nvSpPr>
+        <p:spPr>
+          <a:xfrm>
+            <a:off x="700000" y="5600000"/>
+            <a:ext cx="11000000" cy="1000000"/>
+          </a:xfrm>
+          <a:prstGeom prst="roundRect">
+            <a:avLst/>
+          </a:prstGeom>
+          <a:solidFill>
+            <a:srgbClr val="F5F0E1"/>
+          </a:solidFill>
+          <a:ln>
+            <a:noFill/>
+          </a:ln>
+        </p:spPr>
+        <p:style>
+          <a:lnRef idx="1">
+            <a:schemeClr val="accent1"/>
+          </a:lnRef>
+          <a:fillRef idx="3">
+            <a:schemeClr val="accent1"/>
+          </a:fillRef>
+          <a:effectRef idx="2">
+            <a:schemeClr val="accent1"/>
+          </a:effectRef>
+          <a:fontRef idx="minor">
+            <a:schemeClr val="lt1"/>
+          </a:fontRef>
+        </p:style>
+        <p:txBody>
+          <a:bodyPr rtlCol="0" anchor="ctr"/>
+          <a:lstStyle/>
+          <a:p>
+            <a:pPr algn="ctr"/>
+          </a:p>
+        </p:txBody>
+      </p:sp>
+      <p:sp>
+        <p:nvSpPr>
+          <p:cNvPr id="10" name="TextBox 9"/>
+          <p:cNvSpPr txBox="1"/>
+          <p:nvPr/>
+        </p:nvSpPr>
+        <p:spPr>
+          <a:xfrm>
+            <a:off x="950000" y="5800000"/>
+            <a:ext cx="10500000" cy="600000"/>
+          </a:xfrm>
+          <a:prstGeom prst="rect">
+            <a:avLst/>
+          </a:prstGeom>
+          <a:noFill/>
+        </p:spPr>
+        <p:txBody>
+          <a:bodyPr wrap="square" anchor="ctr">
+            <a:spAutoFit/>
+          </a:bodyPr>
+          <a:lstStyle/>
+          <a:p>
+            <a:pPr algn="l"/>
+            <a:r>
+              <a:rPr sz="1200" b="0">
+                <a:solidFill>
+                  <a:srgbClr val="333333"/>
+                </a:solidFill>
+                <a:latin typeface="Open Sans"/>
+                <a:ea typeface="Open Sans"/>
+                <a:cs typeface="Open Sans"/>
+              </a:rPr>
+              <a:t>Наружная рана может отсутствовать. Обеспечьте покой, вызовите скорую помощь и постоянно контролируйте состояние.</a:t>
+            </a:r>
+          </a:p>
+        </p:txBody>
+      </p:sp>
+    </p:spTree>
+  </p:cSld>
+  <p:clrMapOvr>
+    <a:masterClrMapping/>
+  </p:clrMapOvr>
+</p:sld>
+</file>
+
+<file path=ppt/slides/slide12.xml><?xml version="1.0" encoding="utf-8"?>
+<p:sld xmlns:a="http://schemas.openxmlformats.org/drawingml/2006/main" xmlns:p="http://schemas.openxmlformats.org/presentationml/2006/main" xmlns:r="http://schemas.openxmlformats.org/officeDocument/2006/relationships">
+  <p:cSld>
+    <p:spTree>
+      <p:nvGrpSpPr>
+        <p:cNvPr id="1" name=""/>
+        <p:cNvGrpSpPr/>
+        <p:nvPr/>
+      </p:nvGrpSpPr>
+      <p:grpSpPr/>
+      <p:sp>
+        <p:nvSpPr>
+          <p:cNvPr id="2" name="Rectangle 1"/>
+          <p:cNvSpPr/>
+          <p:nvPr/>
+        </p:nvSpPr>
+        <p:spPr>
+          <a:xfrm>
+            <a:off x="0" y="0"/>
+            <a:ext cx="12191695" cy="6858000"/>
+          </a:xfrm>
+          <a:prstGeom prst="rect">
+            <a:avLst/>
+          </a:prstGeom>
+          <a:solidFill>
+            <a:srgbClr val="FFFFFF"/>
+          </a:solidFill>
+          <a:ln>
+            <a:noFill/>
+          </a:ln>
+        </p:spPr>
+        <p:style>
+          <a:lnRef idx="1">
+            <a:schemeClr val="accent1"/>
+          </a:lnRef>
+          <a:fillRef idx="3">
+            <a:schemeClr val="accent1"/>
+          </a:fillRef>
+          <a:effectRef idx="2">
+            <a:schemeClr val="accent1"/>
+          </a:effectRef>
+          <a:fontRef idx="minor">
+            <a:schemeClr val="lt1"/>
+          </a:fontRef>
+        </p:style>
+        <p:txBody>
+          <a:bodyPr rtlCol="0" anchor="ctr"/>
+          <a:lstStyle/>
+          <a:p>
+            <a:pPr algn="ctr"/>
+          </a:p>
+        </p:txBody>
+      </p:sp>
+      <p:sp>
+        <p:nvSpPr>
+          <p:cNvPr id="3" name="TextBox 2"/>
+          <p:cNvSpPr txBox="1"/>
+          <p:nvPr/>
+        </p:nvSpPr>
+        <p:spPr>
+          <a:xfrm>
+            <a:off x="700000" y="250000"/>
+            <a:ext cx="11200000" cy="550000"/>
+          </a:xfrm>
+          <a:prstGeom prst="rect">
+            <a:avLst/>
+          </a:prstGeom>
+          <a:noFill/>
+        </p:spPr>
+        <p:txBody>
+          <a:bodyPr wrap="square" anchor="t">
+            <a:spAutoFit/>
+          </a:bodyPr>
+          <a:lstStyle/>
+          <a:p>
+            <a:pPr algn="l"/>
+            <a:r>
+              <a:rPr sz="2200" b="1">
+                <a:solidFill>
+                  <a:srgbClr val="333333"/>
+                </a:solidFill>
+                <a:latin typeface="Open Sans"/>
+                <a:ea typeface="Open Sans"/>
+                <a:cs typeface="Open Sans"/>
+              </a:rPr>
+              <a:t>НОГИ: ОСМОТР ОТ ТАЗА К СТОПАМ</a:t>
+            </a:r>
+          </a:p>
+        </p:txBody>
+      </p:sp>
+      <p:sp>
+        <p:nvSpPr>
+          <p:cNvPr id="4" name="Rectangle 3"/>
+          <p:cNvSpPr/>
+          <p:nvPr/>
+        </p:nvSpPr>
+        <p:spPr>
+          <a:xfrm>
+            <a:off x="700000" y="850000"/>
+            <a:ext cx="9000000" cy="28000"/>
+          </a:xfrm>
+          <a:prstGeom prst="rect">
+            <a:avLst/>
+          </a:prstGeom>
+          <a:solidFill>
+            <a:srgbClr val="555555"/>
+          </a:solidFill>
+          <a:ln>
+            <a:noFill/>
+          </a:ln>
+        </p:spPr>
+        <p:style>
+          <a:lnRef idx="1">
+            <a:schemeClr val="accent1"/>
+          </a:lnRef>
+          <a:fillRef idx="3">
+            <a:schemeClr val="accent1"/>
+          </a:fillRef>
+          <a:effectRef idx="2">
+            <a:schemeClr val="accent1"/>
+          </a:effectRef>
+          <a:fontRef idx="minor">
+            <a:schemeClr val="lt1"/>
+          </a:fontRef>
+        </p:style>
+        <p:txBody>
+          <a:bodyPr rtlCol="0" anchor="ctr"/>
+          <a:lstStyle/>
+          <a:p>
+            <a:pPr algn="ctr"/>
+          </a:p>
+        </p:txBody>
+      </p:sp>
+      <p:sp>
+        <p:nvSpPr>
+          <p:cNvPr id="5" name="TextBox 4"/>
+          <p:cNvSpPr txBox="1"/>
+          <p:nvPr/>
+        </p:nvSpPr>
+        <p:spPr>
+          <a:xfrm>
+            <a:off x="700000" y="920000"/>
+            <a:ext cx="11000000" cy="350000"/>
+          </a:xfrm>
+          <a:prstGeom prst="rect">
+            <a:avLst/>
+          </a:prstGeom>
+          <a:noFill/>
+        </p:spPr>
+        <p:txBody>
+          <a:bodyPr wrap="square" anchor="t">
+            <a:spAutoFit/>
+          </a:bodyPr>
+          <a:lstStyle/>
+          <a:p>
+            <a:pPr algn="l"/>
+            <a:r>
+              <a:rPr sz="1200" b="0">
+                <a:solidFill>
+                  <a:srgbClr val="666666"/>
+                </a:solidFill>
+                <a:latin typeface="Open Sans"/>
+                <a:ea typeface="Open Sans"/>
+                <a:cs typeface="Open Sans"/>
+              </a:rPr>
+              <a:t>Оказание первой помощи при травмах, ранениях и поражениях, прочих состояниях</a:t>
+            </a:r>
+          </a:p>
+        </p:txBody>
+      </p:sp>
+      <p:sp>
+        <p:nvSpPr>
+          <p:cNvPr id="6" name="Rectangle 5"/>
+          <p:cNvSpPr/>
+          <p:nvPr/>
+        </p:nvSpPr>
+        <p:spPr>
+          <a:xfrm>
+            <a:off x="0" y="2800000"/>
+            <a:ext cx="420000" cy="420000"/>
+          </a:xfrm>
+          <a:prstGeom prst="rect">
+            <a:avLst/>
+          </a:prstGeom>
+          <a:solidFill>
+            <a:srgbClr val="555555"/>
+          </a:solidFill>
+          <a:ln>
+            <a:noFill/>
+          </a:ln>
+        </p:spPr>
+        <p:style>
+          <a:lnRef idx="1">
+            <a:schemeClr val="accent1"/>
+          </a:lnRef>
+          <a:fillRef idx="3">
+            <a:schemeClr val="accent1"/>
+          </a:fillRef>
+          <a:effectRef idx="2">
+            <a:schemeClr val="accent1"/>
+          </a:effectRef>
+          <a:fontRef idx="minor">
+            <a:schemeClr val="lt1"/>
+          </a:fontRef>
+        </p:style>
+        <p:txBody>
+          <a:bodyPr rtlCol="0" anchor="ctr"/>
+          <a:lstStyle/>
+          <a:p>
+            <a:pPr algn="ctr"/>
+          </a:p>
+        </p:txBody>
+      </p:sp>
+      <p:sp>
+        <p:nvSpPr>
+          <p:cNvPr id="7" name="TextBox 6"/>
+          <p:cNvSpPr txBox="1"/>
+          <p:nvPr/>
+        </p:nvSpPr>
+        <p:spPr>
+          <a:xfrm>
+            <a:off x="0" y="2800000"/>
+            <a:ext cx="420000" cy="420000"/>
+          </a:xfrm>
+          <a:prstGeom prst="rect">
+            <a:avLst/>
+          </a:prstGeom>
+          <a:noFill/>
+        </p:spPr>
+        <p:txBody>
+          <a:bodyPr wrap="square" anchor="ctr">
+            <a:spAutoFit/>
+          </a:bodyPr>
+          <a:lstStyle/>
+          <a:p>
+            <a:pPr algn="ctr"/>
+            <a:r>
+              <a:rPr sz="1400" b="1">
+                <a:solidFill>
+                  <a:srgbClr val="FFFFFF"/>
+                </a:solidFill>
+                <a:latin typeface="Open Sans"/>
+                <a:ea typeface="Open Sans"/>
+                <a:cs typeface="Open Sans"/>
+              </a:rPr>
+              <a:t>12</a:t>
+            </a:r>
+          </a:p>
+        </p:txBody>
+      </p:sp>
+      <p:pic>
+        <p:nvPicPr>
+          <p:cNvPr id="8" name="Picture 7" descr="fig60.jpeg"/>
+          <p:cNvPicPr>
+            <a:picLocks noChangeAspect="1"/>
+          </p:cNvPicPr>
+          <p:nvPr/>
+        </p:nvPicPr>
+        <p:blipFill>
+          <a:blip r:embed="rId2"/>
+          <a:stretch>
+            <a:fillRect/>
+          </a:stretch>
+        </p:blipFill>
+        <p:spPr>
+          <a:xfrm>
+            <a:off x="500000" y="1620370"/>
+            <a:ext cx="5200000" cy="3659259"/>
+          </a:xfrm>
+          <a:prstGeom prst="rect">
+            <a:avLst/>
+          </a:prstGeom>
+        </p:spPr>
+      </p:pic>
+      <p:sp>
+        <p:nvSpPr>
+          <p:cNvPr id="9" name="TextBox 8"/>
+          <p:cNvSpPr txBox="1"/>
+          <p:nvPr/>
+        </p:nvSpPr>
+        <p:spPr>
+          <a:xfrm>
+            <a:off x="6000000" y="1450000"/>
+            <a:ext cx="6200000" cy="3800000"/>
+          </a:xfrm>
+          <a:prstGeom prst="rect">
+            <a:avLst/>
+          </a:prstGeom>
+          <a:noFill/>
+        </p:spPr>
+        <p:txBody>
+          <a:bodyPr wrap="square">
+            <a:spAutoFit/>
+          </a:bodyPr>
+          <a:lstStyle/>
+          <a:p>
+            <a:pPr algn="l">
+              <a:spcAft>
+                <a:spcPts val="800"/>
+              </a:spcAft>
+            </a:pPr>
+            <a:r>
+              <a:rPr sz="1300" b="0">
+                <a:solidFill>
+                  <a:srgbClr val="333333"/>
+                </a:solidFill>
+                <a:latin typeface="Open Sans"/>
+                <a:ea typeface="Open Sans"/>
+                <a:cs typeface="Open Sans"/>
+              </a:rPr>
+              <a:t>•  Осмотрите обе ноги и сравните их длину, форму и положение.</a:t>
+            </a:r>
+          </a:p>
+          <a:p>
+            <a:pPr algn="l">
+              <a:spcAft>
+                <a:spcPts val="800"/>
+              </a:spcAft>
+            </a:pPr>
+            <a:r>
+              <a:rPr sz="1300" b="0">
+                <a:solidFill>
+                  <a:srgbClr val="333333"/>
+                </a:solidFill>
+                <a:latin typeface="Open Sans"/>
+                <a:ea typeface="Open Sans"/>
+                <a:cs typeface="Open Sans"/>
+              </a:rPr>
+              <a:t>•  Ищите раны, кровотечение, отек, кровоподтеки и деформацию.</a:t>
+            </a:r>
+          </a:p>
+          <a:p>
+            <a:pPr algn="l">
+              <a:spcAft>
+                <a:spcPts val="800"/>
+              </a:spcAft>
+            </a:pPr>
+            <a:r>
+              <a:rPr sz="1300" b="0">
+                <a:solidFill>
+                  <a:srgbClr val="333333"/>
+                </a:solidFill>
+                <a:latin typeface="Open Sans"/>
+                <a:ea typeface="Open Sans"/>
+                <a:cs typeface="Open Sans"/>
+              </a:rPr>
+              <a:t>•  Уточните боль и возможность пошевелить пальцами без принуждения.</a:t>
+            </a:r>
+          </a:p>
+          <a:p>
+            <a:pPr algn="l">
+              <a:spcAft>
+                <a:spcPts val="800"/>
+              </a:spcAft>
+            </a:pPr>
+            <a:r>
+              <a:rPr sz="1300" b="0">
+                <a:solidFill>
+                  <a:srgbClr val="333333"/>
+                </a:solidFill>
+                <a:latin typeface="Open Sans"/>
+                <a:ea typeface="Open Sans"/>
+                <a:cs typeface="Open Sans"/>
+              </a:rPr>
+              <a:t>•  Проверьте цвет, тепло и чувствительность стоп и пальцев.</a:t>
+            </a:r>
+          </a:p>
+          <a:p>
+            <a:pPr algn="l">
+              <a:spcAft>
+                <a:spcPts val="800"/>
+              </a:spcAft>
+            </a:pPr>
+            <a:r>
+              <a:rPr sz="1300" b="0">
+                <a:solidFill>
+                  <a:srgbClr val="333333"/>
+                </a:solidFill>
+                <a:latin typeface="Open Sans"/>
+                <a:ea typeface="Open Sans"/>
+                <a:cs typeface="Open Sans"/>
+              </a:rPr>
+              <a:t>•  Не просите пострадавшего вставать для проверки способности ходить.</a:t>
+            </a:r>
+          </a:p>
+        </p:txBody>
+      </p:sp>
+      <p:sp>
+        <p:nvSpPr>
+          <p:cNvPr id="10" name="Rounded Rectangle 9"/>
+          <p:cNvSpPr/>
+          <p:nvPr/>
+        </p:nvSpPr>
+        <p:spPr>
+          <a:xfrm>
+            <a:off x="6000000" y="5400000"/>
+            <a:ext cx="6200000" cy="1100000"/>
+          </a:xfrm>
+          <a:prstGeom prst="roundRect">
+            <a:avLst/>
+          </a:prstGeom>
+          <a:solidFill>
+            <a:srgbClr val="F5F0E1"/>
+          </a:solidFill>
+          <a:ln>
+            <a:noFill/>
+          </a:ln>
+        </p:spPr>
+        <p:style>
+          <a:lnRef idx="1">
+            <a:schemeClr val="accent1"/>
+          </a:lnRef>
+          <a:fillRef idx="3">
+            <a:schemeClr val="accent1"/>
+          </a:fillRef>
+          <a:effectRef idx="2">
+            <a:schemeClr val="accent1"/>
+          </a:effectRef>
+          <a:fontRef idx="minor">
+            <a:schemeClr val="lt1"/>
+          </a:fontRef>
+        </p:style>
+        <p:txBody>
+          <a:bodyPr rtlCol="0" anchor="ctr"/>
+          <a:lstStyle/>
+          <a:p>
+            <a:pPr algn="ctr"/>
+          </a:p>
+        </p:txBody>
+      </p:sp>
+      <p:sp>
+        <p:nvSpPr>
+          <p:cNvPr id="11" name="TextBox 10"/>
+          <p:cNvSpPr txBox="1"/>
+          <p:nvPr/>
+        </p:nvSpPr>
+        <p:spPr>
+          <a:xfrm>
+            <a:off x="6250000" y="5600000"/>
+            <a:ext cx="5700000" cy="700000"/>
+          </a:xfrm>
+          <a:prstGeom prst="rect">
+            <a:avLst/>
+          </a:prstGeom>
+          <a:noFill/>
+        </p:spPr>
+        <p:txBody>
+          <a:bodyPr wrap="square" anchor="ctr">
+            <a:spAutoFit/>
+          </a:bodyPr>
+          <a:lstStyle/>
+          <a:p>
+            <a:pPr algn="l"/>
+            <a:r>
+              <a:rPr sz="1200" b="0">
+                <a:solidFill>
+                  <a:srgbClr val="333333"/>
+                </a:solidFill>
+                <a:latin typeface="Open Sans"/>
+                <a:ea typeface="Open Sans"/>
+                <a:cs typeface="Open Sans"/>
+              </a:rPr>
+              <a:t>При подозрении на перелом сохраняйте найденное положение и обездвижьте конечность после остановки кровотечения.</a:t>
+            </a:r>
+          </a:p>
+        </p:txBody>
+      </p:sp>
+    </p:spTree>
+  </p:cSld>
+  <p:clrMapOvr>
+    <a:masterClrMapping/>
+  </p:clrMapOvr>
+</p:sld>
+</file>
+
+<file path=ppt/slides/slide13.xml><?xml version="1.0" encoding="utf-8"?>
+<p:sld xmlns:a="http://schemas.openxmlformats.org/drawingml/2006/main" xmlns:p="http://schemas.openxmlformats.org/presentationml/2006/main" xmlns:r="http://schemas.openxmlformats.org/officeDocument/2006/relationships">
+  <p:cSld>
+    <p:spTree>
+      <p:nvGrpSpPr>
+        <p:cNvPr id="1" name=""/>
+        <p:cNvGrpSpPr/>
+        <p:nvPr/>
+      </p:nvGrpSpPr>
+      <p:grpSpPr/>
+      <p:sp>
+        <p:nvSpPr>
+          <p:cNvPr id="2" name="Rectangle 1"/>
+          <p:cNvSpPr/>
+          <p:nvPr/>
+        </p:nvSpPr>
+        <p:spPr>
+          <a:xfrm>
+            <a:off x="0" y="0"/>
+            <a:ext cx="12191695" cy="6858000"/>
+          </a:xfrm>
+          <a:prstGeom prst="rect">
+            <a:avLst/>
+          </a:prstGeom>
+          <a:solidFill>
+            <a:srgbClr val="FFFFFF"/>
+          </a:solidFill>
+          <a:ln>
+            <a:noFill/>
+          </a:ln>
+        </p:spPr>
+        <p:style>
+          <a:lnRef idx="1">
+            <a:schemeClr val="accent1"/>
+          </a:lnRef>
+          <a:fillRef idx="3">
+            <a:schemeClr val="accent1"/>
+          </a:fillRef>
+          <a:effectRef idx="2">
+            <a:schemeClr val="accent1"/>
+          </a:effectRef>
+          <a:fontRef idx="minor">
+            <a:schemeClr val="lt1"/>
+          </a:fontRef>
+        </p:style>
+        <p:txBody>
+          <a:bodyPr rtlCol="0" anchor="ctr"/>
+          <a:lstStyle/>
+          <a:p>
+            <a:pPr algn="ctr"/>
+          </a:p>
+        </p:txBody>
+      </p:sp>
+      <p:sp>
+        <p:nvSpPr>
+          <p:cNvPr id="3" name="TextBox 2"/>
+          <p:cNvSpPr txBox="1"/>
+          <p:nvPr/>
+        </p:nvSpPr>
+        <p:spPr>
+          <a:xfrm>
+            <a:off x="700000" y="250000"/>
+            <a:ext cx="11200000" cy="550000"/>
+          </a:xfrm>
+          <a:prstGeom prst="rect">
+            <a:avLst/>
+          </a:prstGeom>
+          <a:noFill/>
+        </p:spPr>
+        <p:txBody>
+          <a:bodyPr wrap="square" anchor="t">
+            <a:spAutoFit/>
+          </a:bodyPr>
+          <a:lstStyle/>
+          <a:p>
+            <a:pPr algn="l"/>
+            <a:r>
+              <a:rPr sz="2200" b="1">
+                <a:solidFill>
+                  <a:srgbClr val="333333"/>
+                </a:solidFill>
+                <a:latin typeface="Open Sans"/>
+                <a:ea typeface="Open Sans"/>
+                <a:cs typeface="Open Sans"/>
+              </a:rPr>
+              <a:t>РУКИ: ЗАВЕРШЕНИЕ ПОСЛЕДОВАТЕЛЬНОГО ОСМОТРА</a:t>
+            </a:r>
+          </a:p>
+        </p:txBody>
+      </p:sp>
+      <p:sp>
+        <p:nvSpPr>
+          <p:cNvPr id="4" name="Rectangle 3"/>
+          <p:cNvSpPr/>
+          <p:nvPr/>
+        </p:nvSpPr>
+        <p:spPr>
+          <a:xfrm>
+            <a:off x="700000" y="850000"/>
+            <a:ext cx="9000000" cy="28000"/>
+          </a:xfrm>
+          <a:prstGeom prst="rect">
+            <a:avLst/>
+          </a:prstGeom>
+          <a:solidFill>
+            <a:srgbClr val="555555"/>
+          </a:solidFill>
+          <a:ln>
+            <a:noFill/>
+          </a:ln>
+        </p:spPr>
+        <p:style>
+          <a:lnRef idx="1">
+            <a:schemeClr val="accent1"/>
+          </a:lnRef>
+          <a:fillRef idx="3">
+            <a:schemeClr val="accent1"/>
+          </a:fillRef>
+          <a:effectRef idx="2">
+            <a:schemeClr val="accent1"/>
+          </a:effectRef>
+          <a:fontRef idx="minor">
+            <a:schemeClr val="lt1"/>
+          </a:fontRef>
+        </p:style>
+        <p:txBody>
+          <a:bodyPr rtlCol="0" anchor="ctr"/>
+          <a:lstStyle/>
+          <a:p>
+            <a:pPr algn="ctr"/>
+          </a:p>
+        </p:txBody>
+      </p:sp>
+      <p:sp>
+        <p:nvSpPr>
+          <p:cNvPr id="5" name="TextBox 4"/>
+          <p:cNvSpPr txBox="1"/>
+          <p:nvPr/>
+        </p:nvSpPr>
+        <p:spPr>
+          <a:xfrm>
+            <a:off x="700000" y="920000"/>
+            <a:ext cx="11000000" cy="350000"/>
+          </a:xfrm>
+          <a:prstGeom prst="rect">
+            <a:avLst/>
+          </a:prstGeom>
+          <a:noFill/>
+        </p:spPr>
+        <p:txBody>
+          <a:bodyPr wrap="square" anchor="t">
+            <a:spAutoFit/>
+          </a:bodyPr>
+          <a:lstStyle/>
+          <a:p>
+            <a:pPr algn="l"/>
+            <a:r>
+              <a:rPr sz="1200" b="0">
+                <a:solidFill>
+                  <a:srgbClr val="666666"/>
+                </a:solidFill>
+                <a:latin typeface="Open Sans"/>
+                <a:ea typeface="Open Sans"/>
+                <a:cs typeface="Open Sans"/>
+              </a:rPr>
+              <a:t>Оказание первой помощи при травмах, ранениях и поражениях, прочих состояниях</a:t>
+            </a:r>
+          </a:p>
+        </p:txBody>
+      </p:sp>
+      <p:sp>
+        <p:nvSpPr>
+          <p:cNvPr id="6" name="Rectangle 5"/>
+          <p:cNvSpPr/>
+          <p:nvPr/>
+        </p:nvSpPr>
+        <p:spPr>
+          <a:xfrm>
+            <a:off x="0" y="2800000"/>
+            <a:ext cx="420000" cy="420000"/>
+          </a:xfrm>
+          <a:prstGeom prst="rect">
+            <a:avLst/>
+          </a:prstGeom>
+          <a:solidFill>
+            <a:srgbClr val="555555"/>
+          </a:solidFill>
+          <a:ln>
+            <a:noFill/>
+          </a:ln>
+        </p:spPr>
+        <p:style>
+          <a:lnRef idx="1">
+            <a:schemeClr val="accent1"/>
+          </a:lnRef>
+          <a:fillRef idx="3">
+            <a:schemeClr val="accent1"/>
+          </a:fillRef>
+          <a:effectRef idx="2">
+            <a:schemeClr val="accent1"/>
+          </a:effectRef>
+          <a:fontRef idx="minor">
+            <a:schemeClr val="lt1"/>
+          </a:fontRef>
+        </p:style>
+        <p:txBody>
+          <a:bodyPr rtlCol="0" anchor="ctr"/>
+          <a:lstStyle/>
+          <a:p>
+            <a:pPr algn="ctr"/>
+          </a:p>
+        </p:txBody>
+      </p:sp>
+      <p:sp>
+        <p:nvSpPr>
+          <p:cNvPr id="7" name="TextBox 6"/>
+          <p:cNvSpPr txBox="1"/>
+          <p:nvPr/>
+        </p:nvSpPr>
+        <p:spPr>
+          <a:xfrm>
+            <a:off x="0" y="2800000"/>
+            <a:ext cx="420000" cy="420000"/>
+          </a:xfrm>
+          <a:prstGeom prst="rect">
+            <a:avLst/>
+          </a:prstGeom>
+          <a:noFill/>
+        </p:spPr>
+        <p:txBody>
+          <a:bodyPr wrap="square" anchor="ctr">
+            <a:spAutoFit/>
+          </a:bodyPr>
+          <a:lstStyle/>
+          <a:p>
+            <a:pPr algn="ctr"/>
+            <a:r>
+              <a:rPr sz="1400" b="1">
+                <a:solidFill>
+                  <a:srgbClr val="FFFFFF"/>
+                </a:solidFill>
+                <a:latin typeface="Open Sans"/>
+                <a:ea typeface="Open Sans"/>
+                <a:cs typeface="Open Sans"/>
+              </a:rPr>
+              <a:t>13</a:t>
+            </a:r>
+          </a:p>
+        </p:txBody>
+      </p:sp>
+      <p:pic>
+        <p:nvPicPr>
+          <p:cNvPr id="8" name="Picture 7" descr="fig61.jpeg"/>
+          <p:cNvPicPr>
+            <a:picLocks noChangeAspect="1"/>
+          </p:cNvPicPr>
+          <p:nvPr/>
+        </p:nvPicPr>
+        <p:blipFill>
+          <a:blip r:embed="rId2"/>
+          <a:stretch>
+            <a:fillRect/>
+          </a:stretch>
+        </p:blipFill>
+        <p:spPr>
+          <a:xfrm>
+            <a:off x="848000" y="1450000"/>
+            <a:ext cx="4504000" cy="4000000"/>
+          </a:xfrm>
+          <a:prstGeom prst="rect">
+            <a:avLst/>
+          </a:prstGeom>
+        </p:spPr>
+      </p:pic>
+      <p:sp>
+        <p:nvSpPr>
+          <p:cNvPr id="9" name="TextBox 8"/>
+          <p:cNvSpPr txBox="1"/>
+          <p:nvPr/>
+        </p:nvSpPr>
+        <p:spPr>
+          <a:xfrm>
+            <a:off x="6000000" y="1450000"/>
+            <a:ext cx="6200000" cy="3800000"/>
+          </a:xfrm>
+          <a:prstGeom prst="rect">
+            <a:avLst/>
+          </a:prstGeom>
+          <a:noFill/>
+        </p:spPr>
+        <p:txBody>
+          <a:bodyPr wrap="square">
+            <a:spAutoFit/>
+          </a:bodyPr>
+          <a:lstStyle/>
+          <a:p>
+            <a:pPr algn="l">
+              <a:spcAft>
+                <a:spcPts val="800"/>
+              </a:spcAft>
+            </a:pPr>
+            <a:r>
+              <a:rPr sz="1300" b="0">
+                <a:solidFill>
+                  <a:srgbClr val="333333"/>
+                </a:solidFill>
+                <a:latin typeface="Open Sans"/>
+                <a:ea typeface="Open Sans"/>
+                <a:cs typeface="Open Sans"/>
+              </a:rPr>
+              <a:t>•  Осмотрите плечи, плечевые суставы, предплечья, кисти и пальцы.</a:t>
+            </a:r>
+          </a:p>
+          <a:p>
+            <a:pPr algn="l">
+              <a:spcAft>
+                <a:spcPts val="800"/>
+              </a:spcAft>
+            </a:pPr>
+            <a:r>
+              <a:rPr sz="1300" b="0">
+                <a:solidFill>
+                  <a:srgbClr val="333333"/>
+                </a:solidFill>
+                <a:latin typeface="Open Sans"/>
+                <a:ea typeface="Open Sans"/>
+                <a:cs typeface="Open Sans"/>
+              </a:rPr>
+              <a:t>•  Сравните обе руки: форму, положение, отек и цвет кожи.</a:t>
+            </a:r>
+          </a:p>
+          <a:p>
+            <a:pPr algn="l">
+              <a:spcAft>
+                <a:spcPts val="800"/>
+              </a:spcAft>
+            </a:pPr>
+            <a:r>
+              <a:rPr sz="1300" b="0">
+                <a:solidFill>
+                  <a:srgbClr val="333333"/>
+                </a:solidFill>
+                <a:latin typeface="Open Sans"/>
+                <a:ea typeface="Open Sans"/>
+                <a:cs typeface="Open Sans"/>
+              </a:rPr>
+              <a:t>•  Ищите раны, кровотечение, болезненность и необычную подвижность.</a:t>
+            </a:r>
+          </a:p>
+          <a:p>
+            <a:pPr algn="l">
+              <a:spcAft>
+                <a:spcPts val="800"/>
+              </a:spcAft>
+            </a:pPr>
+            <a:r>
+              <a:rPr sz="1300" b="0">
+                <a:solidFill>
+                  <a:srgbClr val="333333"/>
+                </a:solidFill>
+                <a:latin typeface="Open Sans"/>
+                <a:ea typeface="Open Sans"/>
+                <a:cs typeface="Open Sans"/>
+              </a:rPr>
+              <a:t>•  Уточните наличие онемения; проверьте тепло и чувствительность пальцев.</a:t>
+            </a:r>
+          </a:p>
+          <a:p>
+            <a:pPr algn="l">
+              <a:spcAft>
+                <a:spcPts val="800"/>
+              </a:spcAft>
+            </a:pPr>
+            <a:r>
+              <a:rPr sz="1300" b="0">
+                <a:solidFill>
+                  <a:srgbClr val="333333"/>
+                </a:solidFill>
+                <a:latin typeface="Open Sans"/>
+                <a:ea typeface="Open Sans"/>
+                <a:cs typeface="Open Sans"/>
+              </a:rPr>
+              <a:t>•  Снимите кольца, часы и браслеты до нарастания отека, если это безопасно.</a:t>
+            </a:r>
+          </a:p>
+        </p:txBody>
+      </p:sp>
+      <p:sp>
+        <p:nvSpPr>
+          <p:cNvPr id="10" name="Rounded Rectangle 9"/>
+          <p:cNvSpPr/>
+          <p:nvPr/>
+        </p:nvSpPr>
+        <p:spPr>
+          <a:xfrm>
+            <a:off x="6000000" y="5400000"/>
+            <a:ext cx="6200000" cy="1100000"/>
+          </a:xfrm>
+          <a:prstGeom prst="roundRect">
+            <a:avLst/>
+          </a:prstGeom>
+          <a:solidFill>
+            <a:srgbClr val="F5F0E1"/>
+          </a:solidFill>
+          <a:ln>
+            <a:noFill/>
+          </a:ln>
+        </p:spPr>
+        <p:style>
+          <a:lnRef idx="1">
+            <a:schemeClr val="accent1"/>
+          </a:lnRef>
+          <a:fillRef idx="3">
+            <a:schemeClr val="accent1"/>
+          </a:fillRef>
+          <a:effectRef idx="2">
+            <a:schemeClr val="accent1"/>
+          </a:effectRef>
+          <a:fontRef idx="minor">
+            <a:schemeClr val="lt1"/>
+          </a:fontRef>
+        </p:style>
+        <p:txBody>
+          <a:bodyPr rtlCol="0" anchor="ctr"/>
+          <a:lstStyle/>
+          <a:p>
+            <a:pPr algn="ctr"/>
+          </a:p>
+        </p:txBody>
+      </p:sp>
+      <p:sp>
+        <p:nvSpPr>
+          <p:cNvPr id="11" name="TextBox 10"/>
+          <p:cNvSpPr txBox="1"/>
+          <p:nvPr/>
+        </p:nvSpPr>
+        <p:spPr>
+          <a:xfrm>
+            <a:off x="6250000" y="5600000"/>
+            <a:ext cx="5700000" cy="700000"/>
+          </a:xfrm>
+          <a:prstGeom prst="rect">
+            <a:avLst/>
+          </a:prstGeom>
+          <a:noFill/>
+        </p:spPr>
+        <p:txBody>
+          <a:bodyPr wrap="square" anchor="ctr">
+            <a:spAutoFit/>
+          </a:bodyPr>
+          <a:lstStyle/>
+          <a:p>
+            <a:pPr algn="l"/>
+            <a:r>
+              <a:rPr sz="1200" b="0">
+                <a:solidFill>
+                  <a:srgbClr val="333333"/>
+                </a:solidFill>
+                <a:latin typeface="Open Sans"/>
+                <a:ea typeface="Open Sans"/>
+                <a:cs typeface="Open Sans"/>
+              </a:rPr>
+              <a:t>Не выпрямляйте деформированную конечность и не сопоставляйте костные отломки.</a:t>
+            </a:r>
+          </a:p>
+        </p:txBody>
+      </p:sp>
+    </p:spTree>
+  </p:cSld>
+  <p:clrMapOvr>
+    <a:masterClrMapping/>
+  </p:clrMapOvr>
+</p:sld>
+</file>
+
+<file path=ppt/slides/slide14.xml><?xml version="1.0" encoding="utf-8"?>
+<p:sld xmlns:a="http://schemas.openxmlformats.org/drawingml/2006/main" xmlns:p="http://schemas.openxmlformats.org/presentationml/2006/main" xmlns:r="http://schemas.openxmlformats.org/officeDocument/2006/relationships">
+  <p:cSld>
+    <p:spTree>
+      <p:nvGrpSpPr>
+        <p:cNvPr id="1" name=""/>
+        <p:cNvGrpSpPr/>
+        <p:nvPr/>
+      </p:nvGrpSpPr>
+      <p:grpSpPr/>
+      <p:sp>
+        <p:nvSpPr>
+          <p:cNvPr id="2" name="Rectangle 1"/>
+          <p:cNvSpPr/>
+          <p:nvPr/>
+        </p:nvSpPr>
+        <p:spPr>
+          <a:xfrm>
+            <a:off x="0" y="0"/>
+            <a:ext cx="12191695" cy="6858000"/>
+          </a:xfrm>
+          <a:prstGeom prst="rect">
+            <a:avLst/>
+          </a:prstGeom>
+          <a:solidFill>
+            <a:srgbClr val="FFFFFF"/>
+          </a:solidFill>
+          <a:ln>
+            <a:noFill/>
+          </a:ln>
+        </p:spPr>
+        <p:style>
+          <a:lnRef idx="1">
+            <a:schemeClr val="accent1"/>
+          </a:lnRef>
+          <a:fillRef idx="3">
+            <a:schemeClr val="accent1"/>
+          </a:fillRef>
+          <a:effectRef idx="2">
+            <a:schemeClr val="accent1"/>
+          </a:effectRef>
+          <a:fontRef idx="minor">
+            <a:schemeClr val="lt1"/>
+          </a:fontRef>
+        </p:style>
+        <p:txBody>
+          <a:bodyPr rtlCol="0" anchor="ctr"/>
+          <a:lstStyle/>
+          <a:p>
+            <a:pPr algn="ctr"/>
+          </a:p>
+        </p:txBody>
+      </p:sp>
+      <p:sp>
+        <p:nvSpPr>
+          <p:cNvPr id="3" name="TextBox 2"/>
+          <p:cNvSpPr txBox="1"/>
+          <p:nvPr/>
+        </p:nvSpPr>
+        <p:spPr>
+          <a:xfrm>
+            <a:off x="700000" y="250000"/>
+            <a:ext cx="11200000" cy="550000"/>
+          </a:xfrm>
+          <a:prstGeom prst="rect">
+            <a:avLst/>
+          </a:prstGeom>
+          <a:noFill/>
+        </p:spPr>
+        <p:txBody>
+          <a:bodyPr wrap="square" anchor="t">
+            <a:spAutoFit/>
+          </a:bodyPr>
+          <a:lstStyle/>
+          <a:p>
+            <a:pPr algn="l"/>
+            <a:r>
+              <a:rPr sz="2200" b="1">
+                <a:solidFill>
+                  <a:srgbClr val="333333"/>
+                </a:solidFill>
+                <a:latin typeface="Open Sans"/>
+                <a:ea typeface="Open Sans"/>
+                <a:cs typeface="Open Sans"/>
+              </a:rPr>
+              <a:t>ПОСЛЕ ОСМОТРА</a:t>
+            </a:r>
+          </a:p>
+        </p:txBody>
+      </p:sp>
+      <p:sp>
+        <p:nvSpPr>
+          <p:cNvPr id="4" name="Rectangle 3"/>
+          <p:cNvSpPr/>
+          <p:nvPr/>
+        </p:nvSpPr>
+        <p:spPr>
+          <a:xfrm>
+            <a:off x="700000" y="850000"/>
+            <a:ext cx="9000000" cy="28000"/>
+          </a:xfrm>
+          <a:prstGeom prst="rect">
+            <a:avLst/>
+          </a:prstGeom>
+          <a:solidFill>
+            <a:srgbClr val="555555"/>
+          </a:solidFill>
+          <a:ln>
+            <a:noFill/>
+          </a:ln>
+        </p:spPr>
+        <p:style>
+          <a:lnRef idx="1">
+            <a:schemeClr val="accent1"/>
+          </a:lnRef>
+          <a:fillRef idx="3">
+            <a:schemeClr val="accent1"/>
+          </a:fillRef>
+          <a:effectRef idx="2">
+            <a:schemeClr val="accent1"/>
+          </a:effectRef>
+          <a:fontRef idx="minor">
+            <a:schemeClr val="lt1"/>
+          </a:fontRef>
+        </p:style>
+        <p:txBody>
+          <a:bodyPr rtlCol="0" anchor="ctr"/>
+          <a:lstStyle/>
+          <a:p>
+            <a:pPr algn="ctr"/>
+          </a:p>
+        </p:txBody>
+      </p:sp>
+      <p:sp>
+        <p:nvSpPr>
+          <p:cNvPr id="5" name="TextBox 4"/>
+          <p:cNvSpPr txBox="1"/>
+          <p:nvPr/>
+        </p:nvSpPr>
+        <p:spPr>
+          <a:xfrm>
+            <a:off x="700000" y="920000"/>
+            <a:ext cx="11000000" cy="350000"/>
+          </a:xfrm>
+          <a:prstGeom prst="rect">
+            <a:avLst/>
+          </a:prstGeom>
+          <a:noFill/>
+        </p:spPr>
+        <p:txBody>
+          <a:bodyPr wrap="square" anchor="t">
+            <a:spAutoFit/>
+          </a:bodyPr>
+          <a:lstStyle/>
+          <a:p>
+            <a:pPr algn="l"/>
+            <a:r>
+              <a:rPr sz="1200" b="0">
+                <a:solidFill>
+                  <a:srgbClr val="666666"/>
+                </a:solidFill>
+                <a:latin typeface="Open Sans"/>
+                <a:ea typeface="Open Sans"/>
+                <a:cs typeface="Open Sans"/>
+              </a:rPr>
+              <a:t>Оказание первой помощи при травмах, ранениях и поражениях, прочих состояниях</a:t>
+            </a:r>
+          </a:p>
+        </p:txBody>
+      </p:sp>
+      <p:sp>
+        <p:nvSpPr>
+          <p:cNvPr id="6" name="Rectangle 5"/>
+          <p:cNvSpPr/>
+          <p:nvPr/>
+        </p:nvSpPr>
+        <p:spPr>
+          <a:xfrm>
+            <a:off x="0" y="2800000"/>
+            <a:ext cx="420000" cy="420000"/>
+          </a:xfrm>
+          <a:prstGeom prst="rect">
+            <a:avLst/>
+          </a:prstGeom>
+          <a:solidFill>
+            <a:srgbClr val="555555"/>
+          </a:solidFill>
+          <a:ln>
+            <a:noFill/>
+          </a:ln>
+        </p:spPr>
+        <p:style>
+          <a:lnRef idx="1">
+            <a:schemeClr val="accent1"/>
+          </a:lnRef>
+          <a:fillRef idx="3">
+            <a:schemeClr val="accent1"/>
+          </a:fillRef>
+          <a:effectRef idx="2">
+            <a:schemeClr val="accent1"/>
+          </a:effectRef>
+          <a:fontRef idx="minor">
+            <a:schemeClr val="lt1"/>
+          </a:fontRef>
+        </p:style>
+        <p:txBody>
+          <a:bodyPr rtlCol="0" anchor="ctr"/>
+          <a:lstStyle/>
+          <a:p>
+            <a:pPr algn="ctr"/>
+          </a:p>
+        </p:txBody>
+      </p:sp>
+      <p:sp>
+        <p:nvSpPr>
+          <p:cNvPr id="7" name="TextBox 6"/>
+          <p:cNvSpPr txBox="1"/>
+          <p:nvPr/>
+        </p:nvSpPr>
+        <p:spPr>
+          <a:xfrm>
+            <a:off x="0" y="2800000"/>
+            <a:ext cx="420000" cy="420000"/>
+          </a:xfrm>
+          <a:prstGeom prst="rect">
+            <a:avLst/>
+          </a:prstGeom>
+          <a:noFill/>
+        </p:spPr>
+        <p:txBody>
+          <a:bodyPr wrap="square" anchor="ctr">
+            <a:spAutoFit/>
+          </a:bodyPr>
+          <a:lstStyle/>
+          <a:p>
+            <a:pPr algn="ctr"/>
+            <a:r>
+              <a:rPr sz="1400" b="1">
+                <a:solidFill>
+                  <a:srgbClr val="FFFFFF"/>
+                </a:solidFill>
+                <a:latin typeface="Open Sans"/>
+                <a:ea typeface="Open Sans"/>
+                <a:cs typeface="Open Sans"/>
+              </a:rPr>
+              <a:t>14</a:t>
+            </a:r>
+          </a:p>
+        </p:txBody>
+      </p:sp>
+      <p:sp>
+        <p:nvSpPr>
+          <p:cNvPr id="8" name="Oval 7"/>
+          <p:cNvSpPr/>
+          <p:nvPr/>
+        </p:nvSpPr>
+        <p:spPr>
+          <a:xfrm>
+            <a:off x="700000" y="1400000"/>
+            <a:ext cx="500000" cy="500000"/>
+          </a:xfrm>
+          <a:prstGeom prst="ellipse">
+            <a:avLst/>
+          </a:prstGeom>
+          <a:solidFill>
+            <a:srgbClr val="CC0000"/>
+          </a:solidFill>
+          <a:ln>
+            <a:noFill/>
+          </a:ln>
+        </p:spPr>
+        <p:style>
+          <a:lnRef idx="1">
+            <a:schemeClr val="accent1"/>
+          </a:lnRef>
+          <a:fillRef idx="3">
+            <a:schemeClr val="accent1"/>
+          </a:fillRef>
+          <a:effectRef idx="2">
+            <a:schemeClr val="accent1"/>
+          </a:effectRef>
+          <a:fontRef idx="minor">
+            <a:schemeClr val="lt1"/>
+          </a:fontRef>
+        </p:style>
+        <p:txBody>
+          <a:bodyPr rtlCol="0" anchor="ctr"/>
+          <a:lstStyle/>
+          <a:p>
+            <a:pPr algn="ctr"/>
+          </a:p>
+        </p:txBody>
+      </p:sp>
+      <p:sp>
+        <p:nvSpPr>
+          <p:cNvPr id="9" name="TextBox 8"/>
+          <p:cNvSpPr txBox="1"/>
+          <p:nvPr/>
+        </p:nvSpPr>
+        <p:spPr>
+          <a:xfrm>
+            <a:off x="700000" y="1400000"/>
+            <a:ext cx="500000" cy="500000"/>
+          </a:xfrm>
+          <a:prstGeom prst="rect">
+            <a:avLst/>
+          </a:prstGeom>
+          <a:noFill/>
+        </p:spPr>
+        <p:txBody>
+          <a:bodyPr wrap="square" anchor="ctr">
+            <a:spAutoFit/>
+          </a:bodyPr>
+          <a:lstStyle/>
+          <a:p>
+            <a:pPr algn="ctr"/>
+            <a:r>
+              <a:rPr sz="1300" b="1">
+                <a:solidFill>
+                  <a:srgbClr val="FFFFFF"/>
+                </a:solidFill>
+                <a:latin typeface="Open Sans"/>
+                <a:ea typeface="Open Sans"/>
+                <a:cs typeface="Open Sans"/>
+              </a:rPr>
+              <a:t>1</a:t>
+            </a:r>
+          </a:p>
+        </p:txBody>
+      </p:sp>
+      <p:sp>
+        <p:nvSpPr>
+          <p:cNvPr id="10" name="Rectangle 9"/>
+          <p:cNvSpPr/>
+          <p:nvPr/>
+        </p:nvSpPr>
+        <p:spPr>
+          <a:xfrm>
+            <a:off x="1400000" y="1400000"/>
+            <a:ext cx="10550000" cy="620000"/>
+          </a:xfrm>
+          <a:prstGeom prst="rect">
+            <a:avLst/>
+          </a:prstGeom>
+          <a:solidFill>
+            <a:srgbClr val="FFFFFF"/>
+          </a:solidFill>
+          <a:ln w="12700">
+            <a:solidFill>
+              <a:srgbClr val="999999"/>
+            </a:solidFill>
+          </a:ln>
+        </p:spPr>
+        <p:style>
+          <a:lnRef idx="1">
+            <a:schemeClr val="accent1"/>
+          </a:lnRef>
+          <a:fillRef idx="3">
+            <a:schemeClr val="accent1"/>
+          </a:fillRef>
+          <a:effectRef idx="2">
+            <a:schemeClr val="accent1"/>
+          </a:effectRef>
+          <a:fontRef idx="minor">
+            <a:schemeClr val="lt1"/>
+          </a:fontRef>
+        </p:style>
+        <p:txBody>
+          <a:bodyPr rtlCol="0" anchor="ctr"/>
+          <a:lstStyle/>
+          <a:p>
+            <a:pPr algn="ctr"/>
+          </a:p>
+        </p:txBody>
+      </p:sp>
+      <p:sp>
+        <p:nvSpPr>
+          <p:cNvPr id="11" name="TextBox 10"/>
+          <p:cNvSpPr txBox="1"/>
+          <p:nvPr/>
+        </p:nvSpPr>
+        <p:spPr>
+          <a:xfrm>
+            <a:off x="1600000" y="1400000"/>
+            <a:ext cx="10150000" cy="620000"/>
+          </a:xfrm>
+          <a:prstGeom prst="rect">
+            <a:avLst/>
+          </a:prstGeom>
+          <a:noFill/>
+        </p:spPr>
+        <p:txBody>
+          <a:bodyPr wrap="square" anchor="ctr">
+            <a:spAutoFit/>
+          </a:bodyPr>
+          <a:lstStyle/>
+          <a:p>
+            <a:pPr algn="l"/>
+            <a:r>
+              <a:rPr sz="1300" b="0">
+                <a:solidFill>
+                  <a:srgbClr val="333333"/>
+                </a:solidFill>
+                <a:latin typeface="Open Sans"/>
+                <a:ea typeface="Open Sans"/>
+                <a:cs typeface="Open Sans"/>
+              </a:rPr>
+              <a:t>Окажите помощь по каждой найденной травме, начиная с наиболее опасной.</a:t>
+            </a:r>
+          </a:p>
+        </p:txBody>
+      </p:sp>
+      <p:sp>
+        <p:nvSpPr>
+          <p:cNvPr id="12" name="Oval 11"/>
+          <p:cNvSpPr/>
+          <p:nvPr/>
+        </p:nvSpPr>
+        <p:spPr>
+          <a:xfrm>
+            <a:off x="700000" y="2100000"/>
+            <a:ext cx="500000" cy="500000"/>
+          </a:xfrm>
+          <a:prstGeom prst="ellipse">
+            <a:avLst/>
+          </a:prstGeom>
+          <a:solidFill>
+            <a:srgbClr val="555555"/>
+          </a:solidFill>
+          <a:ln>
+            <a:noFill/>
+          </a:ln>
+        </p:spPr>
+        <p:style>
+          <a:lnRef idx="1">
+            <a:schemeClr val="accent1"/>
+          </a:lnRef>
+          <a:fillRef idx="3">
+            <a:schemeClr val="accent1"/>
+          </a:fillRef>
+          <a:effectRef idx="2">
+            <a:schemeClr val="accent1"/>
+          </a:effectRef>
+          <a:fontRef idx="minor">
+            <a:schemeClr val="lt1"/>
+          </a:fontRef>
+        </p:style>
+        <p:txBody>
+          <a:bodyPr rtlCol="0" anchor="ctr"/>
+          <a:lstStyle/>
+          <a:p>
+            <a:pPr algn="ctr"/>
+          </a:p>
+        </p:txBody>
+      </p:sp>
+      <p:sp>
+        <p:nvSpPr>
+          <p:cNvPr id="13" name="TextBox 12"/>
+          <p:cNvSpPr txBox="1"/>
+          <p:nvPr/>
+        </p:nvSpPr>
+        <p:spPr>
+          <a:xfrm>
+            <a:off x="700000" y="2100000"/>
+            <a:ext cx="500000" cy="500000"/>
+          </a:xfrm>
+          <a:prstGeom prst="rect">
+            <a:avLst/>
+          </a:prstGeom>
+          <a:noFill/>
+        </p:spPr>
+        <p:txBody>
+          <a:bodyPr wrap="square" anchor="ctr">
+            <a:spAutoFit/>
+          </a:bodyPr>
+          <a:lstStyle/>
+          <a:p>
+            <a:pPr algn="ctr"/>
+            <a:r>
+              <a:rPr sz="1300" b="1">
+                <a:solidFill>
+                  <a:srgbClr val="FFFFFF"/>
+                </a:solidFill>
+                <a:latin typeface="Open Sans"/>
+                <a:ea typeface="Open Sans"/>
+                <a:cs typeface="Open Sans"/>
+              </a:rPr>
+              <a:t>2</a:t>
+            </a:r>
+          </a:p>
+        </p:txBody>
+      </p:sp>
+      <p:sp>
+        <p:nvSpPr>
+          <p:cNvPr id="14" name="Rectangle 13"/>
+          <p:cNvSpPr/>
+          <p:nvPr/>
+        </p:nvSpPr>
+        <p:spPr>
+          <a:xfrm>
+            <a:off x="1400000" y="2100000"/>
+            <a:ext cx="10550000" cy="620000"/>
+          </a:xfrm>
+          <a:prstGeom prst="rect">
+            <a:avLst/>
+          </a:prstGeom>
+          <a:solidFill>
+            <a:srgbClr val="FFFFFF"/>
+          </a:solidFill>
+          <a:ln w="12700">
+            <a:solidFill>
+              <a:srgbClr val="999999"/>
+            </a:solidFill>
+          </a:ln>
+        </p:spPr>
+        <p:style>
+          <a:lnRef idx="1">
+            <a:schemeClr val="accent1"/>
+          </a:lnRef>
+          <a:fillRef idx="3">
+            <a:schemeClr val="accent1"/>
+          </a:fillRef>
+          <a:effectRef idx="2">
+            <a:schemeClr val="accent1"/>
+          </a:effectRef>
+          <a:fontRef idx="minor">
+            <a:schemeClr val="lt1"/>
+          </a:fontRef>
+        </p:style>
+        <p:txBody>
+          <a:bodyPr rtlCol="0" anchor="ctr"/>
+          <a:lstStyle/>
+          <a:p>
+            <a:pPr algn="ctr"/>
+          </a:p>
+        </p:txBody>
+      </p:sp>
+      <p:sp>
+        <p:nvSpPr>
+          <p:cNvPr id="15" name="TextBox 14"/>
+          <p:cNvSpPr txBox="1"/>
+          <p:nvPr/>
+        </p:nvSpPr>
+        <p:spPr>
+          <a:xfrm>
+            <a:off x="1600000" y="2100000"/>
+            <a:ext cx="10150000" cy="620000"/>
+          </a:xfrm>
+          <a:prstGeom prst="rect">
+            <a:avLst/>
+          </a:prstGeom>
+          <a:noFill/>
+        </p:spPr>
+        <p:txBody>
+          <a:bodyPr wrap="square" anchor="ctr">
+            <a:spAutoFit/>
+          </a:bodyPr>
+          <a:lstStyle/>
+          <a:p>
+            <a:pPr algn="l"/>
+            <a:r>
+              <a:rPr sz="1300" b="0">
+                <a:solidFill>
+                  <a:srgbClr val="333333"/>
+                </a:solidFill>
+                <a:latin typeface="Open Sans"/>
+                <a:ea typeface="Open Sans"/>
+                <a:cs typeface="Open Sans"/>
+              </a:rPr>
+              <a:t>При необходимости скорректируйте вызов скорой медицинской помощи.</a:t>
+            </a:r>
+          </a:p>
+        </p:txBody>
+      </p:sp>
+      <p:sp>
+        <p:nvSpPr>
+          <p:cNvPr id="16" name="Oval 15"/>
+          <p:cNvSpPr/>
+          <p:nvPr/>
+        </p:nvSpPr>
+        <p:spPr>
+          <a:xfrm>
+            <a:off x="700000" y="2800000"/>
+            <a:ext cx="500000" cy="500000"/>
+          </a:xfrm>
+          <a:prstGeom prst="ellipse">
+            <a:avLst/>
+          </a:prstGeom>
+          <a:solidFill>
+            <a:srgbClr val="555555"/>
+          </a:solidFill>
+          <a:ln>
+            <a:noFill/>
+          </a:ln>
+        </p:spPr>
+        <p:style>
+          <a:lnRef idx="1">
+            <a:schemeClr val="accent1"/>
+          </a:lnRef>
+          <a:fillRef idx="3">
+            <a:schemeClr val="accent1"/>
+          </a:fillRef>
+          <a:effectRef idx="2">
+            <a:schemeClr val="accent1"/>
+          </a:effectRef>
+          <a:fontRef idx="minor">
+            <a:schemeClr val="lt1"/>
+          </a:fontRef>
+        </p:style>
+        <p:txBody>
+          <a:bodyPr rtlCol="0" anchor="ctr"/>
+          <a:lstStyle/>
+          <a:p>
+            <a:pPr algn="ctr"/>
+          </a:p>
+        </p:txBody>
+      </p:sp>
+      <p:sp>
+        <p:nvSpPr>
+          <p:cNvPr id="17" name="TextBox 16"/>
+          <p:cNvSpPr txBox="1"/>
+          <p:nvPr/>
+        </p:nvSpPr>
+        <p:spPr>
+          <a:xfrm>
+            <a:off x="700000" y="2800000"/>
+            <a:ext cx="500000" cy="500000"/>
+          </a:xfrm>
+          <a:prstGeom prst="rect">
+            <a:avLst/>
+          </a:prstGeom>
+          <a:noFill/>
+        </p:spPr>
+        <p:txBody>
+          <a:bodyPr wrap="square" anchor="ctr">
+            <a:spAutoFit/>
+          </a:bodyPr>
+          <a:lstStyle/>
+          <a:p>
+            <a:pPr algn="ctr"/>
+            <a:r>
+              <a:rPr sz="1300" b="1">
+                <a:solidFill>
+                  <a:srgbClr val="FFFFFF"/>
+                </a:solidFill>
+                <a:latin typeface="Open Sans"/>
+                <a:ea typeface="Open Sans"/>
+                <a:cs typeface="Open Sans"/>
+              </a:rPr>
+              <a:t>3</a:t>
+            </a:r>
+          </a:p>
+        </p:txBody>
+      </p:sp>
+      <p:sp>
+        <p:nvSpPr>
+          <p:cNvPr id="18" name="Rectangle 17"/>
+          <p:cNvSpPr/>
+          <p:nvPr/>
+        </p:nvSpPr>
+        <p:spPr>
+          <a:xfrm>
+            <a:off x="1400000" y="2800000"/>
+            <a:ext cx="10550000" cy="620000"/>
+          </a:xfrm>
+          <a:prstGeom prst="rect">
+            <a:avLst/>
+          </a:prstGeom>
+          <a:solidFill>
+            <a:srgbClr val="FFFFFF"/>
+          </a:solidFill>
+          <a:ln w="12700">
+            <a:solidFill>
+              <a:srgbClr val="999999"/>
+            </a:solidFill>
+          </a:ln>
+        </p:spPr>
+        <p:style>
+          <a:lnRef idx="1">
+            <a:schemeClr val="accent1"/>
+          </a:lnRef>
+          <a:fillRef idx="3">
+            <a:schemeClr val="accent1"/>
+          </a:fillRef>
+          <a:effectRef idx="2">
+            <a:schemeClr val="accent1"/>
+          </a:effectRef>
+          <a:fontRef idx="minor">
+            <a:schemeClr val="lt1"/>
+          </a:fontRef>
+        </p:style>
+        <p:txBody>
+          <a:bodyPr rtlCol="0" anchor="ctr"/>
+          <a:lstStyle/>
+          <a:p>
+            <a:pPr algn="ctr"/>
+          </a:p>
+        </p:txBody>
+      </p:sp>
+      <p:sp>
+        <p:nvSpPr>
+          <p:cNvPr id="19" name="TextBox 18"/>
+          <p:cNvSpPr txBox="1"/>
+          <p:nvPr/>
+        </p:nvSpPr>
+        <p:spPr>
+          <a:xfrm>
+            <a:off x="1600000" y="2800000"/>
+            <a:ext cx="10150000" cy="620000"/>
+          </a:xfrm>
+          <a:prstGeom prst="rect">
+            <a:avLst/>
+          </a:prstGeom>
+          <a:noFill/>
+        </p:spPr>
+        <p:txBody>
+          <a:bodyPr wrap="square" anchor="ctr">
+            <a:spAutoFit/>
+          </a:bodyPr>
+          <a:lstStyle/>
+          <a:p>
+            <a:pPr algn="l"/>
+            <a:r>
+              <a:rPr sz="1300" b="0">
+                <a:solidFill>
+                  <a:srgbClr val="333333"/>
+                </a:solidFill>
+                <a:latin typeface="Open Sans"/>
+                <a:ea typeface="Open Sans"/>
+                <a:cs typeface="Open Sans"/>
+              </a:rPr>
+              <a:t>Придайте пострадавшему безопасное и удобное положение.</a:t>
+            </a:r>
+          </a:p>
+        </p:txBody>
+      </p:sp>
+      <p:sp>
+        <p:nvSpPr>
+          <p:cNvPr id="20" name="Oval 19"/>
+          <p:cNvSpPr/>
+          <p:nvPr/>
+        </p:nvSpPr>
+        <p:spPr>
+          <a:xfrm>
+            <a:off x="700000" y="3500000"/>
+            <a:ext cx="500000" cy="500000"/>
+          </a:xfrm>
+          <a:prstGeom prst="ellipse">
+            <a:avLst/>
+          </a:prstGeom>
+          <a:solidFill>
+            <a:srgbClr val="555555"/>
+          </a:solidFill>
+          <a:ln>
+            <a:noFill/>
+          </a:ln>
+        </p:spPr>
+        <p:style>
+          <a:lnRef idx="1">
+            <a:schemeClr val="accent1"/>
+          </a:lnRef>
+          <a:fillRef idx="3">
+            <a:schemeClr val="accent1"/>
+          </a:fillRef>
+          <a:effectRef idx="2">
+            <a:schemeClr val="accent1"/>
+          </a:effectRef>
+          <a:fontRef idx="minor">
+            <a:schemeClr val="lt1"/>
+          </a:fontRef>
+        </p:style>
+        <p:txBody>
+          <a:bodyPr rtlCol="0" anchor="ctr"/>
+          <a:lstStyle/>
+          <a:p>
+            <a:pPr algn="ctr"/>
+          </a:p>
+        </p:txBody>
+      </p:sp>
+      <p:sp>
+        <p:nvSpPr>
+          <p:cNvPr id="21" name="TextBox 20"/>
+          <p:cNvSpPr txBox="1"/>
+          <p:nvPr/>
+        </p:nvSpPr>
+        <p:spPr>
+          <a:xfrm>
+            <a:off x="700000" y="3500000"/>
+            <a:ext cx="500000" cy="500000"/>
+          </a:xfrm>
+          <a:prstGeom prst="rect">
+            <a:avLst/>
+          </a:prstGeom>
+          <a:noFill/>
+        </p:spPr>
+        <p:txBody>
+          <a:bodyPr wrap="square" anchor="ctr">
+            <a:spAutoFit/>
+          </a:bodyPr>
+          <a:lstStyle/>
+          <a:p>
+            <a:pPr algn="ctr"/>
+            <a:r>
+              <a:rPr sz="1300" b="1">
+                <a:solidFill>
+                  <a:srgbClr val="FFFFFF"/>
+                </a:solidFill>
+                <a:latin typeface="Open Sans"/>
+                <a:ea typeface="Open Sans"/>
+                <a:cs typeface="Open Sans"/>
+              </a:rPr>
+              <a:t>4</a:t>
+            </a:r>
+          </a:p>
+        </p:txBody>
+      </p:sp>
+      <p:sp>
+        <p:nvSpPr>
+          <p:cNvPr id="22" name="Rectangle 21"/>
+          <p:cNvSpPr/>
+          <p:nvPr/>
+        </p:nvSpPr>
+        <p:spPr>
+          <a:xfrm>
+            <a:off x="1400000" y="3500000"/>
+            <a:ext cx="10550000" cy="620000"/>
+          </a:xfrm>
+          <a:prstGeom prst="rect">
+            <a:avLst/>
+          </a:prstGeom>
+          <a:solidFill>
+            <a:srgbClr val="FFFFFF"/>
+          </a:solidFill>
+          <a:ln w="12700">
+            <a:solidFill>
+              <a:srgbClr val="999999"/>
+            </a:solidFill>
+          </a:ln>
+        </p:spPr>
+        <p:style>
+          <a:lnRef idx="1">
+            <a:schemeClr val="accent1"/>
+          </a:lnRef>
+          <a:fillRef idx="3">
+            <a:schemeClr val="accent1"/>
+          </a:fillRef>
+          <a:effectRef idx="2">
+            <a:schemeClr val="accent1"/>
+          </a:effectRef>
+          <a:fontRef idx="minor">
+            <a:schemeClr val="lt1"/>
+          </a:fontRef>
+        </p:style>
+        <p:txBody>
+          <a:bodyPr rtlCol="0" anchor="ctr"/>
+          <a:lstStyle/>
+          <a:p>
+            <a:pPr algn="ctr"/>
+          </a:p>
+        </p:txBody>
+      </p:sp>
+      <p:sp>
+        <p:nvSpPr>
+          <p:cNvPr id="23" name="TextBox 22"/>
+          <p:cNvSpPr txBox="1"/>
+          <p:nvPr/>
+        </p:nvSpPr>
+        <p:spPr>
+          <a:xfrm>
+            <a:off x="1600000" y="3500000"/>
+            <a:ext cx="10150000" cy="620000"/>
+          </a:xfrm>
+          <a:prstGeom prst="rect">
+            <a:avLst/>
+          </a:prstGeom>
+          <a:noFill/>
+        </p:spPr>
+        <p:txBody>
+          <a:bodyPr wrap="square" anchor="ctr">
+            <a:spAutoFit/>
+          </a:bodyPr>
+          <a:lstStyle/>
+          <a:p>
+            <a:pPr algn="l"/>
+            <a:r>
+              <a:rPr sz="1300" b="0">
+                <a:solidFill>
+                  <a:srgbClr val="333333"/>
+                </a:solidFill>
+                <a:latin typeface="Open Sans"/>
+                <a:ea typeface="Open Sans"/>
+                <a:cs typeface="Open Sans"/>
+              </a:rPr>
+              <a:t>Защитите от холода или перегревания и обеспечьте психологическую поддержку.</a:t>
+            </a:r>
+          </a:p>
+        </p:txBody>
+      </p:sp>
+      <p:sp>
+        <p:nvSpPr>
+          <p:cNvPr id="24" name="Oval 23"/>
+          <p:cNvSpPr/>
+          <p:nvPr/>
+        </p:nvSpPr>
+        <p:spPr>
+          <a:xfrm>
+            <a:off x="700000" y="4200000"/>
+            <a:ext cx="500000" cy="500000"/>
+          </a:xfrm>
+          <a:prstGeom prst="ellipse">
+            <a:avLst/>
+          </a:prstGeom>
+          <a:solidFill>
+            <a:srgbClr val="555555"/>
+          </a:solidFill>
+          <a:ln>
+            <a:noFill/>
+          </a:ln>
+        </p:spPr>
+        <p:style>
+          <a:lnRef idx="1">
+            <a:schemeClr val="accent1"/>
+          </a:lnRef>
+          <a:fillRef idx="3">
+            <a:schemeClr val="accent1"/>
+          </a:fillRef>
+          <a:effectRef idx="2">
+            <a:schemeClr val="accent1"/>
+          </a:effectRef>
+          <a:fontRef idx="minor">
+            <a:schemeClr val="lt1"/>
+          </a:fontRef>
+        </p:style>
+        <p:txBody>
+          <a:bodyPr rtlCol="0" anchor="ctr"/>
+          <a:lstStyle/>
+          <a:p>
+            <a:pPr algn="ctr"/>
+          </a:p>
+        </p:txBody>
+      </p:sp>
+      <p:sp>
+        <p:nvSpPr>
+          <p:cNvPr id="25" name="TextBox 24"/>
+          <p:cNvSpPr txBox="1"/>
+          <p:nvPr/>
+        </p:nvSpPr>
+        <p:spPr>
+          <a:xfrm>
+            <a:off x="700000" y="4200000"/>
+            <a:ext cx="500000" cy="500000"/>
+          </a:xfrm>
+          <a:prstGeom prst="rect">
+            <a:avLst/>
+          </a:prstGeom>
+          <a:noFill/>
+        </p:spPr>
+        <p:txBody>
+          <a:bodyPr wrap="square" anchor="ctr">
+            <a:spAutoFit/>
+          </a:bodyPr>
+          <a:lstStyle/>
+          <a:p>
+            <a:pPr algn="ctr"/>
+            <a:r>
+              <a:rPr sz="1300" b="1">
+                <a:solidFill>
+                  <a:srgbClr val="FFFFFF"/>
+                </a:solidFill>
+                <a:latin typeface="Open Sans"/>
+                <a:ea typeface="Open Sans"/>
+                <a:cs typeface="Open Sans"/>
+              </a:rPr>
+              <a:t>5</a:t>
+            </a:r>
+          </a:p>
+        </p:txBody>
+      </p:sp>
+      <p:sp>
+        <p:nvSpPr>
+          <p:cNvPr id="26" name="Rectangle 25"/>
+          <p:cNvSpPr/>
+          <p:nvPr/>
+        </p:nvSpPr>
+        <p:spPr>
+          <a:xfrm>
+            <a:off x="1400000" y="4200000"/>
+            <a:ext cx="10550000" cy="620000"/>
+          </a:xfrm>
+          <a:prstGeom prst="rect">
+            <a:avLst/>
+          </a:prstGeom>
+          <a:solidFill>
+            <a:srgbClr val="FFFFFF"/>
+          </a:solidFill>
+          <a:ln w="12700">
+            <a:solidFill>
+              <a:srgbClr val="999999"/>
+            </a:solidFill>
+          </a:ln>
+        </p:spPr>
+        <p:style>
+          <a:lnRef idx="1">
+            <a:schemeClr val="accent1"/>
+          </a:lnRef>
+          <a:fillRef idx="3">
+            <a:schemeClr val="accent1"/>
+          </a:fillRef>
+          <a:effectRef idx="2">
+            <a:schemeClr val="accent1"/>
+          </a:effectRef>
+          <a:fontRef idx="minor">
+            <a:schemeClr val="lt1"/>
+          </a:fontRef>
+        </p:style>
+        <p:txBody>
+          <a:bodyPr rtlCol="0" anchor="ctr"/>
+          <a:lstStyle/>
+          <a:p>
+            <a:pPr algn="ctr"/>
+          </a:p>
+        </p:txBody>
+      </p:sp>
+      <p:sp>
+        <p:nvSpPr>
+          <p:cNvPr id="27" name="TextBox 26"/>
+          <p:cNvSpPr txBox="1"/>
+          <p:nvPr/>
+        </p:nvSpPr>
+        <p:spPr>
+          <a:xfrm>
+            <a:off x="1600000" y="4200000"/>
+            <a:ext cx="10150000" cy="620000"/>
+          </a:xfrm>
+          <a:prstGeom prst="rect">
+            <a:avLst/>
+          </a:prstGeom>
+          <a:noFill/>
+        </p:spPr>
+        <p:txBody>
+          <a:bodyPr wrap="square" anchor="ctr">
+            <a:spAutoFit/>
+          </a:bodyPr>
+          <a:lstStyle/>
+          <a:p>
+            <a:pPr algn="l"/>
+            <a:r>
+              <a:rPr sz="1300" b="0">
+                <a:solidFill>
+                  <a:srgbClr val="333333"/>
+                </a:solidFill>
+                <a:latin typeface="Open Sans"/>
+                <a:ea typeface="Open Sans"/>
+                <a:cs typeface="Open Sans"/>
+              </a:rPr>
+              <a:t>Повторно проверяйте сознание, дыхание, повязки и кровотечение.</a:t>
+            </a:r>
+          </a:p>
+        </p:txBody>
+      </p:sp>
+      <p:sp>
+        <p:nvSpPr>
+          <p:cNvPr id="28" name="Oval 27"/>
+          <p:cNvSpPr/>
+          <p:nvPr/>
+        </p:nvSpPr>
+        <p:spPr>
+          <a:xfrm>
+            <a:off x="700000" y="4900000"/>
+            <a:ext cx="500000" cy="500000"/>
+          </a:xfrm>
+          <a:prstGeom prst="ellipse">
+            <a:avLst/>
+          </a:prstGeom>
+          <a:solidFill>
+            <a:srgbClr val="555555"/>
+          </a:solidFill>
+          <a:ln>
+            <a:noFill/>
+          </a:ln>
+        </p:spPr>
+        <p:style>
+          <a:lnRef idx="1">
+            <a:schemeClr val="accent1"/>
+          </a:lnRef>
+          <a:fillRef idx="3">
+            <a:schemeClr val="accent1"/>
+          </a:fillRef>
+          <a:effectRef idx="2">
+            <a:schemeClr val="accent1"/>
+          </a:effectRef>
+          <a:fontRef idx="minor">
+            <a:schemeClr val="lt1"/>
+          </a:fontRef>
+        </p:style>
+        <p:txBody>
+          <a:bodyPr rtlCol="0" anchor="ctr"/>
+          <a:lstStyle/>
+          <a:p>
+            <a:pPr algn="ctr"/>
+          </a:p>
+        </p:txBody>
+      </p:sp>
+      <p:sp>
+        <p:nvSpPr>
+          <p:cNvPr id="29" name="TextBox 28"/>
+          <p:cNvSpPr txBox="1"/>
+          <p:nvPr/>
+        </p:nvSpPr>
+        <p:spPr>
+          <a:xfrm>
+            <a:off x="700000" y="4900000"/>
+            <a:ext cx="500000" cy="500000"/>
+          </a:xfrm>
+          <a:prstGeom prst="rect">
+            <a:avLst/>
+          </a:prstGeom>
+          <a:noFill/>
+        </p:spPr>
+        <p:txBody>
+          <a:bodyPr wrap="square" anchor="ctr">
+            <a:spAutoFit/>
+          </a:bodyPr>
+          <a:lstStyle/>
+          <a:p>
+            <a:pPr algn="ctr"/>
+            <a:r>
+              <a:rPr sz="1300" b="1">
+                <a:solidFill>
+                  <a:srgbClr val="FFFFFF"/>
+                </a:solidFill>
+                <a:latin typeface="Open Sans"/>
+                <a:ea typeface="Open Sans"/>
+                <a:cs typeface="Open Sans"/>
+              </a:rPr>
+              <a:t>6</a:t>
+            </a:r>
+          </a:p>
+        </p:txBody>
+      </p:sp>
+      <p:sp>
+        <p:nvSpPr>
+          <p:cNvPr id="30" name="Rectangle 29"/>
+          <p:cNvSpPr/>
+          <p:nvPr/>
+        </p:nvSpPr>
+        <p:spPr>
+          <a:xfrm>
+            <a:off x="1400000" y="4900000"/>
+            <a:ext cx="10550000" cy="620000"/>
+          </a:xfrm>
+          <a:prstGeom prst="rect">
+            <a:avLst/>
+          </a:prstGeom>
+          <a:solidFill>
+            <a:srgbClr val="FFFFFF"/>
+          </a:solidFill>
+          <a:ln w="12700">
+            <a:solidFill>
+              <a:srgbClr val="999999"/>
+            </a:solidFill>
+          </a:ln>
+        </p:spPr>
+        <p:style>
+          <a:lnRef idx="1">
+            <a:schemeClr val="accent1"/>
+          </a:lnRef>
+          <a:fillRef idx="3">
+            <a:schemeClr val="accent1"/>
+          </a:fillRef>
+          <a:effectRef idx="2">
+            <a:schemeClr val="accent1"/>
+          </a:effectRef>
+          <a:fontRef idx="minor">
+            <a:schemeClr val="lt1"/>
+          </a:fontRef>
+        </p:style>
+        <p:txBody>
+          <a:bodyPr rtlCol="0" anchor="ctr"/>
+          <a:lstStyle/>
+          <a:p>
+            <a:pPr algn="ctr"/>
+          </a:p>
+        </p:txBody>
+      </p:sp>
+      <p:sp>
+        <p:nvSpPr>
+          <p:cNvPr id="31" name="TextBox 30"/>
+          <p:cNvSpPr txBox="1"/>
+          <p:nvPr/>
+        </p:nvSpPr>
+        <p:spPr>
+          <a:xfrm>
+            <a:off x="1600000" y="4900000"/>
+            <a:ext cx="10150000" cy="620000"/>
+          </a:xfrm>
+          <a:prstGeom prst="rect">
+            <a:avLst/>
+          </a:prstGeom>
+          <a:noFill/>
+        </p:spPr>
+        <p:txBody>
+          <a:bodyPr wrap="square" anchor="ctr">
+            <a:spAutoFit/>
+          </a:bodyPr>
+          <a:lstStyle/>
+          <a:p>
+            <a:pPr algn="l"/>
+            <a:r>
+              <a:rPr sz="1300" b="0">
+                <a:solidFill>
+                  <a:srgbClr val="333333"/>
+                </a:solidFill>
+                <a:latin typeface="Open Sans"/>
+                <a:ea typeface="Open Sans"/>
+                <a:cs typeface="Open Sans"/>
+              </a:rPr>
+              <a:t>Передайте специалистам жалобы, находки и выполненные действия.</a:t>
+            </a:r>
+          </a:p>
+        </p:txBody>
+      </p:sp>
+    </p:spTree>
+  </p:cSld>
+  <p:clrMapOvr>
+    <a:masterClrMapping/>
+  </p:clrMapOvr>
+</p:sld>
+</file>
+
+<file path=ppt/slides/slide15.xml><?xml version="1.0" encoding="utf-8"?>
+<p:sld xmlns:a="http://schemas.openxmlformats.org/drawingml/2006/main" xmlns:p="http://schemas.openxmlformats.org/presentationml/2006/main" xmlns:r="http://schemas.openxmlformats.org/officeDocument/2006/relationships">
+  <p:cSld>
+    <p:spTree>
+      <p:nvGrpSpPr>
+        <p:cNvPr id="1" name=""/>
+        <p:cNvGrpSpPr/>
+        <p:nvPr/>
+      </p:nvGrpSpPr>
+      <p:grpSpPr/>
+      <p:sp>
+        <p:nvSpPr>
+          <p:cNvPr id="2" name="Rectangle 1"/>
+          <p:cNvSpPr/>
+          <p:nvPr/>
+        </p:nvSpPr>
+        <p:spPr>
+          <a:xfrm>
+            <a:off x="0" y="0"/>
+            <a:ext cx="12191695" cy="6858000"/>
+          </a:xfrm>
+          <a:prstGeom prst="rect">
+            <a:avLst/>
+          </a:prstGeom>
+          <a:solidFill>
+            <a:srgbClr val="FFFFFF"/>
+          </a:solidFill>
+          <a:ln>
+            <a:noFill/>
+          </a:ln>
+        </p:spPr>
+        <p:style>
+          <a:lnRef idx="1">
+            <a:schemeClr val="accent1"/>
+          </a:lnRef>
+          <a:fillRef idx="3">
+            <a:schemeClr val="accent1"/>
+          </a:fillRef>
+          <a:effectRef idx="2">
+            <a:schemeClr val="accent1"/>
+          </a:effectRef>
+          <a:fontRef idx="minor">
+            <a:schemeClr val="lt1"/>
+          </a:fontRef>
+        </p:style>
+        <p:txBody>
+          <a:bodyPr rtlCol="0" anchor="ctr"/>
+          <a:lstStyle/>
+          <a:p>
+            <a:pPr algn="ctr"/>
+          </a:p>
+        </p:txBody>
+      </p:sp>
+      <p:sp>
+        <p:nvSpPr>
+          <p:cNvPr id="3" name="TextBox 2"/>
+          <p:cNvSpPr txBox="1"/>
+          <p:nvPr/>
+        </p:nvSpPr>
+        <p:spPr>
+          <a:xfrm>
+            <a:off x="700000" y="250000"/>
+            <a:ext cx="11200000" cy="550000"/>
+          </a:xfrm>
+          <a:prstGeom prst="rect">
+            <a:avLst/>
+          </a:prstGeom>
+          <a:noFill/>
+        </p:spPr>
+        <p:txBody>
+          <a:bodyPr wrap="square" anchor="t">
+            <a:spAutoFit/>
+          </a:bodyPr>
+          <a:lstStyle/>
+          <a:p>
+            <a:pPr algn="l"/>
+            <a:r>
+              <a:rPr sz="2200" b="1">
+                <a:solidFill>
+                  <a:srgbClr val="333333"/>
+                </a:solidFill>
+                <a:latin typeface="Open Sans"/>
+                <a:ea typeface="Open Sans"/>
+                <a:cs typeface="Open Sans"/>
+              </a:rPr>
+              <a:t>ГЛАВНОЕ ЗАПОМНИТЬ</a:t>
+            </a:r>
+          </a:p>
+        </p:txBody>
+      </p:sp>
+      <p:sp>
+        <p:nvSpPr>
+          <p:cNvPr id="4" name="Rectangle 3"/>
+          <p:cNvSpPr/>
+          <p:nvPr/>
+        </p:nvSpPr>
+        <p:spPr>
+          <a:xfrm>
+            <a:off x="700000" y="850000"/>
+            <a:ext cx="9000000" cy="28000"/>
+          </a:xfrm>
+          <a:prstGeom prst="rect">
+            <a:avLst/>
+          </a:prstGeom>
+          <a:solidFill>
+            <a:srgbClr val="555555"/>
+          </a:solidFill>
+          <a:ln>
+            <a:noFill/>
+          </a:ln>
+        </p:spPr>
+        <p:style>
+          <a:lnRef idx="1">
+            <a:schemeClr val="accent1"/>
+          </a:lnRef>
+          <a:fillRef idx="3">
+            <a:schemeClr val="accent1"/>
+          </a:fillRef>
+          <a:effectRef idx="2">
+            <a:schemeClr val="accent1"/>
+          </a:effectRef>
+          <a:fontRef idx="minor">
+            <a:schemeClr val="lt1"/>
+          </a:fontRef>
+        </p:style>
+        <p:txBody>
+          <a:bodyPr rtlCol="0" anchor="ctr"/>
+          <a:lstStyle/>
+          <a:p>
+            <a:pPr algn="ctr"/>
+          </a:p>
+        </p:txBody>
+      </p:sp>
+      <p:sp>
+        <p:nvSpPr>
+          <p:cNvPr id="5" name="TextBox 4"/>
+          <p:cNvSpPr txBox="1"/>
+          <p:nvPr/>
+        </p:nvSpPr>
+        <p:spPr>
+          <a:xfrm>
+            <a:off x="700000" y="920000"/>
+            <a:ext cx="11000000" cy="350000"/>
+          </a:xfrm>
+          <a:prstGeom prst="rect">
+            <a:avLst/>
+          </a:prstGeom>
+          <a:noFill/>
+        </p:spPr>
+        <p:txBody>
+          <a:bodyPr wrap="square" anchor="t">
+            <a:spAutoFit/>
+          </a:bodyPr>
+          <a:lstStyle/>
+          <a:p>
+            <a:pPr algn="l"/>
+            <a:r>
+              <a:rPr sz="1200" b="0">
+                <a:solidFill>
+                  <a:srgbClr val="666666"/>
+                </a:solidFill>
+                <a:latin typeface="Open Sans"/>
+                <a:ea typeface="Open Sans"/>
+                <a:cs typeface="Open Sans"/>
+              </a:rPr>
+              <a:t>Оказание первой помощи при травмах, ранениях и поражениях, прочих состояниях</a:t>
+            </a:r>
+          </a:p>
+        </p:txBody>
+      </p:sp>
+      <p:sp>
+        <p:nvSpPr>
+          <p:cNvPr id="6" name="Rectangle 5"/>
+          <p:cNvSpPr/>
+          <p:nvPr/>
+        </p:nvSpPr>
+        <p:spPr>
+          <a:xfrm>
+            <a:off x="0" y="2800000"/>
+            <a:ext cx="420000" cy="420000"/>
+          </a:xfrm>
+          <a:prstGeom prst="rect">
+            <a:avLst/>
+          </a:prstGeom>
+          <a:solidFill>
+            <a:srgbClr val="555555"/>
+          </a:solidFill>
+          <a:ln>
+            <a:noFill/>
+          </a:ln>
+        </p:spPr>
+        <p:style>
+          <a:lnRef idx="1">
+            <a:schemeClr val="accent1"/>
+          </a:lnRef>
+          <a:fillRef idx="3">
+            <a:schemeClr val="accent1"/>
+          </a:fillRef>
+          <a:effectRef idx="2">
+            <a:schemeClr val="accent1"/>
+          </a:effectRef>
+          <a:fontRef idx="minor">
+            <a:schemeClr val="lt1"/>
+          </a:fontRef>
+        </p:style>
+        <p:txBody>
+          <a:bodyPr rtlCol="0" anchor="ctr"/>
+          <a:lstStyle/>
+          <a:p>
+            <a:pPr algn="ctr"/>
+          </a:p>
+        </p:txBody>
+      </p:sp>
+      <p:sp>
+        <p:nvSpPr>
+          <p:cNvPr id="7" name="TextBox 6"/>
+          <p:cNvSpPr txBox="1"/>
+          <p:nvPr/>
+        </p:nvSpPr>
+        <p:spPr>
+          <a:xfrm>
+            <a:off x="0" y="2800000"/>
+            <a:ext cx="420000" cy="420000"/>
+          </a:xfrm>
+          <a:prstGeom prst="rect">
+            <a:avLst/>
+          </a:prstGeom>
+          <a:noFill/>
+        </p:spPr>
+        <p:txBody>
+          <a:bodyPr wrap="square" anchor="ctr">
+            <a:spAutoFit/>
+          </a:bodyPr>
+          <a:lstStyle/>
+          <a:p>
+            <a:pPr algn="ctr"/>
+            <a:r>
+              <a:rPr sz="1400" b="1">
+                <a:solidFill>
+                  <a:srgbClr val="FFFFFF"/>
+                </a:solidFill>
+                <a:latin typeface="Open Sans"/>
+                <a:ea typeface="Open Sans"/>
+                <a:cs typeface="Open Sans"/>
+              </a:rPr>
+              <a:t>15</a:t>
+            </a:r>
+          </a:p>
+        </p:txBody>
+      </p:sp>
+      <p:sp>
+        <p:nvSpPr>
+          <p:cNvPr id="8" name="Rectangle 7"/>
+          <p:cNvSpPr/>
+          <p:nvPr/>
+        </p:nvSpPr>
+        <p:spPr>
+          <a:xfrm>
+            <a:off x="700000" y="1450000"/>
+            <a:ext cx="11000000" cy="850000"/>
+          </a:xfrm>
+          <a:prstGeom prst="rect">
+            <a:avLst/>
+          </a:prstGeom>
+          <a:solidFill>
+            <a:srgbClr val="FFFFFF"/>
+          </a:solidFill>
+          <a:ln w="12700">
+            <a:solidFill>
+              <a:srgbClr val="999999"/>
+            </a:solidFill>
+          </a:ln>
+        </p:spPr>
+        <p:style>
+          <a:lnRef idx="1">
+            <a:schemeClr val="accent1"/>
+          </a:lnRef>
+          <a:fillRef idx="3">
+            <a:schemeClr val="accent1"/>
+          </a:fillRef>
+          <a:effectRef idx="2">
+            <a:schemeClr val="accent1"/>
+          </a:effectRef>
+          <a:fontRef idx="minor">
+            <a:schemeClr val="lt1"/>
+          </a:fontRef>
+        </p:style>
+        <p:txBody>
+          <a:bodyPr rtlCol="0" anchor="ctr"/>
+          <a:lstStyle/>
+          <a:p>
+            <a:pPr algn="ctr"/>
+          </a:p>
+        </p:txBody>
+      </p:sp>
+      <p:sp>
+        <p:nvSpPr>
+          <p:cNvPr id="9" name="Rectangle 8"/>
+          <p:cNvSpPr/>
+          <p:nvPr/>
+        </p:nvSpPr>
+        <p:spPr>
+          <a:xfrm>
+            <a:off x="700000" y="1450000"/>
+            <a:ext cx="90000" cy="850000"/>
+          </a:xfrm>
+          <a:prstGeom prst="rect">
+            <a:avLst/>
+          </a:prstGeom>
+          <a:solidFill>
+            <a:srgbClr val="CC0000"/>
+          </a:solidFill>
+          <a:ln>
+            <a:noFill/>
+          </a:ln>
+        </p:spPr>
+        <p:style>
+          <a:lnRef idx="1">
+            <a:schemeClr val="accent1"/>
+          </a:lnRef>
+          <a:fillRef idx="3">
+            <a:schemeClr val="accent1"/>
+          </a:fillRef>
+          <a:effectRef idx="2">
+            <a:schemeClr val="accent1"/>
+          </a:effectRef>
+          <a:fontRef idx="minor">
+            <a:schemeClr val="lt1"/>
+          </a:fontRef>
+        </p:style>
+        <p:txBody>
+          <a:bodyPr rtlCol="0" anchor="ctr"/>
+          <a:lstStyle/>
+          <a:p>
+            <a:pPr algn="ctr"/>
+          </a:p>
+        </p:txBody>
+      </p:sp>
+      <p:sp>
+        <p:nvSpPr>
+          <p:cNvPr id="10" name="TextBox 9"/>
+          <p:cNvSpPr txBox="1"/>
+          <p:nvPr/>
+        </p:nvSpPr>
+        <p:spPr>
+          <a:xfrm>
+            <a:off x="1000000" y="1530000"/>
+            <a:ext cx="10400000" cy="690000"/>
+          </a:xfrm>
+          <a:prstGeom prst="rect">
+            <a:avLst/>
+          </a:prstGeom>
+          <a:noFill/>
+        </p:spPr>
+        <p:txBody>
+          <a:bodyPr wrap="square" anchor="ctr">
+            <a:spAutoFit/>
+          </a:bodyPr>
+          <a:lstStyle/>
+          <a:p>
+            <a:pPr algn="l"/>
+            <a:r>
+              <a:rPr sz="1300" b="0">
+                <a:solidFill>
+                  <a:srgbClr val="333333"/>
+                </a:solidFill>
+                <a:latin typeface="Open Sans"/>
+                <a:ea typeface="Open Sans"/>
+                <a:cs typeface="Open Sans"/>
+              </a:rPr>
+              <a:t>Подробный осмотр проводят после устранения угроз жизни</a:t>
+            </a:r>
+          </a:p>
+        </p:txBody>
+      </p:sp>
+      <p:sp>
+        <p:nvSpPr>
+          <p:cNvPr id="11" name="Rectangle 10"/>
+          <p:cNvSpPr/>
+          <p:nvPr/>
+        </p:nvSpPr>
+        <p:spPr>
+          <a:xfrm>
+            <a:off x="700000" y="2380000"/>
+            <a:ext cx="11000000" cy="850000"/>
+          </a:xfrm>
+          <a:prstGeom prst="rect">
+            <a:avLst/>
+          </a:prstGeom>
+          <a:solidFill>
+            <a:srgbClr val="FFFFFF"/>
+          </a:solidFill>
+          <a:ln w="12700">
+            <a:solidFill>
+              <a:srgbClr val="999999"/>
+            </a:solidFill>
+          </a:ln>
+        </p:spPr>
+        <p:style>
+          <a:lnRef idx="1">
+            <a:schemeClr val="accent1"/>
+          </a:lnRef>
+          <a:fillRef idx="3">
+            <a:schemeClr val="accent1"/>
+          </a:fillRef>
+          <a:effectRef idx="2">
+            <a:schemeClr val="accent1"/>
+          </a:effectRef>
+          <a:fontRef idx="minor">
+            <a:schemeClr val="lt1"/>
+          </a:fontRef>
+        </p:style>
+        <p:txBody>
+          <a:bodyPr rtlCol="0" anchor="ctr"/>
+          <a:lstStyle/>
+          <a:p>
+            <a:pPr algn="ctr"/>
+          </a:p>
+        </p:txBody>
+      </p:sp>
+      <p:sp>
+        <p:nvSpPr>
+          <p:cNvPr id="12" name="Rectangle 11"/>
+          <p:cNvSpPr/>
+          <p:nvPr/>
+        </p:nvSpPr>
+        <p:spPr>
+          <a:xfrm>
+            <a:off x="700000" y="2380000"/>
+            <a:ext cx="90000" cy="850000"/>
+          </a:xfrm>
+          <a:prstGeom prst="rect">
+            <a:avLst/>
+          </a:prstGeom>
+          <a:solidFill>
+            <a:srgbClr val="CC0000"/>
+          </a:solidFill>
+          <a:ln>
+            <a:noFill/>
+          </a:ln>
+        </p:spPr>
+        <p:style>
+          <a:lnRef idx="1">
+            <a:schemeClr val="accent1"/>
+          </a:lnRef>
+          <a:fillRef idx="3">
+            <a:schemeClr val="accent1"/>
+          </a:fillRef>
+          <a:effectRef idx="2">
+            <a:schemeClr val="accent1"/>
+          </a:effectRef>
+          <a:fontRef idx="minor">
+            <a:schemeClr val="lt1"/>
+          </a:fontRef>
+        </p:style>
+        <p:txBody>
+          <a:bodyPr rtlCol="0" anchor="ctr"/>
+          <a:lstStyle/>
+          <a:p>
+            <a:pPr algn="ctr"/>
+          </a:p>
+        </p:txBody>
+      </p:sp>
+      <p:sp>
+        <p:nvSpPr>
+          <p:cNvPr id="13" name="TextBox 12"/>
+          <p:cNvSpPr txBox="1"/>
+          <p:nvPr/>
+        </p:nvSpPr>
+        <p:spPr>
+          <a:xfrm>
+            <a:off x="1000000" y="2460000"/>
+            <a:ext cx="10400000" cy="690000"/>
+          </a:xfrm>
+          <a:prstGeom prst="rect">
+            <a:avLst/>
+          </a:prstGeom>
+          <a:noFill/>
+        </p:spPr>
+        <p:txBody>
+          <a:bodyPr wrap="square" anchor="ctr">
+            <a:spAutoFit/>
+          </a:bodyPr>
+          <a:lstStyle/>
+          <a:p>
+            <a:pPr algn="l"/>
+            <a:r>
+              <a:rPr sz="1300" b="0">
+                <a:solidFill>
+                  <a:srgbClr val="333333"/>
+                </a:solidFill>
+                <a:latin typeface="Open Sans"/>
+                <a:ea typeface="Open Sans"/>
+                <a:cs typeface="Open Sans"/>
+              </a:rPr>
+              <a:t>Двигайтесь последовательно: от головы к конечностям</a:t>
+            </a:r>
+          </a:p>
+        </p:txBody>
+      </p:sp>
+      <p:sp>
+        <p:nvSpPr>
+          <p:cNvPr id="14" name="Rectangle 13"/>
+          <p:cNvSpPr/>
+          <p:nvPr/>
+        </p:nvSpPr>
+        <p:spPr>
+          <a:xfrm>
+            <a:off x="700000" y="3310000"/>
+            <a:ext cx="11000000" cy="850000"/>
+          </a:xfrm>
+          <a:prstGeom prst="rect">
+            <a:avLst/>
+          </a:prstGeom>
+          <a:solidFill>
+            <a:srgbClr val="FFFFFF"/>
+          </a:solidFill>
+          <a:ln w="12700">
+            <a:solidFill>
+              <a:srgbClr val="999999"/>
+            </a:solidFill>
+          </a:ln>
+        </p:spPr>
+        <p:style>
+          <a:lnRef idx="1">
+            <a:schemeClr val="accent1"/>
+          </a:lnRef>
+          <a:fillRef idx="3">
+            <a:schemeClr val="accent1"/>
+          </a:fillRef>
+          <a:effectRef idx="2">
+            <a:schemeClr val="accent1"/>
+          </a:effectRef>
+          <a:fontRef idx="minor">
+            <a:schemeClr val="lt1"/>
+          </a:fontRef>
+        </p:style>
+        <p:txBody>
+          <a:bodyPr rtlCol="0" anchor="ctr"/>
+          <a:lstStyle/>
+          <a:p>
+            <a:pPr algn="ctr"/>
+          </a:p>
+        </p:txBody>
+      </p:sp>
+      <p:sp>
+        <p:nvSpPr>
+          <p:cNvPr id="15" name="Rectangle 14"/>
+          <p:cNvSpPr/>
+          <p:nvPr/>
+        </p:nvSpPr>
+        <p:spPr>
+          <a:xfrm>
+            <a:off x="700000" y="3310000"/>
+            <a:ext cx="90000" cy="850000"/>
+          </a:xfrm>
+          <a:prstGeom prst="rect">
+            <a:avLst/>
+          </a:prstGeom>
+          <a:solidFill>
+            <a:srgbClr val="CC0000"/>
+          </a:solidFill>
+          <a:ln>
+            <a:noFill/>
+          </a:ln>
+        </p:spPr>
+        <p:style>
+          <a:lnRef idx="1">
+            <a:schemeClr val="accent1"/>
+          </a:lnRef>
+          <a:fillRef idx="3">
+            <a:schemeClr val="accent1"/>
+          </a:fillRef>
+          <a:effectRef idx="2">
+            <a:schemeClr val="accent1"/>
+          </a:effectRef>
+          <a:fontRef idx="minor">
+            <a:schemeClr val="lt1"/>
+          </a:fontRef>
+        </p:style>
+        <p:txBody>
+          <a:bodyPr rtlCol="0" anchor="ctr"/>
+          <a:lstStyle/>
+          <a:p>
+            <a:pPr algn="ctr"/>
+          </a:p>
+        </p:txBody>
+      </p:sp>
+      <p:sp>
+        <p:nvSpPr>
+          <p:cNvPr id="16" name="TextBox 15"/>
+          <p:cNvSpPr txBox="1"/>
+          <p:nvPr/>
+        </p:nvSpPr>
+        <p:spPr>
+          <a:xfrm>
+            <a:off x="1000000" y="3390000"/>
+            <a:ext cx="10400000" cy="690000"/>
+          </a:xfrm>
+          <a:prstGeom prst="rect">
+            <a:avLst/>
+          </a:prstGeom>
+          <a:noFill/>
+        </p:spPr>
+        <p:txBody>
+          <a:bodyPr wrap="square" anchor="ctr">
+            <a:spAutoFit/>
+          </a:bodyPr>
+          <a:lstStyle/>
+          <a:p>
+            <a:pPr algn="l"/>
+            <a:r>
+              <a:rPr sz="1300" b="0">
+                <a:solidFill>
+                  <a:srgbClr val="333333"/>
+                </a:solidFill>
+                <a:latin typeface="Open Sans"/>
+                <a:ea typeface="Open Sans"/>
+                <a:cs typeface="Open Sans"/>
+              </a:rPr>
+              <a:t>Шею и спину проверяйте без лишних движений</a:t>
+            </a:r>
+          </a:p>
+        </p:txBody>
+      </p:sp>
+      <p:sp>
+        <p:nvSpPr>
+          <p:cNvPr id="17" name="Rectangle 16"/>
+          <p:cNvSpPr/>
+          <p:nvPr/>
+        </p:nvSpPr>
+        <p:spPr>
+          <a:xfrm>
+            <a:off x="700000" y="4240000"/>
+            <a:ext cx="11000000" cy="850000"/>
+          </a:xfrm>
+          <a:prstGeom prst="rect">
+            <a:avLst/>
+          </a:prstGeom>
+          <a:solidFill>
+            <a:srgbClr val="FFFFFF"/>
+          </a:solidFill>
+          <a:ln w="12700">
+            <a:solidFill>
+              <a:srgbClr val="999999"/>
+            </a:solidFill>
+          </a:ln>
+        </p:spPr>
+        <p:style>
+          <a:lnRef idx="1">
+            <a:schemeClr val="accent1"/>
+          </a:lnRef>
+          <a:fillRef idx="3">
+            <a:schemeClr val="accent1"/>
+          </a:fillRef>
+          <a:effectRef idx="2">
+            <a:schemeClr val="accent1"/>
+          </a:effectRef>
+          <a:fontRef idx="minor">
+            <a:schemeClr val="lt1"/>
+          </a:fontRef>
+        </p:style>
+        <p:txBody>
+          <a:bodyPr rtlCol="0" anchor="ctr"/>
+          <a:lstStyle/>
+          <a:p>
+            <a:pPr algn="ctr"/>
+          </a:p>
+        </p:txBody>
+      </p:sp>
+      <p:sp>
+        <p:nvSpPr>
+          <p:cNvPr id="18" name="Rectangle 17"/>
+          <p:cNvSpPr/>
+          <p:nvPr/>
+        </p:nvSpPr>
+        <p:spPr>
+          <a:xfrm>
+            <a:off x="700000" y="4240000"/>
+            <a:ext cx="90000" cy="850000"/>
+          </a:xfrm>
+          <a:prstGeom prst="rect">
+            <a:avLst/>
+          </a:prstGeom>
+          <a:solidFill>
+            <a:srgbClr val="CC0000"/>
+          </a:solidFill>
+          <a:ln>
+            <a:noFill/>
+          </a:ln>
+        </p:spPr>
+        <p:style>
+          <a:lnRef idx="1">
+            <a:schemeClr val="accent1"/>
+          </a:lnRef>
+          <a:fillRef idx="3">
+            <a:schemeClr val="accent1"/>
+          </a:fillRef>
+          <a:effectRef idx="2">
+            <a:schemeClr val="accent1"/>
+          </a:effectRef>
+          <a:fontRef idx="minor">
+            <a:schemeClr val="lt1"/>
+          </a:fontRef>
+        </p:style>
+        <p:txBody>
+          <a:bodyPr rtlCol="0" anchor="ctr"/>
+          <a:lstStyle/>
+          <a:p>
+            <a:pPr algn="ctr"/>
+          </a:p>
+        </p:txBody>
+      </p:sp>
+      <p:sp>
+        <p:nvSpPr>
+          <p:cNvPr id="19" name="TextBox 18"/>
+          <p:cNvSpPr txBox="1"/>
+          <p:nvPr/>
+        </p:nvSpPr>
+        <p:spPr>
+          <a:xfrm>
+            <a:off x="1000000" y="4320000"/>
+            <a:ext cx="10400000" cy="690000"/>
+          </a:xfrm>
+          <a:prstGeom prst="rect">
+            <a:avLst/>
+          </a:prstGeom>
+          <a:noFill/>
+        </p:spPr>
+        <p:txBody>
+          <a:bodyPr wrap="square" anchor="ctr">
+            <a:spAutoFit/>
+          </a:bodyPr>
+          <a:lstStyle/>
+          <a:p>
+            <a:pPr algn="l"/>
+            <a:r>
+              <a:rPr sz="1300" b="0">
+                <a:solidFill>
+                  <a:srgbClr val="333333"/>
+                </a:solidFill>
+                <a:latin typeface="Open Sans"/>
+                <a:ea typeface="Open Sans"/>
+                <a:cs typeface="Open Sans"/>
+              </a:rPr>
+              <a:t>Синяки на животе могут указывать на внутреннюю травму</a:t>
+            </a:r>
+          </a:p>
+        </p:txBody>
+      </p:sp>
+      <p:sp>
+        <p:nvSpPr>
+          <p:cNvPr id="20" name="Rectangle 19"/>
+          <p:cNvSpPr/>
+          <p:nvPr/>
+        </p:nvSpPr>
+        <p:spPr>
+          <a:xfrm>
+            <a:off x="700000" y="5170000"/>
+            <a:ext cx="11000000" cy="850000"/>
+          </a:xfrm>
+          <a:prstGeom prst="rect">
+            <a:avLst/>
+          </a:prstGeom>
+          <a:solidFill>
+            <a:srgbClr val="FFFFFF"/>
+          </a:solidFill>
+          <a:ln w="12700">
+            <a:solidFill>
+              <a:srgbClr val="999999"/>
+            </a:solidFill>
+          </a:ln>
+        </p:spPr>
+        <p:style>
+          <a:lnRef idx="1">
+            <a:schemeClr val="accent1"/>
+          </a:lnRef>
+          <a:fillRef idx="3">
+            <a:schemeClr val="accent1"/>
+          </a:fillRef>
+          <a:effectRef idx="2">
+            <a:schemeClr val="accent1"/>
+          </a:effectRef>
+          <a:fontRef idx="minor">
+            <a:schemeClr val="lt1"/>
+          </a:fontRef>
+        </p:style>
+        <p:txBody>
+          <a:bodyPr rtlCol="0" anchor="ctr"/>
+          <a:lstStyle/>
+          <a:p>
+            <a:pPr algn="ctr"/>
+          </a:p>
+        </p:txBody>
+      </p:sp>
+      <p:sp>
+        <p:nvSpPr>
+          <p:cNvPr id="21" name="Rectangle 20"/>
+          <p:cNvSpPr/>
+          <p:nvPr/>
+        </p:nvSpPr>
+        <p:spPr>
+          <a:xfrm>
+            <a:off x="700000" y="5170000"/>
+            <a:ext cx="90000" cy="850000"/>
+          </a:xfrm>
+          <a:prstGeom prst="rect">
+            <a:avLst/>
+          </a:prstGeom>
+          <a:solidFill>
+            <a:srgbClr val="CC0000"/>
+          </a:solidFill>
+          <a:ln>
+            <a:noFill/>
+          </a:ln>
+        </p:spPr>
+        <p:style>
+          <a:lnRef idx="1">
+            <a:schemeClr val="accent1"/>
+          </a:lnRef>
+          <a:fillRef idx="3">
+            <a:schemeClr val="accent1"/>
+          </a:fillRef>
+          <a:effectRef idx="2">
+            <a:schemeClr val="accent1"/>
+          </a:effectRef>
+          <a:fontRef idx="minor">
+            <a:schemeClr val="lt1"/>
+          </a:fontRef>
+        </p:style>
+        <p:txBody>
+          <a:bodyPr rtlCol="0" anchor="ctr"/>
+          <a:lstStyle/>
+          <a:p>
+            <a:pPr algn="ctr"/>
+          </a:p>
+        </p:txBody>
+      </p:sp>
+      <p:sp>
+        <p:nvSpPr>
+          <p:cNvPr id="22" name="TextBox 21"/>
+          <p:cNvSpPr txBox="1"/>
+          <p:nvPr/>
+        </p:nvSpPr>
+        <p:spPr>
+          <a:xfrm>
+            <a:off x="1000000" y="5250000"/>
+            <a:ext cx="10400000" cy="690000"/>
+          </a:xfrm>
+          <a:prstGeom prst="rect">
+            <a:avLst/>
+          </a:prstGeom>
+          <a:noFill/>
+        </p:spPr>
+        <p:txBody>
+          <a:bodyPr wrap="square" anchor="ctr">
+            <a:spAutoFit/>
+          </a:bodyPr>
+          <a:lstStyle/>
+          <a:p>
+            <a:pPr algn="l"/>
+            <a:r>
+              <a:rPr sz="1300" b="0">
+                <a:solidFill>
+                  <a:srgbClr val="333333"/>
+                </a:solidFill>
+                <a:latin typeface="Open Sans"/>
+                <a:ea typeface="Open Sans"/>
+                <a:cs typeface="Open Sans"/>
+              </a:rPr>
+              <a:t>Сопоставляйте найденные признаки с жалобами</a:t>
+            </a:r>
+          </a:p>
+        </p:txBody>
+      </p:sp>
+    </p:spTree>
+  </p:cSld>
+  <p:clrMapOvr>
+    <a:masterClrMapping/>
+  </p:clrMapOvr>
+</p:sld>
+</file>
+
+<file path=ppt/slides/slide16.xml><?xml version="1.0" encoding="utf-8"?>
+<p:sld xmlns:a="http://schemas.openxmlformats.org/drawingml/2006/main" xmlns:p="http://schemas.openxmlformats.org/presentationml/2006/main" xmlns:r="http://schemas.openxmlformats.org/officeDocument/2006/relationships">
+  <p:cSld>
+    <p:spTree>
+      <p:nvGrpSpPr>
+        <p:cNvPr id="1" name=""/>
+        <p:cNvGrpSpPr/>
+        <p:nvPr/>
+      </p:nvGrpSpPr>
+      <p:grpSpPr/>
+      <p:sp>
+        <p:nvSpPr>
+          <p:cNvPr id="2" name="Rectangle 1"/>
+          <p:cNvSpPr/>
+          <p:nvPr/>
+        </p:nvSpPr>
+        <p:spPr>
+          <a:xfrm>
+            <a:off x="0" y="0"/>
+            <a:ext cx="12191695" cy="6858000"/>
+          </a:xfrm>
+          <a:prstGeom prst="rect">
+            <a:avLst/>
+          </a:prstGeom>
+          <a:solidFill>
+            <a:srgbClr val="FFFFFF"/>
+          </a:solidFill>
+          <a:ln>
+            <a:noFill/>
+          </a:ln>
+        </p:spPr>
+        <p:style>
+          <a:lnRef idx="1">
+            <a:schemeClr val="accent1"/>
+          </a:lnRef>
+          <a:fillRef idx="3">
+            <a:schemeClr val="accent1"/>
+          </a:fillRef>
+          <a:effectRef idx="2">
+            <a:schemeClr val="accent1"/>
+          </a:effectRef>
+          <a:fontRef idx="minor">
+            <a:schemeClr val="lt1"/>
+          </a:fontRef>
+        </p:style>
+        <p:txBody>
+          <a:bodyPr rtlCol="0" anchor="ctr"/>
+          <a:lstStyle/>
+          <a:p>
+            <a:pPr algn="ctr"/>
+          </a:p>
+        </p:txBody>
+      </p:sp>
+      <p:sp>
+        <p:nvSpPr>
+          <p:cNvPr id="3" name="TextBox 2"/>
+          <p:cNvSpPr txBox="1"/>
+          <p:nvPr/>
+        </p:nvSpPr>
+        <p:spPr>
+          <a:xfrm>
+            <a:off x="700000" y="250000"/>
+            <a:ext cx="11200000" cy="550000"/>
+          </a:xfrm>
+          <a:prstGeom prst="rect">
+            <a:avLst/>
+          </a:prstGeom>
+          <a:noFill/>
+        </p:spPr>
+        <p:txBody>
+          <a:bodyPr wrap="square" anchor="t">
+            <a:spAutoFit/>
+          </a:bodyPr>
+          <a:lstStyle/>
+          <a:p>
+            <a:pPr algn="l"/>
+            <a:r>
+              <a:rPr sz="2200" b="1">
+                <a:solidFill>
+                  <a:srgbClr val="333333"/>
+                </a:solidFill>
+                <a:latin typeface="Open Sans"/>
+                <a:ea typeface="Open Sans"/>
+                <a:cs typeface="Open Sans"/>
+              </a:rPr>
+              <a:t>ПАМЯТКА</a:t>
+            </a:r>
+          </a:p>
+        </p:txBody>
+      </p:sp>
+      <p:sp>
+        <p:nvSpPr>
+          <p:cNvPr id="4" name="Rectangle 3"/>
+          <p:cNvSpPr/>
+          <p:nvPr/>
+        </p:nvSpPr>
+        <p:spPr>
+          <a:xfrm>
+            <a:off x="700000" y="850000"/>
+            <a:ext cx="9000000" cy="28000"/>
+          </a:xfrm>
+          <a:prstGeom prst="rect">
+            <a:avLst/>
+          </a:prstGeom>
+          <a:solidFill>
+            <a:srgbClr val="555555"/>
+          </a:solidFill>
+          <a:ln>
+            <a:noFill/>
+          </a:ln>
+        </p:spPr>
+        <p:style>
+          <a:lnRef idx="1">
+            <a:schemeClr val="accent1"/>
+          </a:lnRef>
+          <a:fillRef idx="3">
+            <a:schemeClr val="accent1"/>
+          </a:fillRef>
+          <a:effectRef idx="2">
+            <a:schemeClr val="accent1"/>
+          </a:effectRef>
+          <a:fontRef idx="minor">
+            <a:schemeClr val="lt1"/>
+          </a:fontRef>
+        </p:style>
+        <p:txBody>
+          <a:bodyPr rtlCol="0" anchor="ctr"/>
+          <a:lstStyle/>
+          <a:p>
+            <a:pPr algn="ctr"/>
+          </a:p>
+        </p:txBody>
+      </p:sp>
+      <p:sp>
+        <p:nvSpPr>
+          <p:cNvPr id="5" name="TextBox 4"/>
+          <p:cNvSpPr txBox="1"/>
+          <p:nvPr/>
+        </p:nvSpPr>
+        <p:spPr>
+          <a:xfrm>
+            <a:off x="700000" y="920000"/>
+            <a:ext cx="11000000" cy="350000"/>
+          </a:xfrm>
+          <a:prstGeom prst="rect">
+            <a:avLst/>
+          </a:prstGeom>
+          <a:noFill/>
+        </p:spPr>
+        <p:txBody>
+          <a:bodyPr wrap="square" anchor="t">
+            <a:spAutoFit/>
+          </a:bodyPr>
+          <a:lstStyle/>
+          <a:p>
+            <a:pPr algn="l"/>
+            <a:r>
+              <a:rPr sz="1200" b="0">
+                <a:solidFill>
+                  <a:srgbClr val="666666"/>
+                </a:solidFill>
+                <a:latin typeface="Open Sans"/>
+                <a:ea typeface="Open Sans"/>
+                <a:cs typeface="Open Sans"/>
+              </a:rPr>
+              <a:t>Оказание первой помощи при травмах, ранениях и поражениях, прочих состояниях</a:t>
+            </a:r>
+          </a:p>
+        </p:txBody>
+      </p:sp>
+      <p:sp>
+        <p:nvSpPr>
+          <p:cNvPr id="6" name="Rectangle 5"/>
+          <p:cNvSpPr/>
+          <p:nvPr/>
+        </p:nvSpPr>
+        <p:spPr>
+          <a:xfrm>
+            <a:off x="0" y="2800000"/>
+            <a:ext cx="420000" cy="420000"/>
+          </a:xfrm>
+          <a:prstGeom prst="rect">
+            <a:avLst/>
+          </a:prstGeom>
+          <a:solidFill>
+            <a:srgbClr val="555555"/>
+          </a:solidFill>
+          <a:ln>
+            <a:noFill/>
+          </a:ln>
+        </p:spPr>
+        <p:style>
+          <a:lnRef idx="1">
+            <a:schemeClr val="accent1"/>
+          </a:lnRef>
+          <a:fillRef idx="3">
+            <a:schemeClr val="accent1"/>
+          </a:fillRef>
+          <a:effectRef idx="2">
+            <a:schemeClr val="accent1"/>
+          </a:effectRef>
+          <a:fontRef idx="minor">
+            <a:schemeClr val="lt1"/>
+          </a:fontRef>
+        </p:style>
+        <p:txBody>
+          <a:bodyPr rtlCol="0" anchor="ctr"/>
+          <a:lstStyle/>
+          <a:p>
+            <a:pPr algn="ctr"/>
+          </a:p>
+        </p:txBody>
+      </p:sp>
+      <p:sp>
+        <p:nvSpPr>
+          <p:cNvPr id="7" name="TextBox 6"/>
+          <p:cNvSpPr txBox="1"/>
+          <p:nvPr/>
+        </p:nvSpPr>
+        <p:spPr>
+          <a:xfrm>
+            <a:off x="0" y="2800000"/>
+            <a:ext cx="420000" cy="420000"/>
+          </a:xfrm>
+          <a:prstGeom prst="rect">
+            <a:avLst/>
+          </a:prstGeom>
+          <a:noFill/>
+        </p:spPr>
+        <p:txBody>
+          <a:bodyPr wrap="square" anchor="ctr">
+            <a:spAutoFit/>
+          </a:bodyPr>
+          <a:lstStyle/>
+          <a:p>
+            <a:pPr algn="ctr"/>
+            <a:r>
+              <a:rPr sz="1400" b="1">
+                <a:solidFill>
+                  <a:srgbClr val="FFFFFF"/>
+                </a:solidFill>
+                <a:latin typeface="Open Sans"/>
+                <a:ea typeface="Open Sans"/>
+                <a:cs typeface="Open Sans"/>
+              </a:rPr>
+              <a:t>16</a:t>
+            </a:r>
+          </a:p>
+        </p:txBody>
+      </p:sp>
+      <p:pic>
+        <p:nvPicPr>
+          <p:cNvPr id="8" name="Picture 7" descr="pamyatka-tema4-podrobnyy-osmotr-16x9.png"/>
+          <p:cNvPicPr>
+            <a:picLocks noChangeAspect="1"/>
+          </p:cNvPicPr>
+          <p:nvPr/>
+        </p:nvPicPr>
+        <p:blipFill>
+          <a:blip r:embed="rId2"/>
+          <a:stretch>
+            <a:fillRect/>
+          </a:stretch>
+        </p:blipFill>
+        <p:spPr>
+          <a:xfrm>
+            <a:off x="2300000" y="1400000"/>
+            <a:ext cx="7800000" cy="5200000"/>
+          </a:xfrm>
+          <a:prstGeom prst="rect">
+            <a:avLst/>
+          </a:prstGeom>
+        </p:spPr>
+      </p:pic>
+    </p:spTree>
+  </p:cSld>
+  <p:clrMapOvr>
+    <a:masterClrMapping/>
+  </p:clrMapOvr>
+</p:sld>
+</file>
+
+<file path=ppt/slides/slide17.xml><?xml version="1.0" encoding="utf-8"?>
+<p:sld xmlns:a="http://schemas.openxmlformats.org/drawingml/2006/main" xmlns:p="http://schemas.openxmlformats.org/presentationml/2006/main" xmlns:r="http://schemas.openxmlformats.org/officeDocument/2006/relationships">
+  <p:cSld>
+    <p:spTree>
+      <p:nvGrpSpPr>
+        <p:cNvPr id="1" name=""/>
+        <p:cNvGrpSpPr/>
+        <p:nvPr/>
+      </p:nvGrpSpPr>
+      <p:grpSpPr/>
+      <p:sp>
+        <p:nvSpPr>
+          <p:cNvPr id="2" name="Rectangle 1"/>
+          <p:cNvSpPr/>
+          <p:nvPr/>
+        </p:nvSpPr>
+        <p:spPr>
+          <a:xfrm>
+            <a:off x="0" y="0"/>
             <a:ext cx="3400000" cy="6858000"/>
           </a:xfrm>
           <a:prstGeom prst="rect">
@@ -3943,7 +8221,7 @@
                 <a:ea typeface="Open Sans"/>
                 <a:cs typeface="Open Sans"/>
               </a:rPr>
-              <a:t>Цель осмотра</a:t>
+              <a:t>Цель и правила осмотра</a:t>
             </a:r>
           </a:p>
         </p:txBody>
@@ -4105,7 +8383,7 @@
                 <a:ea typeface="Open Sans"/>
                 <a:cs typeface="Open Sans"/>
               </a:rPr>
-              <a:t>Что искать</a:t>
+              <a:t>Опрос пострадавшего</a:t>
             </a:r>
           </a:p>
         </p:txBody>
@@ -4267,7 +8545,7 @@
                 <a:ea typeface="Open Sans"/>
                 <a:cs typeface="Open Sans"/>
               </a:rPr>
-              <a:t>Последовательность</a:t>
+              <a:t>Осмотр по областям тела</a:t>
             </a:r>
           </a:p>
         </p:txBody>
@@ -4429,7 +8707,7 @@
                 <a:ea typeface="Open Sans"/>
                 <a:cs typeface="Open Sans"/>
               </a:rPr>
-              <a:t>Опрос пострадавшего</a:t>
+              <a:t>Опасные находки</a:t>
             </a:r>
           </a:p>
         </p:txBody>
@@ -4591,7 +8869,7 @@
                 <a:ea typeface="Open Sans"/>
                 <a:cs typeface="Open Sans"/>
               </a:rPr>
-              <a:t>Опасные находки</a:t>
+              <a:t>Дальнейшие действия</a:t>
             </a:r>
           </a:p>
         </p:txBody>
@@ -4689,7 +8967,7 @@
                 <a:ea typeface="Open Sans"/>
                 <a:cs typeface="Open Sans"/>
               </a:rPr>
-              <a:t>ЗАЧЕМ НУЖЕН ПОДРОБНЫЙ ОСМОТР</a:t>
+              <a:t>ЦЕЛЬ ПОДРОБНОГО ОСМОТРА</a:t>
             </a:r>
           </a:p>
         </p:txBody>
@@ -4862,8 +9140,8 @@
         </p:nvSpPr>
         <p:spPr>
           <a:xfrm>
-            <a:off x="700000" y="1600000"/>
-            <a:ext cx="11000000" cy="4200000"/>
+            <a:off x="700000" y="1500000"/>
+            <a:ext cx="11000000" cy="4100000"/>
           </a:xfrm>
           <a:prstGeom prst="rect">
             <a:avLst/>
@@ -4878,7 +9156,7 @@
           <a:p>
             <a:pPr algn="l"/>
             <a:r>
-              <a:rPr sz="1600" b="0">
+              <a:rPr sz="1500" b="0">
                 <a:solidFill>
                   <a:srgbClr val="333333"/>
                 </a:solidFill>
@@ -4886,7 +9164,87 @@
                 <a:ea typeface="Open Sans"/>
                 <a:cs typeface="Open Sans"/>
               </a:rPr>
-              <a:t>Его проводят после обзорного осмотра, чтобы найти травмы и состояния, при которых нужна первая помощь. Подробный осмотр дополняют опросом о жалобах.</a:t>
+              <a:t>После обзорного осмотра, вызова скорой медицинской помощи и устранения непосредственных угроз жизни последовательно осматривают все тело. Цель — обнаружить травмы, ожоги, отморожения и другие состояния, которые не были заметны сразу, и своевременно оказать необходимую первую помощь.</a:t>
+            </a:r>
+          </a:p>
+        </p:txBody>
+      </p:sp>
+      <p:sp>
+        <p:nvSpPr>
+          <p:cNvPr id="9" name="Rounded Rectangle 8"/>
+          <p:cNvSpPr/>
+          <p:nvPr/>
+        </p:nvSpPr>
+        <p:spPr>
+          <a:xfrm>
+            <a:off x="700000" y="5600000"/>
+            <a:ext cx="11000000" cy="1000000"/>
+          </a:xfrm>
+          <a:prstGeom prst="roundRect">
+            <a:avLst/>
+          </a:prstGeom>
+          <a:solidFill>
+            <a:srgbClr val="F5F0E1"/>
+          </a:solidFill>
+          <a:ln>
+            <a:noFill/>
+          </a:ln>
+        </p:spPr>
+        <p:style>
+          <a:lnRef idx="1">
+            <a:schemeClr val="accent1"/>
+          </a:lnRef>
+          <a:fillRef idx="3">
+            <a:schemeClr val="accent1"/>
+          </a:fillRef>
+          <a:effectRef idx="2">
+            <a:schemeClr val="accent1"/>
+          </a:effectRef>
+          <a:fontRef idx="minor">
+            <a:schemeClr val="lt1"/>
+          </a:fontRef>
+        </p:style>
+        <p:txBody>
+          <a:bodyPr rtlCol="0" anchor="ctr"/>
+          <a:lstStyle/>
+          <a:p>
+            <a:pPr algn="ctr"/>
+          </a:p>
+        </p:txBody>
+      </p:sp>
+      <p:sp>
+        <p:nvSpPr>
+          <p:cNvPr id="10" name="TextBox 9"/>
+          <p:cNvSpPr txBox="1"/>
+          <p:nvPr/>
+        </p:nvSpPr>
+        <p:spPr>
+          <a:xfrm>
+            <a:off x="950000" y="5800000"/>
+            <a:ext cx="10500000" cy="600000"/>
+          </a:xfrm>
+          <a:prstGeom prst="rect">
+            <a:avLst/>
+          </a:prstGeom>
+          <a:noFill/>
+        </p:spPr>
+        <p:txBody>
+          <a:bodyPr wrap="square" anchor="ctr">
+            <a:spAutoFit/>
+          </a:bodyPr>
+          <a:lstStyle/>
+          <a:p>
+            <a:pPr algn="l"/>
+            <a:r>
+              <a:rPr sz="1200" b="0">
+                <a:solidFill>
+                  <a:srgbClr val="333333"/>
+                </a:solidFill>
+                <a:latin typeface="Open Sans"/>
+                <a:ea typeface="Open Sans"/>
+                <a:cs typeface="Open Sans"/>
+              </a:rPr>
+              <a:t>Если во время осмотра состояние ухудшилось, вернитесь к оценке сознания и дыхания.</a:t>
             </a:r>
           </a:p>
         </p:txBody>
@@ -4984,7 +9342,7 @@
                 <a:ea typeface="Open Sans"/>
                 <a:cs typeface="Open Sans"/>
               </a:rPr>
-              <a:t>ОСМАТРИВАЙТЕ И СПРАШИВАЙТЕ</a:t>
+              <a:t>ОБЗОРНЫЙ И ПОДРОБНЫЙ ОСМОТР</a:t>
             </a:r>
           </a:p>
         </p:txBody>
@@ -5157,7 +9515,7 @@
         </p:nvSpPr>
         <p:spPr>
           <a:xfrm>
-            <a:off x="700000" y="1450000"/>
+            <a:off x="700000" y="1400000"/>
             <a:ext cx="5400000" cy="400000"/>
           </a:xfrm>
           <a:prstGeom prst="rect">
@@ -5181,7 +9539,7 @@
                 <a:ea typeface="Open Sans"/>
                 <a:cs typeface="Open Sans"/>
               </a:rPr>
-              <a:t>Обращайте внимание</a:t>
+              <a:t>Обзорный осмотр</a:t>
             </a:r>
           </a:p>
         </p:txBody>
@@ -5194,7 +9552,7 @@
         </p:nvSpPr>
         <p:spPr>
           <a:xfrm>
-            <a:off x="6600000" y="1450000"/>
+            <a:off x="6600000" y="1400000"/>
             <a:ext cx="5400000" cy="400000"/>
           </a:xfrm>
           <a:prstGeom prst="rect">
@@ -5218,7 +9576,7 @@
                 <a:ea typeface="Open Sans"/>
                 <a:cs typeface="Open Sans"/>
               </a:rPr>
-              <a:t>Уточняйте у пострадавшего</a:t>
+              <a:t>Подробный осмотр</a:t>
             </a:r>
           </a:p>
         </p:txBody>
@@ -5231,7 +9589,7 @@
         </p:nvSpPr>
         <p:spPr>
           <a:xfrm>
-            <a:off x="700000" y="1950000"/>
+            <a:off x="700000" y="1850000"/>
             <a:ext cx="5400000" cy="4000000"/>
           </a:xfrm>
           <a:prstGeom prst="rect">
@@ -5259,7 +9617,7 @@
                 <a:ea typeface="Open Sans"/>
                 <a:cs typeface="Open Sans"/>
               </a:rPr>
-              <a:t>•  цвет и состояние кожи</a:t>
+              <a:t>•  выполняют быстро, сразу после оценки безопасности</a:t>
             </a:r>
           </a:p>
           <a:p>
@@ -5277,7 +9635,7 @@
                 <a:ea typeface="Open Sans"/>
                 <a:cs typeface="Open Sans"/>
               </a:rPr>
-              <a:t>•  пузыри, синяки и ссадины</a:t>
+              <a:t>•  проверяют сознание и нормальное дыхание</a:t>
             </a:r>
           </a:p>
           <a:p>
@@ -5295,7 +9653,7 @@
                 <a:ea typeface="Open Sans"/>
                 <a:cs typeface="Open Sans"/>
               </a:rPr>
-              <a:t>•  раны и кровотечение</a:t>
+              <a:t>•  ищут массивное наружное кровотечение</a:t>
             </a:r>
           </a:p>
           <a:p>
@@ -5313,9 +9671,32 @@
                 <a:ea typeface="Open Sans"/>
                 <a:cs typeface="Open Sans"/>
               </a:rPr>
-              <a:t>•  инородные тела и костные отломки</a:t>
-            </a:r>
-          </a:p>
+              <a:t>•  выявляют состояния, непосредственно угрожающие жизни</a:t>
+            </a:r>
+          </a:p>
+        </p:txBody>
+      </p:sp>
+      <p:sp>
+        <p:nvSpPr>
+          <p:cNvPr id="11" name="TextBox 10"/>
+          <p:cNvSpPr txBox="1"/>
+          <p:nvPr/>
+        </p:nvSpPr>
+        <p:spPr>
+          <a:xfrm>
+            <a:off x="6600000" y="1850000"/>
+            <a:ext cx="5400000" cy="4000000"/>
+          </a:xfrm>
+          <a:prstGeom prst="rect">
+            <a:avLst/>
+          </a:prstGeom>
+          <a:noFill/>
+        </p:spPr>
+        <p:txBody>
+          <a:bodyPr wrap="square">
+            <a:spAutoFit/>
+          </a:bodyPr>
+          <a:lstStyle/>
           <a:p>
             <a:pPr algn="l">
               <a:spcAft>
@@ -5331,32 +9712,9 @@
                 <a:ea typeface="Open Sans"/>
                 <a:cs typeface="Open Sans"/>
               </a:rPr>
-              <a:t>•  необычную форму частей тела</a:t>
-            </a:r>
-          </a:p>
-        </p:txBody>
-      </p:sp>
-      <p:sp>
-        <p:nvSpPr>
-          <p:cNvPr id="11" name="TextBox 10"/>
-          <p:cNvSpPr txBox="1"/>
-          <p:nvPr/>
-        </p:nvSpPr>
-        <p:spPr>
-          <a:xfrm>
-            <a:off x="6600000" y="1950000"/>
-            <a:ext cx="5400000" cy="4000000"/>
-          </a:xfrm>
-          <a:prstGeom prst="rect">
-            <a:avLst/>
-          </a:prstGeom>
-          <a:noFill/>
-        </p:spPr>
-        <p:txBody>
-          <a:bodyPr wrap="square">
-            <a:spAutoFit/>
-          </a:bodyPr>
-          <a:lstStyle/>
+              <a:t>•  проводят после неотложных действий и вызова скорой помощи</a:t>
+            </a:r>
+          </a:p>
           <a:p>
             <a:pPr algn="l">
               <a:spcAft>
@@ -5372,7 +9730,7 @@
                 <a:ea typeface="Open Sans"/>
                 <a:cs typeface="Open Sans"/>
               </a:rPr>
-              <a:t>•  где болит</a:t>
+              <a:t>•  осматривают и осторожно ощупывают все области тела</a:t>
             </a:r>
           </a:p>
           <a:p>
@@ -5390,7 +9748,7 @@
                 <a:ea typeface="Open Sans"/>
                 <a:cs typeface="Open Sans"/>
               </a:rPr>
-              <a:t>•  когда появилась боль</a:t>
+              <a:t>•  сравнивают правую и левую стороны</a:t>
             </a:r>
           </a:p>
           <a:p>
@@ -5408,43 +9766,7 @@
                 <a:ea typeface="Open Sans"/>
                 <a:cs typeface="Open Sans"/>
               </a:rPr>
-              <a:t>•  что произошло</a:t>
-            </a:r>
-          </a:p>
-          <a:p>
-            <a:pPr algn="l">
-              <a:spcAft>
-                <a:spcPts val="800"/>
-              </a:spcAft>
-            </a:pPr>
-            <a:r>
-              <a:rPr sz="1300" b="0">
-                <a:solidFill>
-                  <a:srgbClr val="333333"/>
-                </a:solidFill>
-                <a:latin typeface="Open Sans"/>
-                <a:ea typeface="Open Sans"/>
-                <a:cs typeface="Open Sans"/>
-              </a:rPr>
-              <a:t>•  усиливается ли боль при движении</a:t>
-            </a:r>
-          </a:p>
-          <a:p>
-            <a:pPr algn="l">
-              <a:spcAft>
-                <a:spcPts val="800"/>
-              </a:spcAft>
-            </a:pPr>
-            <a:r>
-              <a:rPr sz="1300" b="0">
-                <a:solidFill>
-                  <a:srgbClr val="333333"/>
-                </a:solidFill>
-                <a:latin typeface="Open Sans"/>
-                <a:ea typeface="Open Sans"/>
-                <a:cs typeface="Open Sans"/>
-              </a:rPr>
-              <a:t>•  есть ли другие жалобы</a:t>
+              <a:t>•  дополняют осмотр вопросами о боли и других жалобах</a:t>
             </a:r>
           </a:p>
         </p:txBody>
@@ -5542,7 +9864,7 @@
                 <a:ea typeface="Open Sans"/>
                 <a:cs typeface="Open Sans"/>
               </a:rPr>
-              <a:t>ПОСЛЕДОВАТЕЛЬНОСТЬ ОСМОТРА</a:t>
+              <a:t>ЧТО ИСКАТЬ И О ЧЕМ СПРАШИВАТЬ</a:t>
             </a:r>
           </a:p>
         </p:txBody>
@@ -5709,44 +10031,38 @@
       </p:sp>
       <p:sp>
         <p:nvSpPr>
-          <p:cNvPr id="8" name="Oval 7"/>
-          <p:cNvSpPr/>
-          <p:nvPr/>
-        </p:nvSpPr>
-        <p:spPr>
-          <a:xfrm>
-            <a:off x="700000" y="1450000"/>
-            <a:ext cx="550000" cy="550000"/>
-          </a:xfrm>
-          <a:prstGeom prst="ellipse">
-            <a:avLst/>
-          </a:prstGeom>
-          <a:solidFill>
-            <a:srgbClr val="CC0000"/>
-          </a:solidFill>
-          <a:ln>
-            <a:noFill/>
-          </a:ln>
-        </p:spPr>
-        <p:style>
-          <a:lnRef idx="1">
-            <a:schemeClr val="accent1"/>
-          </a:lnRef>
-          <a:fillRef idx="3">
-            <a:schemeClr val="accent1"/>
-          </a:fillRef>
-          <a:effectRef idx="2">
-            <a:schemeClr val="accent1"/>
-          </a:effectRef>
-          <a:fontRef idx="minor">
-            <a:schemeClr val="lt1"/>
-          </a:fontRef>
-        </p:style>
-        <p:txBody>
-          <a:bodyPr rtlCol="0" anchor="ctr"/>
-          <a:lstStyle/>
-          <a:p>
-            <a:pPr algn="ctr"/>
+          <p:cNvPr id="8" name="TextBox 7"/>
+          <p:cNvSpPr txBox="1"/>
+          <p:nvPr/>
+        </p:nvSpPr>
+        <p:spPr>
+          <a:xfrm>
+            <a:off x="700000" y="1400000"/>
+            <a:ext cx="5400000" cy="400000"/>
+          </a:xfrm>
+          <a:prstGeom prst="rect">
+            <a:avLst/>
+          </a:prstGeom>
+          <a:noFill/>
+        </p:spPr>
+        <p:txBody>
+          <a:bodyPr wrap="square" anchor="t">
+            <a:spAutoFit/>
+          </a:bodyPr>
+          <a:lstStyle/>
+          <a:p>
+            <a:pPr algn="l"/>
+            <a:r>
+              <a:rPr sz="1400" b="1">
+                <a:solidFill>
+                  <a:srgbClr val="333333"/>
+                </a:solidFill>
+                <a:latin typeface="Open Sans"/>
+                <a:ea typeface="Open Sans"/>
+                <a:cs typeface="Open Sans"/>
+              </a:rPr>
+              <a:t>При осмотре</a:t>
+            </a:r>
           </a:p>
         </p:txBody>
       </p:sp>
@@ -5758,8 +10074,8 @@
         </p:nvSpPr>
         <p:spPr>
           <a:xfrm>
-            <a:off x="700000" y="1450000"/>
-            <a:ext cx="550000" cy="550000"/>
+            <a:off x="6600000" y="1400000"/>
+            <a:ext cx="5400000" cy="400000"/>
           </a:xfrm>
           <a:prstGeom prst="rect">
             <a:avLst/>
@@ -5767,68 +10083,136 @@
           <a:noFill/>
         </p:spPr>
         <p:txBody>
-          <a:bodyPr wrap="square" anchor="ctr">
+          <a:bodyPr wrap="square" anchor="t">
             <a:spAutoFit/>
           </a:bodyPr>
           <a:lstStyle/>
           <a:p>
-            <a:pPr algn="ctr"/>
+            <a:pPr algn="l"/>
             <a:r>
               <a:rPr sz="1400" b="1">
                 <a:solidFill>
-                  <a:srgbClr val="FFFFFF"/>
-                </a:solidFill>
-                <a:latin typeface="Open Sans"/>
-                <a:ea typeface="Open Sans"/>
-                <a:cs typeface="Open Sans"/>
-              </a:rPr>
-              <a:t>1</a:t>
-            </a:r>
-          </a:p>
-        </p:txBody>
-      </p:sp>
-      <p:sp>
-        <p:nvSpPr>
-          <p:cNvPr id="10" name="Rectangle 9"/>
-          <p:cNvSpPr/>
-          <p:nvPr/>
-        </p:nvSpPr>
-        <p:spPr>
-          <a:xfrm>
-            <a:off x="1450000" y="1450000"/>
-            <a:ext cx="10500000" cy="550000"/>
-          </a:xfrm>
-          <a:prstGeom prst="rect">
-            <a:avLst/>
-          </a:prstGeom>
-          <a:solidFill>
-            <a:srgbClr val="FFFFFF"/>
-          </a:solidFill>
-          <a:ln w="12700">
-            <a:solidFill>
-              <a:srgbClr val="999999"/>
-            </a:solidFill>
-          </a:ln>
-        </p:spPr>
-        <p:style>
-          <a:lnRef idx="1">
-            <a:schemeClr val="accent1"/>
-          </a:lnRef>
-          <a:fillRef idx="3">
-            <a:schemeClr val="accent1"/>
-          </a:fillRef>
-          <a:effectRef idx="2">
-            <a:schemeClr val="accent1"/>
-          </a:effectRef>
-          <a:fontRef idx="minor">
-            <a:schemeClr val="lt1"/>
-          </a:fontRef>
-        </p:style>
-        <p:txBody>
-          <a:bodyPr rtlCol="0" anchor="ctr"/>
-          <a:lstStyle/>
-          <a:p>
-            <a:pPr algn="ctr"/>
+                  <a:srgbClr val="333333"/>
+                </a:solidFill>
+                <a:latin typeface="Open Sans"/>
+                <a:ea typeface="Open Sans"/>
+                <a:cs typeface="Open Sans"/>
+              </a:rPr>
+              <a:t>При опросе</a:t>
+            </a:r>
+          </a:p>
+        </p:txBody>
+      </p:sp>
+      <p:sp>
+        <p:nvSpPr>
+          <p:cNvPr id="10" name="TextBox 9"/>
+          <p:cNvSpPr txBox="1"/>
+          <p:nvPr/>
+        </p:nvSpPr>
+        <p:spPr>
+          <a:xfrm>
+            <a:off x="700000" y="1850000"/>
+            <a:ext cx="5400000" cy="4000000"/>
+          </a:xfrm>
+          <a:prstGeom prst="rect">
+            <a:avLst/>
+          </a:prstGeom>
+          <a:noFill/>
+        </p:spPr>
+        <p:txBody>
+          <a:bodyPr wrap="square">
+            <a:spAutoFit/>
+          </a:bodyPr>
+          <a:lstStyle/>
+          <a:p>
+            <a:pPr algn="l">
+              <a:spcAft>
+                <a:spcPts val="800"/>
+              </a:spcAft>
+            </a:pPr>
+            <a:r>
+              <a:rPr sz="1300" b="0">
+                <a:solidFill>
+                  <a:srgbClr val="333333"/>
+                </a:solidFill>
+                <a:latin typeface="Open Sans"/>
+                <a:ea typeface="Open Sans"/>
+                <a:cs typeface="Open Sans"/>
+              </a:rPr>
+              <a:t>•  изменение цвета, температуры и влажности кожи</a:t>
+            </a:r>
+          </a:p>
+          <a:p>
+            <a:pPr algn="l">
+              <a:spcAft>
+                <a:spcPts val="800"/>
+              </a:spcAft>
+            </a:pPr>
+            <a:r>
+              <a:rPr sz="1300" b="0">
+                <a:solidFill>
+                  <a:srgbClr val="333333"/>
+                </a:solidFill>
+                <a:latin typeface="Open Sans"/>
+                <a:ea typeface="Open Sans"/>
+                <a:cs typeface="Open Sans"/>
+              </a:rPr>
+              <a:t>•  раны, кровотечение, ссадины, кровоподтеки и пузыри</a:t>
+            </a:r>
+          </a:p>
+          <a:p>
+            <a:pPr algn="l">
+              <a:spcAft>
+                <a:spcPts val="800"/>
+              </a:spcAft>
+            </a:pPr>
+            <a:r>
+              <a:rPr sz="1300" b="0">
+                <a:solidFill>
+                  <a:srgbClr val="333333"/>
+                </a:solidFill>
+                <a:latin typeface="Open Sans"/>
+                <a:ea typeface="Open Sans"/>
+                <a:cs typeface="Open Sans"/>
+              </a:rPr>
+              <a:t>•  инородные тела, костные отломки и необычную подвижность</a:t>
+            </a:r>
+          </a:p>
+          <a:p>
+            <a:pPr algn="l">
+              <a:spcAft>
+                <a:spcPts val="800"/>
+              </a:spcAft>
+            </a:pPr>
+            <a:r>
+              <a:rPr sz="1300" b="0">
+                <a:solidFill>
+                  <a:srgbClr val="333333"/>
+                </a:solidFill>
+                <a:latin typeface="Open Sans"/>
+                <a:ea typeface="Open Sans"/>
+                <a:cs typeface="Open Sans"/>
+              </a:rPr>
+              <a:t>•  деформацию, укорочение, отек и болезненность</a:t>
+            </a:r>
+          </a:p>
+          <a:p>
+            <a:pPr algn="l">
+              <a:spcAft>
+                <a:spcPts val="800"/>
+              </a:spcAft>
+            </a:pPr>
+            <a:r>
+              <a:rPr sz="1300" b="0">
+                <a:solidFill>
+                  <a:srgbClr val="333333"/>
+                </a:solidFill>
+                <a:latin typeface="Open Sans"/>
+                <a:ea typeface="Open Sans"/>
+                <a:cs typeface="Open Sans"/>
+              </a:rPr>
+              <a:t>•  нарушение движения или чувствительности</a:t>
+            </a:r>
           </a:p>
         </p:txBody>
       </p:sp>
@@ -5840,8 +10224,8 @@
         </p:nvSpPr>
         <p:spPr>
           <a:xfrm>
-            <a:off x="1650000" y="1450000"/>
-            <a:ext cx="10100000" cy="550000"/>
+            <a:off x="6600000" y="1850000"/>
+            <a:ext cx="5400000" cy="4000000"/>
           </a:xfrm>
           <a:prstGeom prst="rect">
             <a:avLst/>
@@ -5849,12 +10233,16 @@
           <a:noFill/>
         </p:spPr>
         <p:txBody>
-          <a:bodyPr wrap="square" anchor="ctr">
+          <a:bodyPr wrap="square">
             <a:spAutoFit/>
           </a:bodyPr>
           <a:lstStyle/>
           <a:p>
-            <a:pPr algn="l"/>
+            <a:pPr algn="l">
+              <a:spcAft>
+                <a:spcPts val="800"/>
+              </a:spcAft>
+            </a:pPr>
             <a:r>
               <a:rPr sz="1300" b="0">
                 <a:solidFill>
@@ -5864,159 +10252,15 @@
                 <a:ea typeface="Open Sans"/>
                 <a:cs typeface="Open Sans"/>
               </a:rPr>
-              <a:t>Голова: осмотрите лицо, волосистую часть и уши.</a:t>
-            </a:r>
-          </a:p>
-        </p:txBody>
-      </p:sp>
-      <p:sp>
-        <p:nvSpPr>
-          <p:cNvPr id="12" name="Oval 11"/>
-          <p:cNvSpPr/>
-          <p:nvPr/>
-        </p:nvSpPr>
-        <p:spPr>
-          <a:xfrm>
-            <a:off x="700000" y="2320000"/>
-            <a:ext cx="550000" cy="550000"/>
-          </a:xfrm>
-          <a:prstGeom prst="ellipse">
-            <a:avLst/>
-          </a:prstGeom>
-          <a:solidFill>
-            <a:srgbClr val="555555"/>
-          </a:solidFill>
-          <a:ln>
-            <a:noFill/>
-          </a:ln>
-        </p:spPr>
-        <p:style>
-          <a:lnRef idx="1">
-            <a:schemeClr val="accent1"/>
-          </a:lnRef>
-          <a:fillRef idx="3">
-            <a:schemeClr val="accent1"/>
-          </a:fillRef>
-          <a:effectRef idx="2">
-            <a:schemeClr val="accent1"/>
-          </a:effectRef>
-          <a:fontRef idx="minor">
-            <a:schemeClr val="lt1"/>
-          </a:fontRef>
-        </p:style>
-        <p:txBody>
-          <a:bodyPr rtlCol="0" anchor="ctr"/>
-          <a:lstStyle/>
-          <a:p>
-            <a:pPr algn="ctr"/>
-          </a:p>
-        </p:txBody>
-      </p:sp>
-      <p:sp>
-        <p:nvSpPr>
-          <p:cNvPr id="13" name="TextBox 12"/>
-          <p:cNvSpPr txBox="1"/>
-          <p:nvPr/>
-        </p:nvSpPr>
-        <p:spPr>
-          <a:xfrm>
-            <a:off x="700000" y="2320000"/>
-            <a:ext cx="550000" cy="550000"/>
-          </a:xfrm>
-          <a:prstGeom prst="rect">
-            <a:avLst/>
-          </a:prstGeom>
-          <a:noFill/>
-        </p:spPr>
-        <p:txBody>
-          <a:bodyPr wrap="square" anchor="ctr">
-            <a:spAutoFit/>
-          </a:bodyPr>
-          <a:lstStyle/>
-          <a:p>
-            <a:pPr algn="ctr"/>
-            <a:r>
-              <a:rPr sz="1400" b="1">
-                <a:solidFill>
-                  <a:srgbClr val="FFFFFF"/>
-                </a:solidFill>
-                <a:latin typeface="Open Sans"/>
-                <a:ea typeface="Open Sans"/>
-                <a:cs typeface="Open Sans"/>
-              </a:rPr>
-              <a:t>2</a:t>
-            </a:r>
-          </a:p>
-        </p:txBody>
-      </p:sp>
-      <p:sp>
-        <p:nvSpPr>
-          <p:cNvPr id="14" name="Rectangle 13"/>
-          <p:cNvSpPr/>
-          <p:nvPr/>
-        </p:nvSpPr>
-        <p:spPr>
-          <a:xfrm>
-            <a:off x="1450000" y="2320000"/>
-            <a:ext cx="10500000" cy="550000"/>
-          </a:xfrm>
-          <a:prstGeom prst="rect">
-            <a:avLst/>
-          </a:prstGeom>
-          <a:solidFill>
-            <a:srgbClr val="FFFFFF"/>
-          </a:solidFill>
-          <a:ln w="12700">
-            <a:solidFill>
-              <a:srgbClr val="999999"/>
-            </a:solidFill>
-          </a:ln>
-        </p:spPr>
-        <p:style>
-          <a:lnRef idx="1">
-            <a:schemeClr val="accent1"/>
-          </a:lnRef>
-          <a:fillRef idx="3">
-            <a:schemeClr val="accent1"/>
-          </a:fillRef>
-          <a:effectRef idx="2">
-            <a:schemeClr val="accent1"/>
-          </a:effectRef>
-          <a:fontRef idx="minor">
-            <a:schemeClr val="lt1"/>
-          </a:fontRef>
-        </p:style>
-        <p:txBody>
-          <a:bodyPr rtlCol="0" anchor="ctr"/>
-          <a:lstStyle/>
-          <a:p>
-            <a:pPr algn="ctr"/>
-          </a:p>
-        </p:txBody>
-      </p:sp>
-      <p:sp>
-        <p:nvSpPr>
-          <p:cNvPr id="15" name="TextBox 14"/>
-          <p:cNvSpPr txBox="1"/>
-          <p:nvPr/>
-        </p:nvSpPr>
-        <p:spPr>
-          <a:xfrm>
-            <a:off x="1650000" y="2320000"/>
-            <a:ext cx="10100000" cy="550000"/>
-          </a:xfrm>
-          <a:prstGeom prst="rect">
-            <a:avLst/>
-          </a:prstGeom>
-          <a:noFill/>
-        </p:spPr>
-        <p:txBody>
-          <a:bodyPr wrap="square" anchor="ctr">
-            <a:spAutoFit/>
-          </a:bodyPr>
-          <a:lstStyle/>
-          <a:p>
-            <a:pPr algn="l"/>
+              <a:t>•  что произошло и какой частью тела пришелся удар</a:t>
+            </a:r>
+          </a:p>
+          <a:p>
+            <a:pPr algn="l">
+              <a:spcAft>
+                <a:spcPts val="800"/>
+              </a:spcAft>
+            </a:pPr>
             <a:r>
               <a:rPr sz="1300" b="0">
                 <a:solidFill>
@@ -6026,159 +10270,15 @@
                 <a:ea typeface="Open Sans"/>
                 <a:cs typeface="Open Sans"/>
               </a:rPr>
-              <a:t>Шея: осматривайте и ощупывайте очень осторожно.</a:t>
-            </a:r>
-          </a:p>
-        </p:txBody>
-      </p:sp>
-      <p:sp>
-        <p:nvSpPr>
-          <p:cNvPr id="16" name="Oval 15"/>
-          <p:cNvSpPr/>
-          <p:nvPr/>
-        </p:nvSpPr>
-        <p:spPr>
-          <a:xfrm>
-            <a:off x="700000" y="3190000"/>
-            <a:ext cx="550000" cy="550000"/>
-          </a:xfrm>
-          <a:prstGeom prst="ellipse">
-            <a:avLst/>
-          </a:prstGeom>
-          <a:solidFill>
-            <a:srgbClr val="555555"/>
-          </a:solidFill>
-          <a:ln>
-            <a:noFill/>
-          </a:ln>
-        </p:spPr>
-        <p:style>
-          <a:lnRef idx="1">
-            <a:schemeClr val="accent1"/>
-          </a:lnRef>
-          <a:fillRef idx="3">
-            <a:schemeClr val="accent1"/>
-          </a:fillRef>
-          <a:effectRef idx="2">
-            <a:schemeClr val="accent1"/>
-          </a:effectRef>
-          <a:fontRef idx="minor">
-            <a:schemeClr val="lt1"/>
-          </a:fontRef>
-        </p:style>
-        <p:txBody>
-          <a:bodyPr rtlCol="0" anchor="ctr"/>
-          <a:lstStyle/>
-          <a:p>
-            <a:pPr algn="ctr"/>
-          </a:p>
-        </p:txBody>
-      </p:sp>
-      <p:sp>
-        <p:nvSpPr>
-          <p:cNvPr id="17" name="TextBox 16"/>
-          <p:cNvSpPr txBox="1"/>
-          <p:nvPr/>
-        </p:nvSpPr>
-        <p:spPr>
-          <a:xfrm>
-            <a:off x="700000" y="3190000"/>
-            <a:ext cx="550000" cy="550000"/>
-          </a:xfrm>
-          <a:prstGeom prst="rect">
-            <a:avLst/>
-          </a:prstGeom>
-          <a:noFill/>
-        </p:spPr>
-        <p:txBody>
-          <a:bodyPr wrap="square" anchor="ctr">
-            <a:spAutoFit/>
-          </a:bodyPr>
-          <a:lstStyle/>
-          <a:p>
-            <a:pPr algn="ctr"/>
-            <a:r>
-              <a:rPr sz="1400" b="1">
-                <a:solidFill>
-                  <a:srgbClr val="FFFFFF"/>
-                </a:solidFill>
-                <a:latin typeface="Open Sans"/>
-                <a:ea typeface="Open Sans"/>
-                <a:cs typeface="Open Sans"/>
-              </a:rPr>
-              <a:t>3</a:t>
-            </a:r>
-          </a:p>
-        </p:txBody>
-      </p:sp>
-      <p:sp>
-        <p:nvSpPr>
-          <p:cNvPr id="18" name="Rectangle 17"/>
-          <p:cNvSpPr/>
-          <p:nvPr/>
-        </p:nvSpPr>
-        <p:spPr>
-          <a:xfrm>
-            <a:off x="1450000" y="3190000"/>
-            <a:ext cx="10500000" cy="550000"/>
-          </a:xfrm>
-          <a:prstGeom prst="rect">
-            <a:avLst/>
-          </a:prstGeom>
-          <a:solidFill>
-            <a:srgbClr val="FFFFFF"/>
-          </a:solidFill>
-          <a:ln w="12700">
-            <a:solidFill>
-              <a:srgbClr val="999999"/>
-            </a:solidFill>
-          </a:ln>
-        </p:spPr>
-        <p:style>
-          <a:lnRef idx="1">
-            <a:schemeClr val="accent1"/>
-          </a:lnRef>
-          <a:fillRef idx="3">
-            <a:schemeClr val="accent1"/>
-          </a:fillRef>
-          <a:effectRef idx="2">
-            <a:schemeClr val="accent1"/>
-          </a:effectRef>
-          <a:fontRef idx="minor">
-            <a:schemeClr val="lt1"/>
-          </a:fontRef>
-        </p:style>
-        <p:txBody>
-          <a:bodyPr rtlCol="0" anchor="ctr"/>
-          <a:lstStyle/>
-          <a:p>
-            <a:pPr algn="ctr"/>
-          </a:p>
-        </p:txBody>
-      </p:sp>
-      <p:sp>
-        <p:nvSpPr>
-          <p:cNvPr id="19" name="TextBox 18"/>
-          <p:cNvSpPr txBox="1"/>
-          <p:nvPr/>
-        </p:nvSpPr>
-        <p:spPr>
-          <a:xfrm>
-            <a:off x="1650000" y="3190000"/>
-            <a:ext cx="10100000" cy="550000"/>
-          </a:xfrm>
-          <a:prstGeom prst="rect">
-            <a:avLst/>
-          </a:prstGeom>
-          <a:noFill/>
-        </p:spPr>
-        <p:txBody>
-          <a:bodyPr wrap="square" anchor="ctr">
-            <a:spAutoFit/>
-          </a:bodyPr>
-          <a:lstStyle/>
-          <a:p>
-            <a:pPr algn="l"/>
+              <a:t>•  где болит, какова боль и когда она появилась</a:t>
+            </a:r>
+          </a:p>
+          <a:p>
+            <a:pPr algn="l">
+              <a:spcAft>
+                <a:spcPts val="800"/>
+              </a:spcAft>
+            </a:pPr>
             <a:r>
               <a:rPr sz="1300" b="0">
                 <a:solidFill>
@@ -6188,159 +10288,15 @@
                 <a:ea typeface="Open Sans"/>
                 <a:cs typeface="Open Sans"/>
               </a:rPr>
-              <a:t>Грудь: проверьте спереди и с боков.</a:t>
-            </a:r>
-          </a:p>
-        </p:txBody>
-      </p:sp>
-      <p:sp>
-        <p:nvSpPr>
-          <p:cNvPr id="20" name="Oval 19"/>
-          <p:cNvSpPr/>
-          <p:nvPr/>
-        </p:nvSpPr>
-        <p:spPr>
-          <a:xfrm>
-            <a:off x="700000" y="4060000"/>
-            <a:ext cx="550000" cy="550000"/>
-          </a:xfrm>
-          <a:prstGeom prst="ellipse">
-            <a:avLst/>
-          </a:prstGeom>
-          <a:solidFill>
-            <a:srgbClr val="555555"/>
-          </a:solidFill>
-          <a:ln>
-            <a:noFill/>
-          </a:ln>
-        </p:spPr>
-        <p:style>
-          <a:lnRef idx="1">
-            <a:schemeClr val="accent1"/>
-          </a:lnRef>
-          <a:fillRef idx="3">
-            <a:schemeClr val="accent1"/>
-          </a:fillRef>
-          <a:effectRef idx="2">
-            <a:schemeClr val="accent1"/>
-          </a:effectRef>
-          <a:fontRef idx="minor">
-            <a:schemeClr val="lt1"/>
-          </a:fontRef>
-        </p:style>
-        <p:txBody>
-          <a:bodyPr rtlCol="0" anchor="ctr"/>
-          <a:lstStyle/>
-          <a:p>
-            <a:pPr algn="ctr"/>
-          </a:p>
-        </p:txBody>
-      </p:sp>
-      <p:sp>
-        <p:nvSpPr>
-          <p:cNvPr id="21" name="TextBox 20"/>
-          <p:cNvSpPr txBox="1"/>
-          <p:nvPr/>
-        </p:nvSpPr>
-        <p:spPr>
-          <a:xfrm>
-            <a:off x="700000" y="4060000"/>
-            <a:ext cx="550000" cy="550000"/>
-          </a:xfrm>
-          <a:prstGeom prst="rect">
-            <a:avLst/>
-          </a:prstGeom>
-          <a:noFill/>
-        </p:spPr>
-        <p:txBody>
-          <a:bodyPr wrap="square" anchor="ctr">
-            <a:spAutoFit/>
-          </a:bodyPr>
-          <a:lstStyle/>
-          <a:p>
-            <a:pPr algn="ctr"/>
-            <a:r>
-              <a:rPr sz="1400" b="1">
-                <a:solidFill>
-                  <a:srgbClr val="FFFFFF"/>
-                </a:solidFill>
-                <a:latin typeface="Open Sans"/>
-                <a:ea typeface="Open Sans"/>
-                <a:cs typeface="Open Sans"/>
-              </a:rPr>
-              <a:t>4</a:t>
-            </a:r>
-          </a:p>
-        </p:txBody>
-      </p:sp>
-      <p:sp>
-        <p:nvSpPr>
-          <p:cNvPr id="22" name="Rectangle 21"/>
-          <p:cNvSpPr/>
-          <p:nvPr/>
-        </p:nvSpPr>
-        <p:spPr>
-          <a:xfrm>
-            <a:off x="1450000" y="4060000"/>
-            <a:ext cx="10500000" cy="550000"/>
-          </a:xfrm>
-          <a:prstGeom prst="rect">
-            <a:avLst/>
-          </a:prstGeom>
-          <a:solidFill>
-            <a:srgbClr val="FFFFFF"/>
-          </a:solidFill>
-          <a:ln w="12700">
-            <a:solidFill>
-              <a:srgbClr val="999999"/>
-            </a:solidFill>
-          </a:ln>
-        </p:spPr>
-        <p:style>
-          <a:lnRef idx="1">
-            <a:schemeClr val="accent1"/>
-          </a:lnRef>
-          <a:fillRef idx="3">
-            <a:schemeClr val="accent1"/>
-          </a:fillRef>
-          <a:effectRef idx="2">
-            <a:schemeClr val="accent1"/>
-          </a:effectRef>
-          <a:fontRef idx="minor">
-            <a:schemeClr val="lt1"/>
-          </a:fontRef>
-        </p:style>
-        <p:txBody>
-          <a:bodyPr rtlCol="0" anchor="ctr"/>
-          <a:lstStyle/>
-          <a:p>
-            <a:pPr algn="ctr"/>
-          </a:p>
-        </p:txBody>
-      </p:sp>
-      <p:sp>
-        <p:nvSpPr>
-          <p:cNvPr id="23" name="TextBox 22"/>
-          <p:cNvSpPr txBox="1"/>
-          <p:nvPr/>
-        </p:nvSpPr>
-        <p:spPr>
-          <a:xfrm>
-            <a:off x="1650000" y="4060000"/>
-            <a:ext cx="10100000" cy="550000"/>
-          </a:xfrm>
-          <a:prstGeom prst="rect">
-            <a:avLst/>
-          </a:prstGeom>
-          <a:noFill/>
-        </p:spPr>
-        <p:txBody>
-          <a:bodyPr wrap="square" anchor="ctr">
-            <a:spAutoFit/>
-          </a:bodyPr>
-          <a:lstStyle/>
-          <a:p>
-            <a:pPr algn="l"/>
+              <a:t>•  усиливается ли боль при дыхании, движении или ощупывании</a:t>
+            </a:r>
+          </a:p>
+          <a:p>
+            <a:pPr algn="l">
+              <a:spcAft>
+                <a:spcPts val="800"/>
+              </a:spcAft>
+            </a:pPr>
             <a:r>
               <a:rPr sz="1300" b="0">
                 <a:solidFill>
@@ -6350,159 +10306,15 @@
                 <a:ea typeface="Open Sans"/>
                 <a:cs typeface="Open Sans"/>
               </a:rPr>
-              <a:t>Спина: прощупайте без лишнего поворачивания.</a:t>
-            </a:r>
-          </a:p>
-        </p:txBody>
-      </p:sp>
-      <p:sp>
-        <p:nvSpPr>
-          <p:cNvPr id="24" name="Oval 23"/>
-          <p:cNvSpPr/>
-          <p:nvPr/>
-        </p:nvSpPr>
-        <p:spPr>
-          <a:xfrm>
-            <a:off x="700000" y="4930000"/>
-            <a:ext cx="550000" cy="550000"/>
-          </a:xfrm>
-          <a:prstGeom prst="ellipse">
-            <a:avLst/>
-          </a:prstGeom>
-          <a:solidFill>
-            <a:srgbClr val="555555"/>
-          </a:solidFill>
-          <a:ln>
-            <a:noFill/>
-          </a:ln>
-        </p:spPr>
-        <p:style>
-          <a:lnRef idx="1">
-            <a:schemeClr val="accent1"/>
-          </a:lnRef>
-          <a:fillRef idx="3">
-            <a:schemeClr val="accent1"/>
-          </a:fillRef>
-          <a:effectRef idx="2">
-            <a:schemeClr val="accent1"/>
-          </a:effectRef>
-          <a:fontRef idx="minor">
-            <a:schemeClr val="lt1"/>
-          </a:fontRef>
-        </p:style>
-        <p:txBody>
-          <a:bodyPr rtlCol="0" anchor="ctr"/>
-          <a:lstStyle/>
-          <a:p>
-            <a:pPr algn="ctr"/>
-          </a:p>
-        </p:txBody>
-      </p:sp>
-      <p:sp>
-        <p:nvSpPr>
-          <p:cNvPr id="25" name="TextBox 24"/>
-          <p:cNvSpPr txBox="1"/>
-          <p:nvPr/>
-        </p:nvSpPr>
-        <p:spPr>
-          <a:xfrm>
-            <a:off x="700000" y="4930000"/>
-            <a:ext cx="550000" cy="550000"/>
-          </a:xfrm>
-          <a:prstGeom prst="rect">
-            <a:avLst/>
-          </a:prstGeom>
-          <a:noFill/>
-        </p:spPr>
-        <p:txBody>
-          <a:bodyPr wrap="square" anchor="ctr">
-            <a:spAutoFit/>
-          </a:bodyPr>
-          <a:lstStyle/>
-          <a:p>
-            <a:pPr algn="ctr"/>
-            <a:r>
-              <a:rPr sz="1400" b="1">
-                <a:solidFill>
-                  <a:srgbClr val="FFFFFF"/>
-                </a:solidFill>
-                <a:latin typeface="Open Sans"/>
-                <a:ea typeface="Open Sans"/>
-                <a:cs typeface="Open Sans"/>
-              </a:rPr>
-              <a:t>5</a:t>
-            </a:r>
-          </a:p>
-        </p:txBody>
-      </p:sp>
-      <p:sp>
-        <p:nvSpPr>
-          <p:cNvPr id="26" name="Rectangle 25"/>
-          <p:cNvSpPr/>
-          <p:nvPr/>
-        </p:nvSpPr>
-        <p:spPr>
-          <a:xfrm>
-            <a:off x="1450000" y="4930000"/>
-            <a:ext cx="10500000" cy="550000"/>
-          </a:xfrm>
-          <a:prstGeom prst="rect">
-            <a:avLst/>
-          </a:prstGeom>
-          <a:solidFill>
-            <a:srgbClr val="FFFFFF"/>
-          </a:solidFill>
-          <a:ln w="12700">
-            <a:solidFill>
-              <a:srgbClr val="999999"/>
-            </a:solidFill>
-          </a:ln>
-        </p:spPr>
-        <p:style>
-          <a:lnRef idx="1">
-            <a:schemeClr val="accent1"/>
-          </a:lnRef>
-          <a:fillRef idx="3">
-            <a:schemeClr val="accent1"/>
-          </a:fillRef>
-          <a:effectRef idx="2">
-            <a:schemeClr val="accent1"/>
-          </a:effectRef>
-          <a:fontRef idx="minor">
-            <a:schemeClr val="lt1"/>
-          </a:fontRef>
-        </p:style>
-        <p:txBody>
-          <a:bodyPr rtlCol="0" anchor="ctr"/>
-          <a:lstStyle/>
-          <a:p>
-            <a:pPr algn="ctr"/>
-          </a:p>
-        </p:txBody>
-      </p:sp>
-      <p:sp>
-        <p:nvSpPr>
-          <p:cNvPr id="27" name="TextBox 26"/>
-          <p:cNvSpPr txBox="1"/>
-          <p:nvPr/>
-        </p:nvSpPr>
-        <p:spPr>
-          <a:xfrm>
-            <a:off x="1650000" y="4930000"/>
-            <a:ext cx="10100000" cy="550000"/>
-          </a:xfrm>
-          <a:prstGeom prst="rect">
-            <a:avLst/>
-          </a:prstGeom>
-          <a:noFill/>
-        </p:spPr>
-        <p:txBody>
-          <a:bodyPr wrap="square" anchor="ctr">
-            <a:spAutoFit/>
-          </a:bodyPr>
-          <a:lstStyle/>
-          <a:p>
-            <a:pPr algn="l"/>
+              <a:t>•  есть ли слабость, тошнота, головокружение или онемение</a:t>
+            </a:r>
+          </a:p>
+          <a:p>
+            <a:pPr algn="l">
+              <a:spcAft>
+                <a:spcPts val="800"/>
+              </a:spcAft>
+            </a:pPr>
             <a:r>
               <a:rPr sz="1300" b="0">
                 <a:solidFill>
@@ -6512,169 +10324,7 @@
                 <a:ea typeface="Open Sans"/>
                 <a:cs typeface="Open Sans"/>
               </a:rPr>
-              <a:t>Живот и таз: ищите боль, ссадины и синяки.</a:t>
-            </a:r>
-          </a:p>
-        </p:txBody>
-      </p:sp>
-      <p:sp>
-        <p:nvSpPr>
-          <p:cNvPr id="28" name="Oval 27"/>
-          <p:cNvSpPr/>
-          <p:nvPr/>
-        </p:nvSpPr>
-        <p:spPr>
-          <a:xfrm>
-            <a:off x="700000" y="5800000"/>
-            <a:ext cx="550000" cy="550000"/>
-          </a:xfrm>
-          <a:prstGeom prst="ellipse">
-            <a:avLst/>
-          </a:prstGeom>
-          <a:solidFill>
-            <a:srgbClr val="555555"/>
-          </a:solidFill>
-          <a:ln>
-            <a:noFill/>
-          </a:ln>
-        </p:spPr>
-        <p:style>
-          <a:lnRef idx="1">
-            <a:schemeClr val="accent1"/>
-          </a:lnRef>
-          <a:fillRef idx="3">
-            <a:schemeClr val="accent1"/>
-          </a:fillRef>
-          <a:effectRef idx="2">
-            <a:schemeClr val="accent1"/>
-          </a:effectRef>
-          <a:fontRef idx="minor">
-            <a:schemeClr val="lt1"/>
-          </a:fontRef>
-        </p:style>
-        <p:txBody>
-          <a:bodyPr rtlCol="0" anchor="ctr"/>
-          <a:lstStyle/>
-          <a:p>
-            <a:pPr algn="ctr"/>
-          </a:p>
-        </p:txBody>
-      </p:sp>
-      <p:sp>
-        <p:nvSpPr>
-          <p:cNvPr id="29" name="TextBox 28"/>
-          <p:cNvSpPr txBox="1"/>
-          <p:nvPr/>
-        </p:nvSpPr>
-        <p:spPr>
-          <a:xfrm>
-            <a:off x="700000" y="5800000"/>
-            <a:ext cx="550000" cy="550000"/>
-          </a:xfrm>
-          <a:prstGeom prst="rect">
-            <a:avLst/>
-          </a:prstGeom>
-          <a:noFill/>
-        </p:spPr>
-        <p:txBody>
-          <a:bodyPr wrap="square" anchor="ctr">
-            <a:spAutoFit/>
-          </a:bodyPr>
-          <a:lstStyle/>
-          <a:p>
-            <a:pPr algn="ctr"/>
-            <a:r>
-              <a:rPr sz="1400" b="1">
-                <a:solidFill>
-                  <a:srgbClr val="FFFFFF"/>
-                </a:solidFill>
-                <a:latin typeface="Open Sans"/>
-                <a:ea typeface="Open Sans"/>
-                <a:cs typeface="Open Sans"/>
-              </a:rPr>
-              <a:t>6</a:t>
-            </a:r>
-          </a:p>
-        </p:txBody>
-      </p:sp>
-      <p:sp>
-        <p:nvSpPr>
-          <p:cNvPr id="30" name="Rectangle 29"/>
-          <p:cNvSpPr/>
-          <p:nvPr/>
-        </p:nvSpPr>
-        <p:spPr>
-          <a:xfrm>
-            <a:off x="1450000" y="5800000"/>
-            <a:ext cx="10500000" cy="550000"/>
-          </a:xfrm>
-          <a:prstGeom prst="rect">
-            <a:avLst/>
-          </a:prstGeom>
-          <a:solidFill>
-            <a:srgbClr val="FFFFFF"/>
-          </a:solidFill>
-          <a:ln w="12700">
-            <a:solidFill>
-              <a:srgbClr val="999999"/>
-            </a:solidFill>
-          </a:ln>
-        </p:spPr>
-        <p:style>
-          <a:lnRef idx="1">
-            <a:schemeClr val="accent1"/>
-          </a:lnRef>
-          <a:fillRef idx="3">
-            <a:schemeClr val="accent1"/>
-          </a:fillRef>
-          <a:effectRef idx="2">
-            <a:schemeClr val="accent1"/>
-          </a:effectRef>
-          <a:fontRef idx="minor">
-            <a:schemeClr val="lt1"/>
-          </a:fontRef>
-        </p:style>
-        <p:txBody>
-          <a:bodyPr rtlCol="0" anchor="ctr"/>
-          <a:lstStyle/>
-          <a:p>
-            <a:pPr algn="ctr"/>
-          </a:p>
-        </p:txBody>
-      </p:sp>
-      <p:sp>
-        <p:nvSpPr>
-          <p:cNvPr id="31" name="TextBox 30"/>
-          <p:cNvSpPr txBox="1"/>
-          <p:nvPr/>
-        </p:nvSpPr>
-        <p:spPr>
-          <a:xfrm>
-            <a:off x="1650000" y="5800000"/>
-            <a:ext cx="10100000" cy="550000"/>
-          </a:xfrm>
-          <a:prstGeom prst="rect">
-            <a:avLst/>
-          </a:prstGeom>
-          <a:noFill/>
-        </p:spPr>
-        <p:txBody>
-          <a:bodyPr wrap="square" anchor="ctr">
-            <a:spAutoFit/>
-          </a:bodyPr>
-          <a:lstStyle/>
-          <a:p>
-            <a:pPr algn="l"/>
-            <a:r>
-              <a:rPr sz="1300" b="0">
-                <a:solidFill>
-                  <a:srgbClr val="333333"/>
-                </a:solidFill>
-                <a:latin typeface="Open Sans"/>
-                <a:ea typeface="Open Sans"/>
-                <a:cs typeface="Open Sans"/>
-              </a:rPr>
-              <a:t>Ноги, затем руки: сравните форму и болезненность.</a:t>
+              <a:t>•  какие заболевания, аллергии и назначенные лекарства известны</a:t>
             </a:r>
           </a:p>
         </p:txBody>
@@ -6772,7 +10422,7 @@
                 <a:ea typeface="Open Sans"/>
                 <a:cs typeface="Open Sans"/>
               </a:rPr>
-              <a:t>НАХОДКИ, ТРЕБУЮЩИЕ ОСОБОГО ВНИМАНИЯ</a:t>
+              <a:t>ГОЛОВА: ОСМОТР НАЧИНАЕТСЯ СВЕРХУ</a:t>
             </a:r>
           </a:p>
         </p:txBody>
@@ -6937,16 +10587,40 @@
           </a:p>
         </p:txBody>
       </p:sp>
-      <p:sp>
-        <p:nvSpPr>
-          <p:cNvPr id="8" name="TextBox 7"/>
+      <p:pic>
+        <p:nvPicPr>
+          <p:cNvPr id="8" name="Picture 7" descr="fig56.jpeg"/>
+          <p:cNvPicPr>
+            <a:picLocks noChangeAspect="1"/>
+          </p:cNvPicPr>
+          <p:nvPr/>
+        </p:nvPicPr>
+        <p:blipFill>
+          <a:blip r:embed="rId2"/>
+          <a:stretch>
+            <a:fillRect/>
+          </a:stretch>
+        </p:blipFill>
+        <p:spPr>
+          <a:xfrm>
+            <a:off x="500000" y="1482743"/>
+            <a:ext cx="5200000" cy="3934513"/>
+          </a:xfrm>
+          <a:prstGeom prst="rect">
+            <a:avLst/>
+          </a:prstGeom>
+        </p:spPr>
+      </p:pic>
+      <p:sp>
+        <p:nvSpPr>
+          <p:cNvPr id="9" name="TextBox 8"/>
           <p:cNvSpPr txBox="1"/>
           <p:nvPr/>
         </p:nvSpPr>
         <p:spPr>
           <a:xfrm>
-            <a:off x="700000" y="1500000"/>
-            <a:ext cx="11000000" cy="4200000"/>
+            <a:off x="6000000" y="1450000"/>
+            <a:ext cx="6200000" cy="3800000"/>
           </a:xfrm>
           <a:prstGeom prst="rect">
             <a:avLst/>
@@ -6965,7 +10639,7 @@
               </a:spcAft>
             </a:pPr>
             <a:r>
-              <a:rPr sz="1400" b="0">
+              <a:rPr sz="1300" b="0">
                 <a:solidFill>
                   <a:srgbClr val="333333"/>
                 </a:solidFill>
@@ -6973,7 +10647,7 @@
                 <a:ea typeface="Open Sans"/>
                 <a:cs typeface="Open Sans"/>
               </a:rPr>
-              <a:t>•  Бледность или синюшность кожи</a:t>
+              <a:t>•  Осмотрите лицо, волосистую часть головы и область за ушами.</a:t>
             </a:r>
           </a:p>
           <a:p>
@@ -6983,7 +10657,7 @@
               </a:spcAft>
             </a:pPr>
             <a:r>
-              <a:rPr sz="1400" b="0">
+              <a:rPr sz="1300" b="0">
                 <a:solidFill>
                   <a:srgbClr val="333333"/>
                 </a:solidFill>
@@ -6991,7 +10665,7 @@
                 <a:ea typeface="Open Sans"/>
                 <a:cs typeface="Open Sans"/>
               </a:rPr>
-              <a:t>•  Пузыри и обширное покраснение</a:t>
+              <a:t>•  Ищите раны, кровотечение, отек, деформацию и болезненность.</a:t>
             </a:r>
           </a:p>
           <a:p>
@@ -7001,15 +10675,15 @@
               </a:spcAft>
             </a:pPr>
             <a:r>
-              <a:rPr sz="1400" b="1">
-                <a:solidFill>
-                  <a:srgbClr val="CC0000"/>
-                </a:solidFill>
-                <a:latin typeface="Open Sans"/>
-                <a:ea typeface="Open Sans"/>
-                <a:cs typeface="Open Sans"/>
-              </a:rPr>
-              <a:t>•  Рана с инородным телом или костными отломками</a:t>
+              <a:rPr sz="1300" b="0">
+                <a:solidFill>
+                  <a:srgbClr val="333333"/>
+                </a:solidFill>
+                <a:latin typeface="Open Sans"/>
+                <a:ea typeface="Open Sans"/>
+                <a:cs typeface="Open Sans"/>
+              </a:rPr>
+              <a:t>•  Обратите внимание на кровь или прозрачную жидкость из носа и ушей.</a:t>
             </a:r>
           </a:p>
           <a:p>
@@ -7019,15 +10693,15 @@
               </a:spcAft>
             </a:pPr>
             <a:r>
-              <a:rPr sz="1400" b="1">
-                <a:solidFill>
-                  <a:srgbClr val="CC0000"/>
-                </a:solidFill>
-                <a:latin typeface="Open Sans"/>
-                <a:ea typeface="Open Sans"/>
-                <a:cs typeface="Open Sans"/>
-              </a:rPr>
-              <a:t>•  Синяки и ссадины на животе или тазе</a:t>
+              <a:rPr sz="1300" b="0">
+                <a:solidFill>
+                  <a:srgbClr val="333333"/>
+                </a:solidFill>
+                <a:latin typeface="Open Sans"/>
+                <a:ea typeface="Open Sans"/>
+                <a:cs typeface="Open Sans"/>
+              </a:rPr>
+              <a:t>•  Спросите о потере сознания, провалах памяти, головной боли, тошноте и рвоте.</a:t>
             </a:r>
           </a:p>
           <a:p>
@@ -7037,15 +10711,95 @@
               </a:spcAft>
             </a:pPr>
             <a:r>
-              <a:rPr sz="1400" b="1">
-                <a:solidFill>
-                  <a:srgbClr val="CC0000"/>
-                </a:solidFill>
-                <a:latin typeface="Open Sans"/>
-                <a:ea typeface="Open Sans"/>
-                <a:cs typeface="Open Sans"/>
-              </a:rPr>
-              <a:t>•  Деформация и резкая боль в конечности</a:t>
+              <a:rPr sz="1300" b="0">
+                <a:solidFill>
+                  <a:srgbClr val="333333"/>
+                </a:solidFill>
+                <a:latin typeface="Open Sans"/>
+                <a:ea typeface="Open Sans"/>
+                <a:cs typeface="Open Sans"/>
+              </a:rPr>
+              <a:t>•  Проверьте симметрию лица, реакцию на обращение и состояние глаз.</a:t>
+            </a:r>
+          </a:p>
+        </p:txBody>
+      </p:sp>
+      <p:sp>
+        <p:nvSpPr>
+          <p:cNvPr id="10" name="Rounded Rectangle 9"/>
+          <p:cNvSpPr/>
+          <p:nvPr/>
+        </p:nvSpPr>
+        <p:spPr>
+          <a:xfrm>
+            <a:off x="6000000" y="5400000"/>
+            <a:ext cx="6200000" cy="1100000"/>
+          </a:xfrm>
+          <a:prstGeom prst="roundRect">
+            <a:avLst/>
+          </a:prstGeom>
+          <a:solidFill>
+            <a:srgbClr val="F5F0E1"/>
+          </a:solidFill>
+          <a:ln>
+            <a:noFill/>
+          </a:ln>
+        </p:spPr>
+        <p:style>
+          <a:lnRef idx="1">
+            <a:schemeClr val="accent1"/>
+          </a:lnRef>
+          <a:fillRef idx="3">
+            <a:schemeClr val="accent1"/>
+          </a:fillRef>
+          <a:effectRef idx="2">
+            <a:schemeClr val="accent1"/>
+          </a:effectRef>
+          <a:fontRef idx="minor">
+            <a:schemeClr val="lt1"/>
+          </a:fontRef>
+        </p:style>
+        <p:txBody>
+          <a:bodyPr rtlCol="0" anchor="ctr"/>
+          <a:lstStyle/>
+          <a:p>
+            <a:pPr algn="ctr"/>
+          </a:p>
+        </p:txBody>
+      </p:sp>
+      <p:sp>
+        <p:nvSpPr>
+          <p:cNvPr id="11" name="TextBox 10"/>
+          <p:cNvSpPr txBox="1"/>
+          <p:nvPr/>
+        </p:nvSpPr>
+        <p:spPr>
+          <a:xfrm>
+            <a:off x="6250000" y="5600000"/>
+            <a:ext cx="5700000" cy="700000"/>
+          </a:xfrm>
+          <a:prstGeom prst="rect">
+            <a:avLst/>
+          </a:prstGeom>
+          <a:noFill/>
+        </p:spPr>
+        <p:txBody>
+          <a:bodyPr wrap="square" anchor="ctr">
+            <a:spAutoFit/>
+          </a:bodyPr>
+          <a:lstStyle/>
+          <a:p>
+            <a:pPr algn="l"/>
+            <a:r>
+              <a:rPr sz="1200" b="0">
+                <a:solidFill>
+                  <a:srgbClr val="333333"/>
+                </a:solidFill>
+                <a:latin typeface="Open Sans"/>
+                <a:ea typeface="Open Sans"/>
+                <a:cs typeface="Open Sans"/>
+              </a:rPr>
+              <a:t>Не надавливайте на участок возможного перелома костей черепа и не извлекайте предметы из раны.</a:t>
             </a:r>
           </a:p>
         </p:txBody>
@@ -7143,7 +10897,7 @@
                 <a:ea typeface="Open Sans"/>
                 <a:cs typeface="Open Sans"/>
               </a:rPr>
-              <a:t>ОСМАТРИВАЙТЕ БЕРЕЖНО</a:t>
+              <a:t>ШЕЯ: ТОЛЬКО ОСТОРОЖНЫЕ ДЕЙСТВИЯ</a:t>
             </a:r>
           </a:p>
         </p:txBody>
@@ -7308,16 +11062,40 @@
           </a:p>
         </p:txBody>
       </p:sp>
-      <p:sp>
-        <p:nvSpPr>
-          <p:cNvPr id="8" name="TextBox 7"/>
+      <p:pic>
+        <p:nvPicPr>
+          <p:cNvPr id="8" name="Picture 7" descr="fig57.jpeg"/>
+          <p:cNvPicPr>
+            <a:picLocks noChangeAspect="1"/>
+          </p:cNvPicPr>
+          <p:nvPr/>
+        </p:nvPicPr>
+        <p:blipFill>
+          <a:blip r:embed="rId2"/>
+          <a:stretch>
+            <a:fillRect/>
+          </a:stretch>
+        </p:blipFill>
+        <p:spPr>
+          <a:xfrm>
+            <a:off x="500000" y="1466644"/>
+            <a:ext cx="5200000" cy="3966712"/>
+          </a:xfrm>
+          <a:prstGeom prst="rect">
+            <a:avLst/>
+          </a:prstGeom>
+        </p:spPr>
+      </p:pic>
+      <p:sp>
+        <p:nvSpPr>
+          <p:cNvPr id="9" name="TextBox 8"/>
           <p:cNvSpPr txBox="1"/>
           <p:nvPr/>
         </p:nvSpPr>
         <p:spPr>
           <a:xfrm>
-            <a:off x="700000" y="1500000"/>
-            <a:ext cx="11000000" cy="4200000"/>
+            <a:off x="6000000" y="1450000"/>
+            <a:ext cx="6200000" cy="3800000"/>
           </a:xfrm>
           <a:prstGeom prst="rect">
             <a:avLst/>
@@ -7336,7 +11114,7 @@
               </a:spcAft>
             </a:pPr>
             <a:r>
-              <a:rPr sz="1400" b="0">
+              <a:rPr sz="1300" b="0">
                 <a:solidFill>
                   <a:srgbClr val="333333"/>
                 </a:solidFill>
@@ -7344,7 +11122,7 @@
                 <a:ea typeface="Open Sans"/>
                 <a:cs typeface="Open Sans"/>
               </a:rPr>
-              <a:t>•  Объясняйте каждое действие</a:t>
+              <a:t>•  Осмотрите переднюю, боковые и доступную заднюю поверхность шеи.</a:t>
             </a:r>
           </a:p>
           <a:p>
@@ -7354,7 +11132,7 @@
               </a:spcAft>
             </a:pPr>
             <a:r>
-              <a:rPr sz="1400" b="0">
+              <a:rPr sz="1300" b="0">
                 <a:solidFill>
                   <a:srgbClr val="333333"/>
                 </a:solidFill>
@@ -7362,7 +11140,7 @@
                 <a:ea typeface="Open Sans"/>
                 <a:cs typeface="Open Sans"/>
               </a:rPr>
-              <a:t>•  Не причиняйте дополнительную боль</a:t>
+              <a:t>•  Ищите раны, кровотечение, отек, кровоподтеки и необычное положение головы.</a:t>
             </a:r>
           </a:p>
           <a:p>
@@ -7372,7 +11150,7 @@
               </a:spcAft>
             </a:pPr>
             <a:r>
-              <a:rPr sz="1400" b="0">
+              <a:rPr sz="1300" b="0">
                 <a:solidFill>
                   <a:srgbClr val="333333"/>
                 </a:solidFill>
@@ -7380,7 +11158,7 @@
                 <a:ea typeface="Open Sans"/>
                 <a:cs typeface="Open Sans"/>
               </a:rPr>
-              <a:t>•  Не поворачивайте пострадавшего без необходимости</a:t>
+              <a:t>•  Уточните наличие боли в шее, онемения или слабости в конечностях.</a:t>
             </a:r>
           </a:p>
           <a:p>
@@ -7390,7 +11168,7 @@
               </a:spcAft>
             </a:pPr>
             <a:r>
-              <a:rPr sz="1400" b="0">
+              <a:rPr sz="1300" b="0">
                 <a:solidFill>
                   <a:srgbClr val="333333"/>
                 </a:solidFill>
@@ -7398,7 +11176,7 @@
                 <a:ea typeface="Open Sans"/>
                 <a:cs typeface="Open Sans"/>
               </a:rPr>
-              <a:t>•  Не вынимайте инородные тела из ран</a:t>
+              <a:t>•  Не сгибайте, не разгибайте и не поворачивайте голову для осмотра.</a:t>
             </a:r>
           </a:p>
           <a:p>
@@ -7408,7 +11186,7 @@
               </a:spcAft>
             </a:pPr>
             <a:r>
-              <a:rPr sz="1400" b="0">
+              <a:rPr sz="1300" b="0">
                 <a:solidFill>
                   <a:srgbClr val="333333"/>
                 </a:solidFill>
@@ -7416,21 +11194,21 @@
                 <a:ea typeface="Open Sans"/>
                 <a:cs typeface="Open Sans"/>
               </a:rPr>
-              <a:t>•  По результатам сразу оказывайте нужную помощь</a:t>
-            </a:r>
-          </a:p>
-        </p:txBody>
-      </p:sp>
-      <p:sp>
-        <p:nvSpPr>
-          <p:cNvPr id="9" name="Rounded Rectangle 8"/>
+              <a:t>•  При подозрении на травму удерживайте голову в найденном положении.</a:t>
+            </a:r>
+          </a:p>
+        </p:txBody>
+      </p:sp>
+      <p:sp>
+        <p:nvSpPr>
+          <p:cNvPr id="10" name="Rounded Rectangle 9"/>
           <p:cNvSpPr/>
           <p:nvPr/>
         </p:nvSpPr>
         <p:spPr>
           <a:xfrm>
-            <a:off x="700000" y="5600000"/>
-            <a:ext cx="11000000" cy="1000000"/>
+            <a:off x="6000000" y="5400000"/>
+            <a:ext cx="6200000" cy="1100000"/>
           </a:xfrm>
           <a:prstGeom prst="roundRect">
             <a:avLst/>
@@ -7466,14 +11244,14 @@
       </p:sp>
       <p:sp>
         <p:nvSpPr>
-          <p:cNvPr id="10" name="TextBox 9"/>
+          <p:cNvPr id="11" name="TextBox 10"/>
           <p:cNvSpPr txBox="1"/>
           <p:nvPr/>
         </p:nvSpPr>
         <p:spPr>
           <a:xfrm>
-            <a:off x="950000" y="5800000"/>
-            <a:ext cx="10500000" cy="600000"/>
+            <a:off x="6250000" y="5600000"/>
+            <a:ext cx="5700000" cy="700000"/>
           </a:xfrm>
           <a:prstGeom prst="rect">
             <a:avLst/>
@@ -7488,7 +11266,7 @@
           <a:p>
             <a:pPr algn="l"/>
             <a:r>
-              <a:rPr sz="1300" b="0">
+              <a:rPr sz="1200" b="0">
                 <a:solidFill>
                   <a:srgbClr val="333333"/>
                 </a:solidFill>
@@ -7496,7 +11274,7 @@
                 <a:ea typeface="Open Sans"/>
                 <a:cs typeface="Open Sans"/>
               </a:rPr>
-              <a:t>Деформация и боль при движении — возможные признаки перелома.</a:t>
+              <a:t>Повреждение шейного отдела позвоночника возможно даже при отсутствии заметной наружной раны.</a:t>
             </a:r>
           </a:p>
         </p:txBody>
@@ -7594,7 +11372,7 @@
                 <a:ea typeface="Open Sans"/>
                 <a:cs typeface="Open Sans"/>
               </a:rPr>
-              <a:t>ГЛАВНОЕ ЗАПОМНИТЬ</a:t>
+              <a:t>ГРУДНАЯ КЛЕТКА: ОСМОТР И СРАВНЕНИЕ СТОРОН</a:t>
             </a:r>
           </a:p>
         </p:txBody>
@@ -7759,27 +11537,162 @@
           </a:p>
         </p:txBody>
       </p:sp>
-      <p:sp>
-        <p:nvSpPr>
-          <p:cNvPr id="8" name="Rectangle 7"/>
+      <p:pic>
+        <p:nvPicPr>
+          <p:cNvPr id="8" name="Picture 7" descr="fig58.jpeg"/>
+          <p:cNvPicPr>
+            <a:picLocks noChangeAspect="1"/>
+          </p:cNvPicPr>
+          <p:nvPr/>
+        </p:nvPicPr>
+        <p:blipFill>
+          <a:blip r:embed="rId2"/>
+          <a:stretch>
+            <a:fillRect/>
+          </a:stretch>
+        </p:blipFill>
+        <p:spPr>
+          <a:xfrm>
+            <a:off x="517376" y="1450000"/>
+            <a:ext cx="5165247" cy="4000000"/>
+          </a:xfrm>
+          <a:prstGeom prst="rect">
+            <a:avLst/>
+          </a:prstGeom>
+        </p:spPr>
+      </p:pic>
+      <p:sp>
+        <p:nvSpPr>
+          <p:cNvPr id="9" name="TextBox 8"/>
+          <p:cNvSpPr txBox="1"/>
+          <p:nvPr/>
+        </p:nvSpPr>
+        <p:spPr>
+          <a:xfrm>
+            <a:off x="6000000" y="1450000"/>
+            <a:ext cx="6200000" cy="3800000"/>
+          </a:xfrm>
+          <a:prstGeom prst="rect">
+            <a:avLst/>
+          </a:prstGeom>
+          <a:noFill/>
+        </p:spPr>
+        <p:txBody>
+          <a:bodyPr wrap="square">
+            <a:spAutoFit/>
+          </a:bodyPr>
+          <a:lstStyle/>
+          <a:p>
+            <a:pPr algn="l">
+              <a:spcAft>
+                <a:spcPts val="800"/>
+              </a:spcAft>
+            </a:pPr>
+            <a:r>
+              <a:rPr sz="1300" b="0">
+                <a:solidFill>
+                  <a:srgbClr val="333333"/>
+                </a:solidFill>
+                <a:latin typeface="Open Sans"/>
+                <a:ea typeface="Open Sans"/>
+                <a:cs typeface="Open Sans"/>
+              </a:rPr>
+              <a:t>•  Осмотрите грудь спереди и с боков, не снимая прилипшую к ране одежду.</a:t>
+            </a:r>
+          </a:p>
+          <a:p>
+            <a:pPr algn="l">
+              <a:spcAft>
+                <a:spcPts val="800"/>
+              </a:spcAft>
+            </a:pPr>
+            <a:r>
+              <a:rPr sz="1300" b="0">
+                <a:solidFill>
+                  <a:srgbClr val="333333"/>
+                </a:solidFill>
+                <a:latin typeface="Open Sans"/>
+                <a:ea typeface="Open Sans"/>
+                <a:cs typeface="Open Sans"/>
+              </a:rPr>
+              <a:t>•  Оцените, одинаково ли поднимаются правая и левая половины при дыхании.</a:t>
+            </a:r>
+          </a:p>
+          <a:p>
+            <a:pPr algn="l">
+              <a:spcAft>
+                <a:spcPts val="800"/>
+              </a:spcAft>
+            </a:pPr>
+            <a:r>
+              <a:rPr sz="1300" b="0">
+                <a:solidFill>
+                  <a:srgbClr val="333333"/>
+                </a:solidFill>
+                <a:latin typeface="Open Sans"/>
+                <a:ea typeface="Open Sans"/>
+                <a:cs typeface="Open Sans"/>
+              </a:rPr>
+              <a:t>•  Ищите раны, кровоподтеки, деформацию и движения воздуха через рану.</a:t>
+            </a:r>
+          </a:p>
+          <a:p>
+            <a:pPr algn="l">
+              <a:spcAft>
+                <a:spcPts val="800"/>
+              </a:spcAft>
+            </a:pPr>
+            <a:r>
+              <a:rPr sz="1300" b="0">
+                <a:solidFill>
+                  <a:srgbClr val="333333"/>
+                </a:solidFill>
+                <a:latin typeface="Open Sans"/>
+                <a:ea typeface="Open Sans"/>
+                <a:cs typeface="Open Sans"/>
+              </a:rPr>
+              <a:t>•  Спросите, усиливается ли боль при вдохе, кашле и движении.</a:t>
+            </a:r>
+          </a:p>
+          <a:p>
+            <a:pPr algn="l">
+              <a:spcAft>
+                <a:spcPts val="800"/>
+              </a:spcAft>
+            </a:pPr>
+            <a:r>
+              <a:rPr sz="1300" b="0">
+                <a:solidFill>
+                  <a:srgbClr val="333333"/>
+                </a:solidFill>
+                <a:latin typeface="Open Sans"/>
+                <a:ea typeface="Open Sans"/>
+                <a:cs typeface="Open Sans"/>
+              </a:rPr>
+              <a:t>•  Осторожно ощупайте доступные участки, прекращая действие при резкой боли.</a:t>
+            </a:r>
+          </a:p>
+        </p:txBody>
+      </p:sp>
+      <p:sp>
+        <p:nvSpPr>
+          <p:cNvPr id="10" name="Rounded Rectangle 9"/>
           <p:cNvSpPr/>
           <p:nvPr/>
         </p:nvSpPr>
         <p:spPr>
           <a:xfrm>
-            <a:off x="700000" y="1450000"/>
-            <a:ext cx="11000000" cy="850000"/>
-          </a:xfrm>
-          <a:prstGeom prst="rect">
+            <a:off x="6000000" y="5400000"/>
+            <a:ext cx="6200000" cy="1100000"/>
+          </a:xfrm>
+          <a:prstGeom prst="roundRect">
             <a:avLst/>
           </a:prstGeom>
           <a:solidFill>
-            <a:srgbClr val="FFFFFF"/>
+            <a:srgbClr val="F5F0E1"/>
           </a:solidFill>
-          <a:ln w="12700">
-            <a:solidFill>
-              <a:srgbClr val="999999"/>
-            </a:solidFill>
+          <a:ln>
+            <a:noFill/>
           </a:ln>
         </p:spPr>
         <p:style>
@@ -7806,57 +11719,14 @@
       </p:sp>
       <p:sp>
         <p:nvSpPr>
-          <p:cNvPr id="9" name="Rectangle 8"/>
-          <p:cNvSpPr/>
-          <p:nvPr/>
-        </p:nvSpPr>
-        <p:spPr>
-          <a:xfrm>
-            <a:off x="700000" y="1450000"/>
-            <a:ext cx="90000" cy="850000"/>
-          </a:xfrm>
-          <a:prstGeom prst="rect">
-            <a:avLst/>
-          </a:prstGeom>
-          <a:solidFill>
-            <a:srgbClr val="CC0000"/>
-          </a:solidFill>
-          <a:ln>
-            <a:noFill/>
-          </a:ln>
-        </p:spPr>
-        <p:style>
-          <a:lnRef idx="1">
-            <a:schemeClr val="accent1"/>
-          </a:lnRef>
-          <a:fillRef idx="3">
-            <a:schemeClr val="accent1"/>
-          </a:fillRef>
-          <a:effectRef idx="2">
-            <a:schemeClr val="accent1"/>
-          </a:effectRef>
-          <a:fontRef idx="minor">
-            <a:schemeClr val="lt1"/>
-          </a:fontRef>
-        </p:style>
-        <p:txBody>
-          <a:bodyPr rtlCol="0" anchor="ctr"/>
-          <a:lstStyle/>
-          <a:p>
-            <a:pPr algn="ctr"/>
-          </a:p>
-        </p:txBody>
-      </p:sp>
-      <p:sp>
-        <p:nvSpPr>
-          <p:cNvPr id="10" name="TextBox 9"/>
+          <p:cNvPr id="11" name="TextBox 10"/>
           <p:cNvSpPr txBox="1"/>
           <p:nvPr/>
         </p:nvSpPr>
         <p:spPr>
           <a:xfrm>
-            <a:off x="1000000" y="1550000"/>
-            <a:ext cx="10400000" cy="650000"/>
+            <a:off x="6250000" y="5600000"/>
+            <a:ext cx="5700000" cy="700000"/>
           </a:xfrm>
           <a:prstGeom prst="rect">
             <a:avLst/>
@@ -7871,7 +11741,7 @@
           <a:p>
             <a:pPr algn="l"/>
             <a:r>
-              <a:rPr sz="1300" b="0">
+              <a:rPr sz="1200" b="0">
                 <a:solidFill>
                   <a:srgbClr val="333333"/>
                 </a:solidFill>
@@ -7879,507 +11749,7 @@
                 <a:ea typeface="Open Sans"/>
                 <a:cs typeface="Open Sans"/>
               </a:rPr>
-              <a:t>Осматривайте с головы до рук</a:t>
-            </a:r>
-          </a:p>
-        </p:txBody>
-      </p:sp>
-      <p:sp>
-        <p:nvSpPr>
-          <p:cNvPr id="11" name="Rectangle 10"/>
-          <p:cNvSpPr/>
-          <p:nvPr/>
-        </p:nvSpPr>
-        <p:spPr>
-          <a:xfrm>
-            <a:off x="700000" y="2400000"/>
-            <a:ext cx="11000000" cy="850000"/>
-          </a:xfrm>
-          <a:prstGeom prst="rect">
-            <a:avLst/>
-          </a:prstGeom>
-          <a:solidFill>
-            <a:srgbClr val="FFFFFF"/>
-          </a:solidFill>
-          <a:ln w="12700">
-            <a:solidFill>
-              <a:srgbClr val="999999"/>
-            </a:solidFill>
-          </a:ln>
-        </p:spPr>
-        <p:style>
-          <a:lnRef idx="1">
-            <a:schemeClr val="accent1"/>
-          </a:lnRef>
-          <a:fillRef idx="3">
-            <a:schemeClr val="accent1"/>
-          </a:fillRef>
-          <a:effectRef idx="2">
-            <a:schemeClr val="accent1"/>
-          </a:effectRef>
-          <a:fontRef idx="minor">
-            <a:schemeClr val="lt1"/>
-          </a:fontRef>
-        </p:style>
-        <p:txBody>
-          <a:bodyPr rtlCol="0" anchor="ctr"/>
-          <a:lstStyle/>
-          <a:p>
-            <a:pPr algn="ctr"/>
-          </a:p>
-        </p:txBody>
-      </p:sp>
-      <p:sp>
-        <p:nvSpPr>
-          <p:cNvPr id="12" name="Rectangle 11"/>
-          <p:cNvSpPr/>
-          <p:nvPr/>
-        </p:nvSpPr>
-        <p:spPr>
-          <a:xfrm>
-            <a:off x="700000" y="2400000"/>
-            <a:ext cx="90000" cy="850000"/>
-          </a:xfrm>
-          <a:prstGeom prst="rect">
-            <a:avLst/>
-          </a:prstGeom>
-          <a:solidFill>
-            <a:srgbClr val="CC0000"/>
-          </a:solidFill>
-          <a:ln>
-            <a:noFill/>
-          </a:ln>
-        </p:spPr>
-        <p:style>
-          <a:lnRef idx="1">
-            <a:schemeClr val="accent1"/>
-          </a:lnRef>
-          <a:fillRef idx="3">
-            <a:schemeClr val="accent1"/>
-          </a:fillRef>
-          <a:effectRef idx="2">
-            <a:schemeClr val="accent1"/>
-          </a:effectRef>
-          <a:fontRef idx="minor">
-            <a:schemeClr val="lt1"/>
-          </a:fontRef>
-        </p:style>
-        <p:txBody>
-          <a:bodyPr rtlCol="0" anchor="ctr"/>
-          <a:lstStyle/>
-          <a:p>
-            <a:pPr algn="ctr"/>
-          </a:p>
-        </p:txBody>
-      </p:sp>
-      <p:sp>
-        <p:nvSpPr>
-          <p:cNvPr id="13" name="TextBox 12"/>
-          <p:cNvSpPr txBox="1"/>
-          <p:nvPr/>
-        </p:nvSpPr>
-        <p:spPr>
-          <a:xfrm>
-            <a:off x="1000000" y="2500000"/>
-            <a:ext cx="10400000" cy="650000"/>
-          </a:xfrm>
-          <a:prstGeom prst="rect">
-            <a:avLst/>
-          </a:prstGeom>
-          <a:noFill/>
-        </p:spPr>
-        <p:txBody>
-          <a:bodyPr wrap="square" anchor="ctr">
-            <a:spAutoFit/>
-          </a:bodyPr>
-          <a:lstStyle/>
-          <a:p>
-            <a:pPr algn="l"/>
-            <a:r>
-              <a:rPr sz="1300" b="0">
-                <a:solidFill>
-                  <a:srgbClr val="333333"/>
-                </a:solidFill>
-                <a:latin typeface="Open Sans"/>
-                <a:ea typeface="Open Sans"/>
-                <a:cs typeface="Open Sans"/>
-              </a:rPr>
-              <a:t>Шею проверяйте особенно осторожно</a:t>
-            </a:r>
-          </a:p>
-        </p:txBody>
-      </p:sp>
-      <p:sp>
-        <p:nvSpPr>
-          <p:cNvPr id="14" name="Rectangle 13"/>
-          <p:cNvSpPr/>
-          <p:nvPr/>
-        </p:nvSpPr>
-        <p:spPr>
-          <a:xfrm>
-            <a:off x="700000" y="3350000"/>
-            <a:ext cx="11000000" cy="850000"/>
-          </a:xfrm>
-          <a:prstGeom prst="rect">
-            <a:avLst/>
-          </a:prstGeom>
-          <a:solidFill>
-            <a:srgbClr val="FFFFFF"/>
-          </a:solidFill>
-          <a:ln w="12700">
-            <a:solidFill>
-              <a:srgbClr val="999999"/>
-            </a:solidFill>
-          </a:ln>
-        </p:spPr>
-        <p:style>
-          <a:lnRef idx="1">
-            <a:schemeClr val="accent1"/>
-          </a:lnRef>
-          <a:fillRef idx="3">
-            <a:schemeClr val="accent1"/>
-          </a:fillRef>
-          <a:effectRef idx="2">
-            <a:schemeClr val="accent1"/>
-          </a:effectRef>
-          <a:fontRef idx="minor">
-            <a:schemeClr val="lt1"/>
-          </a:fontRef>
-        </p:style>
-        <p:txBody>
-          <a:bodyPr rtlCol="0" anchor="ctr"/>
-          <a:lstStyle/>
-          <a:p>
-            <a:pPr algn="ctr"/>
-          </a:p>
-        </p:txBody>
-      </p:sp>
-      <p:sp>
-        <p:nvSpPr>
-          <p:cNvPr id="15" name="Rectangle 14"/>
-          <p:cNvSpPr/>
-          <p:nvPr/>
-        </p:nvSpPr>
-        <p:spPr>
-          <a:xfrm>
-            <a:off x="700000" y="3350000"/>
-            <a:ext cx="90000" cy="850000"/>
-          </a:xfrm>
-          <a:prstGeom prst="rect">
-            <a:avLst/>
-          </a:prstGeom>
-          <a:solidFill>
-            <a:srgbClr val="CC0000"/>
-          </a:solidFill>
-          <a:ln>
-            <a:noFill/>
-          </a:ln>
-        </p:spPr>
-        <p:style>
-          <a:lnRef idx="1">
-            <a:schemeClr val="accent1"/>
-          </a:lnRef>
-          <a:fillRef idx="3">
-            <a:schemeClr val="accent1"/>
-          </a:fillRef>
-          <a:effectRef idx="2">
-            <a:schemeClr val="accent1"/>
-          </a:effectRef>
-          <a:fontRef idx="minor">
-            <a:schemeClr val="lt1"/>
-          </a:fontRef>
-        </p:style>
-        <p:txBody>
-          <a:bodyPr rtlCol="0" anchor="ctr"/>
-          <a:lstStyle/>
-          <a:p>
-            <a:pPr algn="ctr"/>
-          </a:p>
-        </p:txBody>
-      </p:sp>
-      <p:sp>
-        <p:nvSpPr>
-          <p:cNvPr id="16" name="TextBox 15"/>
-          <p:cNvSpPr txBox="1"/>
-          <p:nvPr/>
-        </p:nvSpPr>
-        <p:spPr>
-          <a:xfrm>
-            <a:off x="1000000" y="3450000"/>
-            <a:ext cx="10400000" cy="650000"/>
-          </a:xfrm>
-          <a:prstGeom prst="rect">
-            <a:avLst/>
-          </a:prstGeom>
-          <a:noFill/>
-        </p:spPr>
-        <p:txBody>
-          <a:bodyPr wrap="square" anchor="ctr">
-            <a:spAutoFit/>
-          </a:bodyPr>
-          <a:lstStyle/>
-          <a:p>
-            <a:pPr algn="l"/>
-            <a:r>
-              <a:rPr sz="1300" b="0">
-                <a:solidFill>
-                  <a:srgbClr val="333333"/>
-                </a:solidFill>
-                <a:latin typeface="Open Sans"/>
-                <a:ea typeface="Open Sans"/>
-                <a:cs typeface="Open Sans"/>
-              </a:rPr>
-              <a:t>Спину прощупывайте без лишних поворотов</a:t>
-            </a:r>
-          </a:p>
-        </p:txBody>
-      </p:sp>
-      <p:sp>
-        <p:nvSpPr>
-          <p:cNvPr id="17" name="Rectangle 16"/>
-          <p:cNvSpPr/>
-          <p:nvPr/>
-        </p:nvSpPr>
-        <p:spPr>
-          <a:xfrm>
-            <a:off x="700000" y="4300000"/>
-            <a:ext cx="11000000" cy="850000"/>
-          </a:xfrm>
-          <a:prstGeom prst="rect">
-            <a:avLst/>
-          </a:prstGeom>
-          <a:solidFill>
-            <a:srgbClr val="FFFFFF"/>
-          </a:solidFill>
-          <a:ln w="12700">
-            <a:solidFill>
-              <a:srgbClr val="999999"/>
-            </a:solidFill>
-          </a:ln>
-        </p:spPr>
-        <p:style>
-          <a:lnRef idx="1">
-            <a:schemeClr val="accent1"/>
-          </a:lnRef>
-          <a:fillRef idx="3">
-            <a:schemeClr val="accent1"/>
-          </a:fillRef>
-          <a:effectRef idx="2">
-            <a:schemeClr val="accent1"/>
-          </a:effectRef>
-          <a:fontRef idx="minor">
-            <a:schemeClr val="lt1"/>
-          </a:fontRef>
-        </p:style>
-        <p:txBody>
-          <a:bodyPr rtlCol="0" anchor="ctr"/>
-          <a:lstStyle/>
-          <a:p>
-            <a:pPr algn="ctr"/>
-          </a:p>
-        </p:txBody>
-      </p:sp>
-      <p:sp>
-        <p:nvSpPr>
-          <p:cNvPr id="18" name="Rectangle 17"/>
-          <p:cNvSpPr/>
-          <p:nvPr/>
-        </p:nvSpPr>
-        <p:spPr>
-          <a:xfrm>
-            <a:off x="700000" y="4300000"/>
-            <a:ext cx="90000" cy="850000"/>
-          </a:xfrm>
-          <a:prstGeom prst="rect">
-            <a:avLst/>
-          </a:prstGeom>
-          <a:solidFill>
-            <a:srgbClr val="CC0000"/>
-          </a:solidFill>
-          <a:ln>
-            <a:noFill/>
-          </a:ln>
-        </p:spPr>
-        <p:style>
-          <a:lnRef idx="1">
-            <a:schemeClr val="accent1"/>
-          </a:lnRef>
-          <a:fillRef idx="3">
-            <a:schemeClr val="accent1"/>
-          </a:fillRef>
-          <a:effectRef idx="2">
-            <a:schemeClr val="accent1"/>
-          </a:effectRef>
-          <a:fontRef idx="minor">
-            <a:schemeClr val="lt1"/>
-          </a:fontRef>
-        </p:style>
-        <p:txBody>
-          <a:bodyPr rtlCol="0" anchor="ctr"/>
-          <a:lstStyle/>
-          <a:p>
-            <a:pPr algn="ctr"/>
-          </a:p>
-        </p:txBody>
-      </p:sp>
-      <p:sp>
-        <p:nvSpPr>
-          <p:cNvPr id="19" name="TextBox 18"/>
-          <p:cNvSpPr txBox="1"/>
-          <p:nvPr/>
-        </p:nvSpPr>
-        <p:spPr>
-          <a:xfrm>
-            <a:off x="1000000" y="4400000"/>
-            <a:ext cx="10400000" cy="650000"/>
-          </a:xfrm>
-          <a:prstGeom prst="rect">
-            <a:avLst/>
-          </a:prstGeom>
-          <a:noFill/>
-        </p:spPr>
-        <p:txBody>
-          <a:bodyPr wrap="square" anchor="ctr">
-            <a:spAutoFit/>
-          </a:bodyPr>
-          <a:lstStyle/>
-          <a:p>
-            <a:pPr algn="l"/>
-            <a:r>
-              <a:rPr sz="1300" b="0">
-                <a:solidFill>
-                  <a:srgbClr val="333333"/>
-                </a:solidFill>
-                <a:latin typeface="Open Sans"/>
-                <a:ea typeface="Open Sans"/>
-                <a:cs typeface="Open Sans"/>
-              </a:rPr>
-              <a:t>Синяки на животе — признак скрытой травмы</a:t>
-            </a:r>
-          </a:p>
-        </p:txBody>
-      </p:sp>
-      <p:sp>
-        <p:nvSpPr>
-          <p:cNvPr id="20" name="Rectangle 19"/>
-          <p:cNvSpPr/>
-          <p:nvPr/>
-        </p:nvSpPr>
-        <p:spPr>
-          <a:xfrm>
-            <a:off x="700000" y="5250000"/>
-            <a:ext cx="11000000" cy="850000"/>
-          </a:xfrm>
-          <a:prstGeom prst="rect">
-            <a:avLst/>
-          </a:prstGeom>
-          <a:solidFill>
-            <a:srgbClr val="FFFFFF"/>
-          </a:solidFill>
-          <a:ln w="12700">
-            <a:solidFill>
-              <a:srgbClr val="999999"/>
-            </a:solidFill>
-          </a:ln>
-        </p:spPr>
-        <p:style>
-          <a:lnRef idx="1">
-            <a:schemeClr val="accent1"/>
-          </a:lnRef>
-          <a:fillRef idx="3">
-            <a:schemeClr val="accent1"/>
-          </a:fillRef>
-          <a:effectRef idx="2">
-            <a:schemeClr val="accent1"/>
-          </a:effectRef>
-          <a:fontRef idx="minor">
-            <a:schemeClr val="lt1"/>
-          </a:fontRef>
-        </p:style>
-        <p:txBody>
-          <a:bodyPr rtlCol="0" anchor="ctr"/>
-          <a:lstStyle/>
-          <a:p>
-            <a:pPr algn="ctr"/>
-          </a:p>
-        </p:txBody>
-      </p:sp>
-      <p:sp>
-        <p:nvSpPr>
-          <p:cNvPr id="21" name="Rectangle 20"/>
-          <p:cNvSpPr/>
-          <p:nvPr/>
-        </p:nvSpPr>
-        <p:spPr>
-          <a:xfrm>
-            <a:off x="700000" y="5250000"/>
-            <a:ext cx="90000" cy="850000"/>
-          </a:xfrm>
-          <a:prstGeom prst="rect">
-            <a:avLst/>
-          </a:prstGeom>
-          <a:solidFill>
-            <a:srgbClr val="CC0000"/>
-          </a:solidFill>
-          <a:ln>
-            <a:noFill/>
-          </a:ln>
-        </p:spPr>
-        <p:style>
-          <a:lnRef idx="1">
-            <a:schemeClr val="accent1"/>
-          </a:lnRef>
-          <a:fillRef idx="3">
-            <a:schemeClr val="accent1"/>
-          </a:fillRef>
-          <a:effectRef idx="2">
-            <a:schemeClr val="accent1"/>
-          </a:effectRef>
-          <a:fontRef idx="minor">
-            <a:schemeClr val="lt1"/>
-          </a:fontRef>
-        </p:style>
-        <p:txBody>
-          <a:bodyPr rtlCol="0" anchor="ctr"/>
-          <a:lstStyle/>
-          <a:p>
-            <a:pPr algn="ctr"/>
-          </a:p>
-        </p:txBody>
-      </p:sp>
-      <p:sp>
-        <p:nvSpPr>
-          <p:cNvPr id="22" name="TextBox 21"/>
-          <p:cNvSpPr txBox="1"/>
-          <p:nvPr/>
-        </p:nvSpPr>
-        <p:spPr>
-          <a:xfrm>
-            <a:off x="1000000" y="5350000"/>
-            <a:ext cx="10400000" cy="650000"/>
-          </a:xfrm>
-          <a:prstGeom prst="rect">
-            <a:avLst/>
-          </a:prstGeom>
-          <a:noFill/>
-        </p:spPr>
-        <p:txBody>
-          <a:bodyPr wrap="square" anchor="ctr">
-            <a:spAutoFit/>
-          </a:bodyPr>
-          <a:lstStyle/>
-          <a:p>
-            <a:pPr algn="l"/>
-            <a:r>
-              <a:rPr sz="1300" b="0">
-                <a:solidFill>
-                  <a:srgbClr val="333333"/>
-                </a:solidFill>
-                <a:latin typeface="Open Sans"/>
-                <a:ea typeface="Open Sans"/>
-                <a:cs typeface="Open Sans"/>
-              </a:rPr>
-              <a:t>Спрашивайте, где и как болит</a:t>
+              <a:t>Затрудненное дыхание, открытая рана груди и нарастающая синюшность требуют немедленных действий.</a:t>
             </a:r>
           </a:p>
         </p:txBody>
@@ -8477,7 +11847,7 @@
                 <a:ea typeface="Open Sans"/>
                 <a:cs typeface="Open Sans"/>
               </a:rPr>
-              <a:t>ПАМЯТКА</a:t>
+              <a:t>СПИНА: ПАЛЬПАЦИЯ БЕЗ ОПАСНОГО ПОВОРОТА</a:t>
             </a:r>
           </a:p>
         </p:txBody>
@@ -8642,30 +12012,199 @@
           </a:p>
         </p:txBody>
       </p:sp>
-      <p:pic>
-        <p:nvPicPr>
-          <p:cNvPr id="8" name="Picture 7" descr="pamyatka-tema4-podrobnyy-osmotr-16x9.png"/>
-          <p:cNvPicPr>
-            <a:picLocks noChangeAspect="1"/>
-          </p:cNvPicPr>
-          <p:nvPr/>
-        </p:nvPicPr>
-        <p:blipFill>
-          <a:blip r:embed="rId2"/>
-          <a:stretch>
-            <a:fillRect/>
-          </a:stretch>
-        </p:blipFill>
-        <p:spPr>
-          <a:xfrm>
-            <a:off x="2300000" y="1400000"/>
-            <a:ext cx="7800000" cy="5200000"/>
-          </a:xfrm>
-          <a:prstGeom prst="rect">
-            <a:avLst/>
-          </a:prstGeom>
-        </p:spPr>
-      </p:pic>
+      <p:sp>
+        <p:nvSpPr>
+          <p:cNvPr id="8" name="TextBox 7"/>
+          <p:cNvSpPr txBox="1"/>
+          <p:nvPr/>
+        </p:nvSpPr>
+        <p:spPr>
+          <a:xfrm>
+            <a:off x="700000" y="1450000"/>
+            <a:ext cx="11000000" cy="4000000"/>
+          </a:xfrm>
+          <a:prstGeom prst="rect">
+            <a:avLst/>
+          </a:prstGeom>
+          <a:noFill/>
+        </p:spPr>
+        <p:txBody>
+          <a:bodyPr wrap="square">
+            <a:spAutoFit/>
+          </a:bodyPr>
+          <a:lstStyle/>
+          <a:p>
+            <a:pPr algn="l">
+              <a:spcAft>
+                <a:spcPts val="800"/>
+              </a:spcAft>
+            </a:pPr>
+            <a:r>
+              <a:rPr sz="1400" b="0">
+                <a:solidFill>
+                  <a:srgbClr val="333333"/>
+                </a:solidFill>
+                <a:latin typeface="Open Sans"/>
+                <a:ea typeface="Open Sans"/>
+                <a:cs typeface="Open Sans"/>
+              </a:rPr>
+              <a:t>•  Не поворачивайте пострадавшего только ради осмотра спины.</a:t>
+            </a:r>
+          </a:p>
+          <a:p>
+            <a:pPr algn="l">
+              <a:spcAft>
+                <a:spcPts val="800"/>
+              </a:spcAft>
+            </a:pPr>
+            <a:r>
+              <a:rPr sz="1400" b="0">
+                <a:solidFill>
+                  <a:srgbClr val="333333"/>
+                </a:solidFill>
+                <a:latin typeface="Open Sans"/>
+                <a:ea typeface="Open Sans"/>
+                <a:cs typeface="Open Sans"/>
+              </a:rPr>
+              <a:t>•  Если положение и состояние позволяют, проведите ладонями под спиной.</a:t>
+            </a:r>
+          </a:p>
+          <a:p>
+            <a:pPr algn="l">
+              <a:spcAft>
+                <a:spcPts val="800"/>
+              </a:spcAft>
+            </a:pPr>
+            <a:r>
+              <a:rPr sz="1400" b="0">
+                <a:solidFill>
+                  <a:srgbClr val="333333"/>
+                </a:solidFill>
+                <a:latin typeface="Open Sans"/>
+                <a:ea typeface="Open Sans"/>
+                <a:cs typeface="Open Sans"/>
+              </a:rPr>
+              <a:t>•  Последовательно прощупайте доступные участки от плеч к пояснице.</a:t>
+            </a:r>
+          </a:p>
+          <a:p>
+            <a:pPr algn="l">
+              <a:spcAft>
+                <a:spcPts val="800"/>
+              </a:spcAft>
+            </a:pPr>
+            <a:r>
+              <a:rPr sz="1400" b="0">
+                <a:solidFill>
+                  <a:srgbClr val="333333"/>
+                </a:solidFill>
+                <a:latin typeface="Open Sans"/>
+                <a:ea typeface="Open Sans"/>
+                <a:cs typeface="Open Sans"/>
+              </a:rPr>
+              <a:t>•  Ищите кровь, влажность, неровность, деформацию и локальную боль.</a:t>
+            </a:r>
+          </a:p>
+          <a:p>
+            <a:pPr algn="l">
+              <a:spcAft>
+                <a:spcPts val="800"/>
+              </a:spcAft>
+            </a:pPr>
+            <a:r>
+              <a:rPr sz="1400" b="0">
+                <a:solidFill>
+                  <a:srgbClr val="333333"/>
+                </a:solidFill>
+                <a:latin typeface="Open Sans"/>
+                <a:ea typeface="Open Sans"/>
+                <a:cs typeface="Open Sans"/>
+              </a:rPr>
+              <a:t>•  При вынужденном повороте поддерживайте голову, шею и туловище как единое целое.</a:t>
+            </a:r>
+          </a:p>
+        </p:txBody>
+      </p:sp>
+      <p:sp>
+        <p:nvSpPr>
+          <p:cNvPr id="9" name="Rounded Rectangle 8"/>
+          <p:cNvSpPr/>
+          <p:nvPr/>
+        </p:nvSpPr>
+        <p:spPr>
+          <a:xfrm>
+            <a:off x="700000" y="5600000"/>
+            <a:ext cx="11000000" cy="1000000"/>
+          </a:xfrm>
+          <a:prstGeom prst="roundRect">
+            <a:avLst/>
+          </a:prstGeom>
+          <a:solidFill>
+            <a:srgbClr val="F5F0E1"/>
+          </a:solidFill>
+          <a:ln>
+            <a:noFill/>
+          </a:ln>
+        </p:spPr>
+        <p:style>
+          <a:lnRef idx="1">
+            <a:schemeClr val="accent1"/>
+          </a:lnRef>
+          <a:fillRef idx="3">
+            <a:schemeClr val="accent1"/>
+          </a:fillRef>
+          <a:effectRef idx="2">
+            <a:schemeClr val="accent1"/>
+          </a:effectRef>
+          <a:fontRef idx="minor">
+            <a:schemeClr val="lt1"/>
+          </a:fontRef>
+        </p:style>
+        <p:txBody>
+          <a:bodyPr rtlCol="0" anchor="ctr"/>
+          <a:lstStyle/>
+          <a:p>
+            <a:pPr algn="ctr"/>
+          </a:p>
+        </p:txBody>
+      </p:sp>
+      <p:sp>
+        <p:nvSpPr>
+          <p:cNvPr id="10" name="TextBox 9"/>
+          <p:cNvSpPr txBox="1"/>
+          <p:nvPr/>
+        </p:nvSpPr>
+        <p:spPr>
+          <a:xfrm>
+            <a:off x="950000" y="5800000"/>
+            <a:ext cx="10500000" cy="600000"/>
+          </a:xfrm>
+          <a:prstGeom prst="rect">
+            <a:avLst/>
+          </a:prstGeom>
+          <a:noFill/>
+        </p:spPr>
+        <p:txBody>
+          <a:bodyPr wrap="square" anchor="ctr">
+            <a:spAutoFit/>
+          </a:bodyPr>
+          <a:lstStyle/>
+          <a:p>
+            <a:pPr algn="l"/>
+            <a:r>
+              <a:rPr sz="1200" b="0">
+                <a:solidFill>
+                  <a:srgbClr val="333333"/>
+                </a:solidFill>
+                <a:latin typeface="Open Sans"/>
+                <a:ea typeface="Open Sans"/>
+                <a:cs typeface="Open Sans"/>
+              </a:rPr>
+              <a:t>При подозрении на травму позвоночника перемещение выполняют только по жизненным показаниям или силами нескольких помощников.</a:t>
+            </a:r>
+          </a:p>
+        </p:txBody>
+      </p:sp>
     </p:spTree>
   </p:cSld>
   <p:clrMapOvr>
